--- a/CalendarioAgo2026/presentaciones/10_Matrices.pptx
+++ b/CalendarioAgo2026/presentaciones/10_Matrices.pptx
@@ -5,7 +5,7 @@
     <p:sldMasterId id="2147483648" r:id="rId1"/>
   </p:sldMasterIdLst>
   <p:notesMasterIdLst>
-    <p:notesMasterId r:id="rId21"/>
+    <p:notesMasterId r:id="rId15"/>
   </p:notesMasterIdLst>
   <p:sldIdLst>
     <p:sldId id="257" r:id="rId2"/>
@@ -20,13 +20,7 @@
     <p:sldId id="622" r:id="rId11"/>
     <p:sldId id="746" r:id="rId12"/>
     <p:sldId id="262" r:id="rId13"/>
-    <p:sldId id="275" r:id="rId14"/>
-    <p:sldId id="276" r:id="rId15"/>
-    <p:sldId id="277" r:id="rId16"/>
-    <p:sldId id="278" r:id="rId17"/>
-    <p:sldId id="311" r:id="rId18"/>
-    <p:sldId id="312" r:id="rId19"/>
-    <p:sldId id="282" r:id="rId20"/>
+    <p:sldId id="282" r:id="rId14"/>
   </p:sldIdLst>
   <p:sldSz cx="9144000" cy="6858000" type="screen4x3"/>
   <p:notesSz cx="6858000" cy="9144000"/>
@@ -144,6 +138,155 @@
 </p:presentation>
 </file>
 
+<file path=ppt/revisionInfo.xml><?xml version="1.0" encoding="utf-8"?>
+<p1510:revInfo xmlns:a="http://schemas.openxmlformats.org/drawingml/2006/main" xmlns:r="http://schemas.openxmlformats.org/officeDocument/2006/relationships" xmlns:p1510="http://schemas.microsoft.com/office/powerpoint/2015/10/main">
+  <p1510:revLst>
+    <p1510:client id="{4AEE9260-B54E-4CF7-B1AA-368FD7AC92AB}" v="2" dt="2026-08-07T01:08:41.870"/>
+  </p1510:revLst>
+</p1510:revInfo>
+</file>
+
+<file path=ppt/changesInfos/changesInfo1.xml><?xml version="1.0" encoding="utf-8"?>
+<pc:chgInfo xmlns:a="http://schemas.openxmlformats.org/drawingml/2006/main" xmlns:r="http://schemas.openxmlformats.org/officeDocument/2006/relationships" xmlns:ac="http://schemas.microsoft.com/office/drawing/2013/main/command" xmlns:pc="http://schemas.microsoft.com/office/powerpoint/2013/main/command">
+  <pc:docChgLst>
+    <pc:chgData name="Lizethe Pérez Fuertes" userId="4ae9ef87-2a7d-42f8-8dfa-0a501a9e2ff4" providerId="ADAL" clId="{FDDD45CB-1330-4033-A842-3D2746AFF7C7}"/>
+    <pc:docChg chg="undo custSel delSld modSld">
+      <pc:chgData name="Lizethe Pérez Fuertes" userId="4ae9ef87-2a7d-42f8-8dfa-0a501a9e2ff4" providerId="ADAL" clId="{FDDD45CB-1330-4033-A842-3D2746AFF7C7}" dt="2026-08-07T01:11:59.411" v="32" actId="207"/>
+      <pc:docMkLst>
+        <pc:docMk/>
+      </pc:docMkLst>
+      <pc:sldChg chg="addSp delSp modSp mod">
+        <pc:chgData name="Lizethe Pérez Fuertes" userId="4ae9ef87-2a7d-42f8-8dfa-0a501a9e2ff4" providerId="ADAL" clId="{FDDD45CB-1330-4033-A842-3D2746AFF7C7}" dt="2026-08-07T01:09:36.961" v="14" actId="478"/>
+        <pc:sldMkLst>
+          <pc:docMk/>
+          <pc:sldMk cId="1182132109" sldId="257"/>
+        </pc:sldMkLst>
+        <pc:spChg chg="add del mod">
+          <ac:chgData name="Lizethe Pérez Fuertes" userId="4ae9ef87-2a7d-42f8-8dfa-0a501a9e2ff4" providerId="ADAL" clId="{FDDD45CB-1330-4033-A842-3D2746AFF7C7}" dt="2026-08-07T01:08:41.259" v="2"/>
+          <ac:spMkLst>
+            <pc:docMk/>
+            <pc:sldMk cId="1182132109" sldId="257"/>
+            <ac:spMk id="2" creationId="{331BD7D6-776D-2766-4496-607BC2EC12B4}"/>
+          </ac:spMkLst>
+        </pc:spChg>
+        <pc:spChg chg="add del">
+          <ac:chgData name="Lizethe Pérez Fuertes" userId="4ae9ef87-2a7d-42f8-8dfa-0a501a9e2ff4" providerId="ADAL" clId="{FDDD45CB-1330-4033-A842-3D2746AFF7C7}" dt="2026-08-07T01:09:36.961" v="14" actId="478"/>
+          <ac:spMkLst>
+            <pc:docMk/>
+            <pc:sldMk cId="1182132109" sldId="257"/>
+            <ac:spMk id="3" creationId="{00000000-0000-0000-0000-000000000000}"/>
+          </ac:spMkLst>
+        </pc:spChg>
+        <pc:spChg chg="del">
+          <ac:chgData name="Lizethe Pérez Fuertes" userId="4ae9ef87-2a7d-42f8-8dfa-0a501a9e2ff4" providerId="ADAL" clId="{FDDD45CB-1330-4033-A842-3D2746AFF7C7}" dt="2026-08-07T01:08:51.237" v="5" actId="478"/>
+          <ac:spMkLst>
+            <pc:docMk/>
+            <pc:sldMk cId="1182132109" sldId="257"/>
+            <ac:spMk id="5" creationId="{83DC0A6A-611B-4B31-9C3C-4EEBD18EF1BA}"/>
+          </ac:spMkLst>
+        </pc:spChg>
+        <pc:spChg chg="add mod">
+          <ac:chgData name="Lizethe Pérez Fuertes" userId="4ae9ef87-2a7d-42f8-8dfa-0a501a9e2ff4" providerId="ADAL" clId="{FDDD45CB-1330-4033-A842-3D2746AFF7C7}" dt="2026-08-07T01:09:25.907" v="12" actId="1037"/>
+          <ac:spMkLst>
+            <pc:docMk/>
+            <pc:sldMk cId="1182132109" sldId="257"/>
+            <ac:spMk id="6" creationId="{EC4224C7-9398-570F-61FE-4CD55A0121B5}"/>
+          </ac:spMkLst>
+        </pc:spChg>
+        <pc:spChg chg="add del mod">
+          <ac:chgData name="Lizethe Pérez Fuertes" userId="4ae9ef87-2a7d-42f8-8dfa-0a501a9e2ff4" providerId="ADAL" clId="{FDDD45CB-1330-4033-A842-3D2746AFF7C7}" dt="2026-08-07T01:09:01.154" v="7" actId="478"/>
+          <ac:spMkLst>
+            <pc:docMk/>
+            <pc:sldMk cId="1182132109" sldId="257"/>
+            <ac:spMk id="8" creationId="{FAC01AD4-3318-35C9-9E3D-17476594D092}"/>
+          </ac:spMkLst>
+        </pc:spChg>
+        <pc:spChg chg="add del mod">
+          <ac:chgData name="Lizethe Pérez Fuertes" userId="4ae9ef87-2a7d-42f8-8dfa-0a501a9e2ff4" providerId="ADAL" clId="{FDDD45CB-1330-4033-A842-3D2746AFF7C7}" dt="2026-08-07T01:09:36.961" v="14" actId="478"/>
+          <ac:spMkLst>
+            <pc:docMk/>
+            <pc:sldMk cId="1182132109" sldId="257"/>
+            <ac:spMk id="10" creationId="{890A4D4F-3E7C-94E7-DA67-7E34AE20D28E}"/>
+          </ac:spMkLst>
+        </pc:spChg>
+      </pc:sldChg>
+      <pc:sldChg chg="modSp mod">
+        <pc:chgData name="Lizethe Pérez Fuertes" userId="4ae9ef87-2a7d-42f8-8dfa-0a501a9e2ff4" providerId="ADAL" clId="{FDDD45CB-1330-4033-A842-3D2746AFF7C7}" dt="2026-08-07T01:11:32.500" v="31" actId="20577"/>
+        <pc:sldMkLst>
+          <pc:docMk/>
+          <pc:sldMk cId="3355126383" sldId="259"/>
+        </pc:sldMkLst>
+        <pc:spChg chg="mod">
+          <ac:chgData name="Lizethe Pérez Fuertes" userId="4ae9ef87-2a7d-42f8-8dfa-0a501a9e2ff4" providerId="ADAL" clId="{FDDD45CB-1330-4033-A842-3D2746AFF7C7}" dt="2026-08-07T01:11:32.500" v="31" actId="20577"/>
+          <ac:spMkLst>
+            <pc:docMk/>
+            <pc:sldMk cId="3355126383" sldId="259"/>
+            <ac:spMk id="4099" creationId="{00000000-0000-0000-0000-000000000000}"/>
+          </ac:spMkLst>
+        </pc:spChg>
+      </pc:sldChg>
+      <pc:sldChg chg="modSp mod">
+        <pc:chgData name="Lizethe Pérez Fuertes" userId="4ae9ef87-2a7d-42f8-8dfa-0a501a9e2ff4" providerId="ADAL" clId="{FDDD45CB-1330-4033-A842-3D2746AFF7C7}" dt="2026-08-07T01:11:59.411" v="32" actId="207"/>
+        <pc:sldMkLst>
+          <pc:docMk/>
+          <pc:sldMk cId="3325994410" sldId="260"/>
+        </pc:sldMkLst>
+        <pc:spChg chg="mod">
+          <ac:chgData name="Lizethe Pérez Fuertes" userId="4ae9ef87-2a7d-42f8-8dfa-0a501a9e2ff4" providerId="ADAL" clId="{FDDD45CB-1330-4033-A842-3D2746AFF7C7}" dt="2026-08-07T01:11:59.411" v="32" actId="207"/>
+          <ac:spMkLst>
+            <pc:docMk/>
+            <pc:sldMk cId="3325994410" sldId="260"/>
+            <ac:spMk id="5122" creationId="{00000000-0000-0000-0000-000000000000}"/>
+          </ac:spMkLst>
+        </pc:spChg>
+      </pc:sldChg>
+      <pc:sldChg chg="del">
+        <pc:chgData name="Lizethe Pérez Fuertes" userId="4ae9ef87-2a7d-42f8-8dfa-0a501a9e2ff4" providerId="ADAL" clId="{FDDD45CB-1330-4033-A842-3D2746AFF7C7}" dt="2026-08-07T01:10:46.515" v="16" actId="47"/>
+        <pc:sldMkLst>
+          <pc:docMk/>
+          <pc:sldMk cId="60573319" sldId="275"/>
+        </pc:sldMkLst>
+      </pc:sldChg>
+      <pc:sldChg chg="del">
+        <pc:chgData name="Lizethe Pérez Fuertes" userId="4ae9ef87-2a7d-42f8-8dfa-0a501a9e2ff4" providerId="ADAL" clId="{FDDD45CB-1330-4033-A842-3D2746AFF7C7}" dt="2026-08-07T01:10:40.609" v="15" actId="47"/>
+        <pc:sldMkLst>
+          <pc:docMk/>
+          <pc:sldMk cId="3781235135" sldId="276"/>
+        </pc:sldMkLst>
+      </pc:sldChg>
+      <pc:sldChg chg="del">
+        <pc:chgData name="Lizethe Pérez Fuertes" userId="4ae9ef87-2a7d-42f8-8dfa-0a501a9e2ff4" providerId="ADAL" clId="{FDDD45CB-1330-4033-A842-3D2746AFF7C7}" dt="2026-08-07T01:10:40.609" v="15" actId="47"/>
+        <pc:sldMkLst>
+          <pc:docMk/>
+          <pc:sldMk cId="720340203" sldId="277"/>
+        </pc:sldMkLst>
+      </pc:sldChg>
+      <pc:sldChg chg="del">
+        <pc:chgData name="Lizethe Pérez Fuertes" userId="4ae9ef87-2a7d-42f8-8dfa-0a501a9e2ff4" providerId="ADAL" clId="{FDDD45CB-1330-4033-A842-3D2746AFF7C7}" dt="2026-08-07T01:10:50.183" v="17" actId="47"/>
+        <pc:sldMkLst>
+          <pc:docMk/>
+          <pc:sldMk cId="798083237" sldId="278"/>
+        </pc:sldMkLst>
+      </pc:sldChg>
+      <pc:sldChg chg="del">
+        <pc:chgData name="Lizethe Pérez Fuertes" userId="4ae9ef87-2a7d-42f8-8dfa-0a501a9e2ff4" providerId="ADAL" clId="{FDDD45CB-1330-4033-A842-3D2746AFF7C7}" dt="2026-08-07T01:11:12.920" v="19" actId="47"/>
+        <pc:sldMkLst>
+          <pc:docMk/>
+          <pc:sldMk cId="812640651" sldId="311"/>
+        </pc:sldMkLst>
+      </pc:sldChg>
+      <pc:sldChg chg="del">
+        <pc:chgData name="Lizethe Pérez Fuertes" userId="4ae9ef87-2a7d-42f8-8dfa-0a501a9e2ff4" providerId="ADAL" clId="{FDDD45CB-1330-4033-A842-3D2746AFF7C7}" dt="2026-08-07T01:10:53.763" v="18" actId="47"/>
+        <pc:sldMkLst>
+          <pc:docMk/>
+          <pc:sldMk cId="3713659776" sldId="312"/>
+        </pc:sldMkLst>
+      </pc:sldChg>
+    </pc:docChg>
+  </pc:docChgLst>
+</pc:chgInfo>
+</file>
+
 <file path=ppt/notesMasters/notesMaster1.xml><?xml version="1.0" encoding="utf-8"?>
 <p:notesMaster xmlns:a="http://schemas.openxmlformats.org/drawingml/2006/main" xmlns:r="http://schemas.openxmlformats.org/officeDocument/2006/relationships" xmlns:p="http://schemas.openxmlformats.org/presentationml/2006/main">
   <p:cSld>
@@ -226,7 +369,7 @@
           <a:p>
             <a:fld id="{9CE7A054-6D4F-4ED4-B3E7-62AC408CF793}" type="datetimeFigureOut">
               <a:rPr lang="es-MX" smtClean="0"/>
-              <a:t>04/09/2024</a:t>
+              <a:t>06/08/2026</a:t>
             </a:fld>
             <a:endParaRPr lang="es-MX"/>
           </a:p>
@@ -385,7 +528,7 @@
           <a:p>
             <a:fld id="{9C4A5C2F-87B0-4382-B452-9CF1E6F7248D}" type="slidenum">
               <a:rPr lang="es-MX" smtClean="0"/>
-              <a:t>‹#›</a:t>
+              <a:t>‹Nº›</a:t>
             </a:fld>
             <a:endParaRPr lang="es-MX"/>
           </a:p>
@@ -578,90 +721,6 @@
 </p:notes>
 </file>
 
-<file path=ppt/notesSlides/notesSlide10.xml><?xml version="1.0" encoding="utf-8"?>
-<p:notes xmlns:a="http://schemas.openxmlformats.org/drawingml/2006/main" xmlns:r="http://schemas.openxmlformats.org/officeDocument/2006/relationships" xmlns:p="http://schemas.openxmlformats.org/presentationml/2006/main">
-  <p:cSld>
-    <p:spTree>
-      <p:nvGrpSpPr>
-        <p:cNvPr id="1" name=""/>
-        <p:cNvGrpSpPr/>
-        <p:nvPr/>
-      </p:nvGrpSpPr>
-      <p:grpSpPr>
-        <a:xfrm>
-          <a:off x="0" y="0"/>
-          <a:ext cx="0" cy="0"/>
-          <a:chOff x="0" y="0"/>
-          <a:chExt cx="0" cy="0"/>
-        </a:xfrm>
-      </p:grpSpPr>
-      <p:sp>
-        <p:nvSpPr>
-          <p:cNvPr id="2" name="Marcador de imagen de diapositiva 1"/>
-          <p:cNvSpPr>
-            <a:spLocks noGrp="1" noRot="1" noChangeAspect="1"/>
-          </p:cNvSpPr>
-          <p:nvPr>
-            <p:ph type="sldImg"/>
-          </p:nvPr>
-        </p:nvSpPr>
-        <p:spPr/>
-      </p:sp>
-      <p:sp>
-        <p:nvSpPr>
-          <p:cNvPr id="3" name="Marcador de notas 2"/>
-          <p:cNvSpPr>
-            <a:spLocks noGrp="1"/>
-          </p:cNvSpPr>
-          <p:nvPr>
-            <p:ph type="body" idx="1"/>
-          </p:nvPr>
-        </p:nvSpPr>
-        <p:spPr/>
-        <p:txBody>
-          <a:bodyPr/>
-          <a:lstStyle/>
-          <a:p>
-            <a:endParaRPr lang="es-MX" dirty="0"/>
-          </a:p>
-        </p:txBody>
-      </p:sp>
-      <p:sp>
-        <p:nvSpPr>
-          <p:cNvPr id="4" name="Marcador de número de diapositiva 3"/>
-          <p:cNvSpPr>
-            <a:spLocks noGrp="1"/>
-          </p:cNvSpPr>
-          <p:nvPr>
-            <p:ph type="sldNum" sz="quarter" idx="5"/>
-          </p:nvPr>
-        </p:nvSpPr>
-        <p:spPr/>
-        <p:txBody>
-          <a:bodyPr/>
-          <a:lstStyle/>
-          <a:p>
-            <a:fld id="{9C4A5C2F-87B0-4382-B452-9CF1E6F7248D}" type="slidenum">
-              <a:rPr lang="es-MX" smtClean="0"/>
-              <a:t>16</a:t>
-            </a:fld>
-            <a:endParaRPr lang="es-MX"/>
-          </a:p>
-        </p:txBody>
-      </p:sp>
-    </p:spTree>
-    <p:extLst>
-      <p:ext uri="{BB962C8B-B14F-4D97-AF65-F5344CB8AC3E}">
-        <p14:creationId xmlns:p14="http://schemas.microsoft.com/office/powerpoint/2010/main" val="2514411754"/>
-      </p:ext>
-    </p:extLst>
-  </p:cSld>
-  <p:clrMapOvr>
-    <a:masterClrMapping/>
-  </p:clrMapOvr>
-</p:notes>
-</file>
-
 <file path=ppt/notesSlides/notesSlide2.xml><?xml version="1.0" encoding="utf-8"?>
 <p:notes xmlns:a="http://schemas.openxmlformats.org/drawingml/2006/main" xmlns:r="http://schemas.openxmlformats.org/officeDocument/2006/relationships" xmlns:p="http://schemas.openxmlformats.org/presentationml/2006/main">
   <p:cSld>
@@ -1250,90 +1309,6 @@
 </p:notes>
 </file>
 
-<file path=ppt/notesSlides/notesSlide9.xml><?xml version="1.0" encoding="utf-8"?>
-<p:notes xmlns:a="http://schemas.openxmlformats.org/drawingml/2006/main" xmlns:r="http://schemas.openxmlformats.org/officeDocument/2006/relationships" xmlns:p="http://schemas.openxmlformats.org/presentationml/2006/main">
-  <p:cSld>
-    <p:spTree>
-      <p:nvGrpSpPr>
-        <p:cNvPr id="1" name=""/>
-        <p:cNvGrpSpPr/>
-        <p:nvPr/>
-      </p:nvGrpSpPr>
-      <p:grpSpPr>
-        <a:xfrm>
-          <a:off x="0" y="0"/>
-          <a:ext cx="0" cy="0"/>
-          <a:chOff x="0" y="0"/>
-          <a:chExt cx="0" cy="0"/>
-        </a:xfrm>
-      </p:grpSpPr>
-      <p:sp>
-        <p:nvSpPr>
-          <p:cNvPr id="2" name="Marcador de imagen de diapositiva 1"/>
-          <p:cNvSpPr>
-            <a:spLocks noGrp="1" noRot="1" noChangeAspect="1"/>
-          </p:cNvSpPr>
-          <p:nvPr>
-            <p:ph type="sldImg"/>
-          </p:nvPr>
-        </p:nvSpPr>
-        <p:spPr/>
-      </p:sp>
-      <p:sp>
-        <p:nvSpPr>
-          <p:cNvPr id="3" name="Marcador de notas 2"/>
-          <p:cNvSpPr>
-            <a:spLocks noGrp="1"/>
-          </p:cNvSpPr>
-          <p:nvPr>
-            <p:ph type="body" idx="1"/>
-          </p:nvPr>
-        </p:nvSpPr>
-        <p:spPr/>
-        <p:txBody>
-          <a:bodyPr/>
-          <a:lstStyle/>
-          <a:p>
-            <a:endParaRPr lang="es-MX" dirty="0"/>
-          </a:p>
-        </p:txBody>
-      </p:sp>
-      <p:sp>
-        <p:nvSpPr>
-          <p:cNvPr id="4" name="Marcador de número de diapositiva 3"/>
-          <p:cNvSpPr>
-            <a:spLocks noGrp="1"/>
-          </p:cNvSpPr>
-          <p:nvPr>
-            <p:ph type="sldNum" sz="quarter" idx="5"/>
-          </p:nvPr>
-        </p:nvSpPr>
-        <p:spPr/>
-        <p:txBody>
-          <a:bodyPr/>
-          <a:lstStyle/>
-          <a:p>
-            <a:fld id="{9C4A5C2F-87B0-4382-B452-9CF1E6F7248D}" type="slidenum">
-              <a:rPr lang="es-MX" smtClean="0"/>
-              <a:t>13</a:t>
-            </a:fld>
-            <a:endParaRPr lang="es-MX"/>
-          </a:p>
-        </p:txBody>
-      </p:sp>
-    </p:spTree>
-    <p:extLst>
-      <p:ext uri="{BB962C8B-B14F-4D97-AF65-F5344CB8AC3E}">
-        <p14:creationId xmlns:p14="http://schemas.microsoft.com/office/powerpoint/2010/main" val="4241124567"/>
-      </p:ext>
-    </p:extLst>
-  </p:cSld>
-  <p:clrMapOvr>
-    <a:masterClrMapping/>
-  </p:clrMapOvr>
-</p:notes>
-</file>
-
 <file path=ppt/slideLayouts/slideLayout1.xml><?xml version="1.0" encoding="utf-8"?>
 <p:sldLayout xmlns:a="http://schemas.openxmlformats.org/drawingml/2006/main" xmlns:r="http://schemas.openxmlformats.org/officeDocument/2006/relationships" xmlns:p="http://schemas.openxmlformats.org/presentationml/2006/main" type="title" preserve="1">
   <p:cSld name="Diapositiva de título">
@@ -1515,7 +1490,7 @@
           <a:p>
             <a:fld id="{05B1B184-8162-40A9-BCCC-182276235E4C}" type="datetimeFigureOut">
               <a:rPr lang="es-MX" smtClean="0"/>
-              <a:t>04/09/2024</a:t>
+              <a:t>06/08/2026</a:t>
             </a:fld>
             <a:endParaRPr lang="es-MX"/>
           </a:p>
@@ -1557,7 +1532,7 @@
           <a:p>
             <a:fld id="{53E33FAF-ABAD-49D1-A35B-BBEFD2E5CCCF}" type="slidenum">
               <a:rPr lang="es-MX" smtClean="0"/>
-              <a:t>‹#›</a:t>
+              <a:t>‹Nº›</a:t>
             </a:fld>
             <a:endParaRPr lang="es-MX"/>
           </a:p>
@@ -1685,7 +1660,7 @@
           <a:p>
             <a:fld id="{05B1B184-8162-40A9-BCCC-182276235E4C}" type="datetimeFigureOut">
               <a:rPr lang="es-MX" smtClean="0"/>
-              <a:t>04/09/2024</a:t>
+              <a:t>06/08/2026</a:t>
             </a:fld>
             <a:endParaRPr lang="es-MX"/>
           </a:p>
@@ -1727,7 +1702,7 @@
           <a:p>
             <a:fld id="{53E33FAF-ABAD-49D1-A35B-BBEFD2E5CCCF}" type="slidenum">
               <a:rPr lang="es-MX" smtClean="0"/>
-              <a:t>‹#›</a:t>
+              <a:t>‹Nº›</a:t>
             </a:fld>
             <a:endParaRPr lang="es-MX"/>
           </a:p>
@@ -1865,7 +1840,7 @@
           <a:p>
             <a:fld id="{05B1B184-8162-40A9-BCCC-182276235E4C}" type="datetimeFigureOut">
               <a:rPr lang="es-MX" smtClean="0"/>
-              <a:t>04/09/2024</a:t>
+              <a:t>06/08/2026</a:t>
             </a:fld>
             <a:endParaRPr lang="es-MX"/>
           </a:p>
@@ -1907,7 +1882,7 @@
           <a:p>
             <a:fld id="{53E33FAF-ABAD-49D1-A35B-BBEFD2E5CCCF}" type="slidenum">
               <a:rPr lang="es-MX" smtClean="0"/>
-              <a:t>‹#›</a:t>
+              <a:t>‹Nº›</a:t>
             </a:fld>
             <a:endParaRPr lang="es-MX"/>
           </a:p>
@@ -2018,7 +1993,7 @@
           <a:p>
             <a:fld id="{1D8BD707-D9CF-40AE-B4C6-C98DA3205C09}" type="datetimeFigureOut">
               <a:rPr lang="en-US" smtClean="0"/>
-              <a:t>9/4/2024</a:t>
+              <a:t>8/6/2026</a:t>
             </a:fld>
             <a:endParaRPr lang="en-US"/>
           </a:p>
@@ -2048,7 +2023,7 @@
                 <a:cs typeface="Calibri"/>
               </a:rPr>
               <a:pPr marL="25400"/>
-              <a:t>‹#›</a:t>
+              <a:t>‹Nº›</a:t>
             </a:fld>
             <a:endParaRPr lang="es-MX">
               <a:cs typeface="Calibri"/>
@@ -2178,7 +2153,7 @@
           <a:p>
             <a:fld id="{05B1B184-8162-40A9-BCCC-182276235E4C}" type="datetimeFigureOut">
               <a:rPr lang="es-MX" smtClean="0"/>
-              <a:t>04/09/2024</a:t>
+              <a:t>06/08/2026</a:t>
             </a:fld>
             <a:endParaRPr lang="es-MX"/>
           </a:p>
@@ -2220,7 +2195,7 @@
           <a:p>
             <a:fld id="{53E33FAF-ABAD-49D1-A35B-BBEFD2E5CCCF}" type="slidenum">
               <a:rPr lang="es-MX" smtClean="0"/>
-              <a:t>‹#›</a:t>
+              <a:t>‹Nº›</a:t>
             </a:fld>
             <a:endParaRPr lang="es-MX"/>
           </a:p>
@@ -2424,7 +2399,7 @@
           <a:p>
             <a:fld id="{05B1B184-8162-40A9-BCCC-182276235E4C}" type="datetimeFigureOut">
               <a:rPr lang="es-MX" smtClean="0"/>
-              <a:t>04/09/2024</a:t>
+              <a:t>06/08/2026</a:t>
             </a:fld>
             <a:endParaRPr lang="es-MX"/>
           </a:p>
@@ -2466,7 +2441,7 @@
           <a:p>
             <a:fld id="{53E33FAF-ABAD-49D1-A35B-BBEFD2E5CCCF}" type="slidenum">
               <a:rPr lang="es-MX" smtClean="0"/>
-              <a:t>‹#›</a:t>
+              <a:t>‹Nº›</a:t>
             </a:fld>
             <a:endParaRPr lang="es-MX"/>
           </a:p>
@@ -2712,7 +2687,7 @@
           <a:p>
             <a:fld id="{05B1B184-8162-40A9-BCCC-182276235E4C}" type="datetimeFigureOut">
               <a:rPr lang="es-MX" smtClean="0"/>
-              <a:t>04/09/2024</a:t>
+              <a:t>06/08/2026</a:t>
             </a:fld>
             <a:endParaRPr lang="es-MX"/>
           </a:p>
@@ -2754,7 +2729,7 @@
           <a:p>
             <a:fld id="{53E33FAF-ABAD-49D1-A35B-BBEFD2E5CCCF}" type="slidenum">
               <a:rPr lang="es-MX" smtClean="0"/>
-              <a:t>‹#›</a:t>
+              <a:t>‹Nº›</a:t>
             </a:fld>
             <a:endParaRPr lang="es-MX"/>
           </a:p>
@@ -3134,7 +3109,7 @@
           <a:p>
             <a:fld id="{05B1B184-8162-40A9-BCCC-182276235E4C}" type="datetimeFigureOut">
               <a:rPr lang="es-MX" smtClean="0"/>
-              <a:t>04/09/2024</a:t>
+              <a:t>06/08/2026</a:t>
             </a:fld>
             <a:endParaRPr lang="es-MX"/>
           </a:p>
@@ -3176,7 +3151,7 @@
           <a:p>
             <a:fld id="{53E33FAF-ABAD-49D1-A35B-BBEFD2E5CCCF}" type="slidenum">
               <a:rPr lang="es-MX" smtClean="0"/>
-              <a:t>‹#›</a:t>
+              <a:t>‹Nº›</a:t>
             </a:fld>
             <a:endParaRPr lang="es-MX"/>
           </a:p>
@@ -3252,7 +3227,7 @@
           <a:p>
             <a:fld id="{05B1B184-8162-40A9-BCCC-182276235E4C}" type="datetimeFigureOut">
               <a:rPr lang="es-MX" smtClean="0"/>
-              <a:t>04/09/2024</a:t>
+              <a:t>06/08/2026</a:t>
             </a:fld>
             <a:endParaRPr lang="es-MX"/>
           </a:p>
@@ -3294,7 +3269,7 @@
           <a:p>
             <a:fld id="{53E33FAF-ABAD-49D1-A35B-BBEFD2E5CCCF}" type="slidenum">
               <a:rPr lang="es-MX" smtClean="0"/>
-              <a:t>‹#›</a:t>
+              <a:t>‹Nº›</a:t>
             </a:fld>
             <a:endParaRPr lang="es-MX"/>
           </a:p>
@@ -3347,7 +3322,7 @@
           <a:p>
             <a:fld id="{05B1B184-8162-40A9-BCCC-182276235E4C}" type="datetimeFigureOut">
               <a:rPr lang="es-MX" smtClean="0"/>
-              <a:t>04/09/2024</a:t>
+              <a:t>06/08/2026</a:t>
             </a:fld>
             <a:endParaRPr lang="es-MX"/>
           </a:p>
@@ -3389,7 +3364,7 @@
           <a:p>
             <a:fld id="{53E33FAF-ABAD-49D1-A35B-BBEFD2E5CCCF}" type="slidenum">
               <a:rPr lang="es-MX" smtClean="0"/>
-              <a:t>‹#›</a:t>
+              <a:t>‹Nº›</a:t>
             </a:fld>
             <a:endParaRPr lang="es-MX"/>
           </a:p>
@@ -3624,7 +3599,7 @@
           <a:p>
             <a:fld id="{05B1B184-8162-40A9-BCCC-182276235E4C}" type="datetimeFigureOut">
               <a:rPr lang="es-MX" smtClean="0"/>
-              <a:t>04/09/2024</a:t>
+              <a:t>06/08/2026</a:t>
             </a:fld>
             <a:endParaRPr lang="es-MX"/>
           </a:p>
@@ -3666,7 +3641,7 @@
           <a:p>
             <a:fld id="{53E33FAF-ABAD-49D1-A35B-BBEFD2E5CCCF}" type="slidenum">
               <a:rPr lang="es-MX" smtClean="0"/>
-              <a:t>‹#›</a:t>
+              <a:t>‹Nº›</a:t>
             </a:fld>
             <a:endParaRPr lang="es-MX"/>
           </a:p>
@@ -3877,7 +3852,7 @@
           <a:p>
             <a:fld id="{05B1B184-8162-40A9-BCCC-182276235E4C}" type="datetimeFigureOut">
               <a:rPr lang="es-MX" smtClean="0"/>
-              <a:t>04/09/2024</a:t>
+              <a:t>06/08/2026</a:t>
             </a:fld>
             <a:endParaRPr lang="es-MX"/>
           </a:p>
@@ -3919,7 +3894,7 @@
           <a:p>
             <a:fld id="{53E33FAF-ABAD-49D1-A35B-BBEFD2E5CCCF}" type="slidenum">
               <a:rPr lang="es-MX" smtClean="0"/>
-              <a:t>‹#›</a:t>
+              <a:t>‹Nº›</a:t>
             </a:fld>
             <a:endParaRPr lang="es-MX"/>
           </a:p>
@@ -4090,7 +4065,7 @@
           <a:p>
             <a:fld id="{05B1B184-8162-40A9-BCCC-182276235E4C}" type="datetimeFigureOut">
               <a:rPr lang="es-MX" smtClean="0"/>
-              <a:t>04/09/2024</a:t>
+              <a:t>06/08/2026</a:t>
             </a:fld>
             <a:endParaRPr lang="es-MX"/>
           </a:p>
@@ -4168,7 +4143,7 @@
           <a:p>
             <a:fld id="{53E33FAF-ABAD-49D1-A35B-BBEFD2E5CCCF}" type="slidenum">
               <a:rPr lang="es-MX" smtClean="0"/>
-              <a:t>‹#›</a:t>
+              <a:t>‹Nº›</a:t>
             </a:fld>
             <a:endParaRPr lang="es-MX"/>
           </a:p>
@@ -4554,36 +4529,49 @@
       </p:pic>
       <p:sp>
         <p:nvSpPr>
-          <p:cNvPr id="5" name="Title 1">
+          <p:cNvPr id="6" name="Title 1">
             <a:extLst>
               <a:ext uri="{FF2B5EF4-FFF2-40B4-BE49-F238E27FC236}">
-                <a16:creationId xmlns:a16="http://schemas.microsoft.com/office/drawing/2014/main" id="{83DC0A6A-611B-4B31-9C3C-4EEBD18EF1BA}"/>
+                <a16:creationId xmlns:a16="http://schemas.microsoft.com/office/drawing/2014/main" id="{EC4224C7-9398-570F-61FE-4CD55A0121B5}"/>
               </a:ext>
             </a:extLst>
           </p:cNvPr>
-          <p:cNvSpPr>
-            <a:spLocks noGrp="1"/>
+          <p:cNvSpPr txBox="1">
+            <a:spLocks/>
           </p:cNvSpPr>
-          <p:nvPr>
-            <p:ph type="ctrTitle"/>
-          </p:nvPr>
+          <p:nvPr/>
         </p:nvSpPr>
         <p:spPr>
           <a:xfrm>
-            <a:off x="1006630" y="404664"/>
-            <a:ext cx="7669826" cy="1470025"/>
+            <a:off x="755576" y="404664"/>
+            <a:ext cx="7342584" cy="1470025"/>
           </a:xfrm>
+          <a:prstGeom prst="rect">
+            <a:avLst/>
+          </a:prstGeom>
         </p:spPr>
         <p:txBody>
-          <a:bodyPr rtlCol="0">
-            <a:normAutofit fontScale="90000"/>
+          <a:bodyPr vert="horz" lIns="91440" tIns="45720" rIns="91440" bIns="45720" rtlCol="0" anchor="ctr">
+            <a:normAutofit/>
           </a:bodyPr>
-          <a:lstStyle/>
-          <a:p>
-            <a:pPr algn="l" eaLnBrk="1" fontAlgn="auto" hangingPunct="1">
-              <a:spcAft>
-                <a:spcPts val="0"/>
-              </a:spcAft>
+          <a:lstStyle>
+            <a:lvl1pPr algn="ctr" defTabSz="914400" rtl="0" eaLnBrk="1" latinLnBrk="0" hangingPunct="1">
+              <a:spcBef>
+                <a:spcPct val="0"/>
+              </a:spcBef>
+              <a:buNone/>
+              <a:defRPr sz="4400" kern="1200">
+                <a:solidFill>
+                  <a:schemeClr val="tx1"/>
+                </a:solidFill>
+                <a:latin typeface="+mj-lt"/>
+                <a:ea typeface="+mj-ea"/>
+                <a:cs typeface="+mj-cs"/>
+              </a:defRPr>
+            </a:lvl1pPr>
+          </a:lstStyle>
+          <a:p>
+            <a:pPr algn="l">
               <a:defRPr/>
             </a:pPr>
             <a:r>
@@ -4594,7 +4582,7 @@
                   </a:schemeClr>
                 </a:solidFill>
               </a:rPr>
-              <a:t>TI 3001 C</a:t>
+              <a:t>TC 1037 </a:t>
             </a:r>
             <a:br>
               <a:rPr lang="es-MX" sz="3200" dirty="0">
@@ -4613,7 +4601,7 @@
                   </a:schemeClr>
                 </a:solidFill>
               </a:rPr>
-              <a:t>Analítica de datos y herramientas de inteligencia artificial</a:t>
+              <a:t>Pensamiento algorítmico</a:t>
             </a:r>
           </a:p>
         </p:txBody>
@@ -6424,6568 +6412,6 @@
       </p:grpSpPr>
       <p:sp>
         <p:nvSpPr>
-          <p:cNvPr id="233476" name="Text Box 4"/>
-          <p:cNvSpPr txBox="1">
-            <a:spLocks noChangeArrowheads="1"/>
-          </p:cNvSpPr>
-          <p:nvPr/>
-        </p:nvSpPr>
-        <p:spPr bwMode="auto">
-          <a:xfrm>
-            <a:off x="1255168" y="1599138"/>
-            <a:ext cx="6768752" cy="1685846"/>
-          </a:xfrm>
-          <a:prstGeom prst="rect">
-            <a:avLst/>
-          </a:prstGeom>
-          <a:noFill/>
-          <a:ln>
-            <a:noFill/>
-          </a:ln>
-          <a:effectLst/>
-          <a:extLst>
-            <a:ext uri="{909E8E84-426E-40DD-AFC4-6F175D3DCCD1}">
-              <a14:hiddenFill xmlns:a14="http://schemas.microsoft.com/office/drawing/2010/main">
-                <a:solidFill>
-                  <a:schemeClr val="accent1"/>
-                </a:solidFill>
-              </a14:hiddenFill>
-            </a:ext>
-            <a:ext uri="{91240B29-F687-4F45-9708-019B960494DF}">
-              <a14:hiddenLine xmlns:a14="http://schemas.microsoft.com/office/drawing/2010/main" w="12700">
-                <a:solidFill>
-                  <a:schemeClr val="tx1"/>
-                </a:solidFill>
-                <a:miter lim="800000"/>
-                <a:headEnd type="none" w="sm" len="sm"/>
-                <a:tailEnd type="none" w="sm" len="sm"/>
-              </a14:hiddenLine>
-            </a:ext>
-            <a:ext uri="{AF507438-7753-43E0-B8FC-AC1667EBCBE1}">
-              <a14:hiddenEffects xmlns:a14="http://schemas.microsoft.com/office/drawing/2010/main">
-                <a:effectLst>
-                  <a:outerShdw dist="35921" dir="2700000" algn="ctr" rotWithShape="0">
-                    <a:schemeClr val="bg2"/>
-                  </a:outerShdw>
-                </a:effectLst>
-              </a14:hiddenEffects>
-            </a:ext>
-          </a:extLst>
-        </p:spPr>
-        <p:txBody>
-          <a:bodyPr wrap="square">
-            <a:spAutoFit/>
-          </a:bodyPr>
-          <a:lstStyle>
-            <a:lvl1pPr defTabSz="762000" eaLnBrk="0" hangingPunct="0">
-              <a:defRPr sz="1600">
-                <a:solidFill>
-                  <a:schemeClr val="tx1"/>
-                </a:solidFill>
-                <a:latin typeface="Arial" pitchFamily="34" charset="0"/>
-              </a:defRPr>
-            </a:lvl1pPr>
-            <a:lvl2pPr marL="742950" indent="-285750" defTabSz="762000" eaLnBrk="0" hangingPunct="0">
-              <a:defRPr sz="1600">
-                <a:solidFill>
-                  <a:schemeClr val="tx1"/>
-                </a:solidFill>
-                <a:latin typeface="Arial" pitchFamily="34" charset="0"/>
-              </a:defRPr>
-            </a:lvl2pPr>
-            <a:lvl3pPr marL="1143000" indent="-228600" defTabSz="762000" eaLnBrk="0" hangingPunct="0">
-              <a:defRPr sz="1600">
-                <a:solidFill>
-                  <a:schemeClr val="tx1"/>
-                </a:solidFill>
-                <a:latin typeface="Arial" pitchFamily="34" charset="0"/>
-              </a:defRPr>
-            </a:lvl3pPr>
-            <a:lvl4pPr marL="1600200" indent="-228600" defTabSz="762000" eaLnBrk="0" hangingPunct="0">
-              <a:defRPr sz="1600">
-                <a:solidFill>
-                  <a:schemeClr val="tx1"/>
-                </a:solidFill>
-                <a:latin typeface="Arial" pitchFamily="34" charset="0"/>
-              </a:defRPr>
-            </a:lvl4pPr>
-            <a:lvl5pPr marL="2057400" indent="-228600" defTabSz="762000" eaLnBrk="0" hangingPunct="0">
-              <a:defRPr sz="1600">
-                <a:solidFill>
-                  <a:schemeClr val="tx1"/>
-                </a:solidFill>
-                <a:latin typeface="Arial" pitchFamily="34" charset="0"/>
-              </a:defRPr>
-            </a:lvl5pPr>
-            <a:lvl6pPr marL="2514600" indent="-228600" defTabSz="762000" eaLnBrk="0" fontAlgn="base" hangingPunct="0">
-              <a:spcBef>
-                <a:spcPct val="0"/>
-              </a:spcBef>
-              <a:spcAft>
-                <a:spcPct val="0"/>
-              </a:spcAft>
-              <a:defRPr sz="1600">
-                <a:solidFill>
-                  <a:schemeClr val="tx1"/>
-                </a:solidFill>
-                <a:latin typeface="Arial" pitchFamily="34" charset="0"/>
-              </a:defRPr>
-            </a:lvl6pPr>
-            <a:lvl7pPr marL="2971800" indent="-228600" defTabSz="762000" eaLnBrk="0" fontAlgn="base" hangingPunct="0">
-              <a:spcBef>
-                <a:spcPct val="0"/>
-              </a:spcBef>
-              <a:spcAft>
-                <a:spcPct val="0"/>
-              </a:spcAft>
-              <a:defRPr sz="1600">
-                <a:solidFill>
-                  <a:schemeClr val="tx1"/>
-                </a:solidFill>
-                <a:latin typeface="Arial" pitchFamily="34" charset="0"/>
-              </a:defRPr>
-            </a:lvl7pPr>
-            <a:lvl8pPr marL="3429000" indent="-228600" defTabSz="762000" eaLnBrk="0" fontAlgn="base" hangingPunct="0">
-              <a:spcBef>
-                <a:spcPct val="0"/>
-              </a:spcBef>
-              <a:spcAft>
-                <a:spcPct val="0"/>
-              </a:spcAft>
-              <a:defRPr sz="1600">
-                <a:solidFill>
-                  <a:schemeClr val="tx1"/>
-                </a:solidFill>
-                <a:latin typeface="Arial" pitchFamily="34" charset="0"/>
-              </a:defRPr>
-            </a:lvl8pPr>
-            <a:lvl9pPr marL="3886200" indent="-228600" defTabSz="762000" eaLnBrk="0" fontAlgn="base" hangingPunct="0">
-              <a:spcBef>
-                <a:spcPct val="0"/>
-              </a:spcBef>
-              <a:spcAft>
-                <a:spcPct val="0"/>
-              </a:spcAft>
-              <a:defRPr sz="1600">
-                <a:solidFill>
-                  <a:schemeClr val="tx1"/>
-                </a:solidFill>
-                <a:latin typeface="Arial" pitchFamily="34" charset="0"/>
-              </a:defRPr>
-            </a:lvl9pPr>
-          </a:lstStyle>
-          <a:p>
-            <a:pPr algn="ctr" eaLnBrk="1" hangingPunct="1">
-              <a:lnSpc>
-                <a:spcPct val="150000"/>
-              </a:lnSpc>
-              <a:buClr>
-                <a:schemeClr val="accent1"/>
-              </a:buClr>
-              <a:buSzPct val="80000"/>
-              <a:buFont typeface="Wingdings" pitchFamily="2" charset="2"/>
-              <a:buNone/>
-            </a:pPr>
-            <a:r>
-              <a:rPr lang="es-ES_tradnl" sz="2400" dirty="0">
-                <a:solidFill>
-                  <a:schemeClr val="bg2">
-                    <a:lumMod val="25000"/>
-                  </a:schemeClr>
-                </a:solidFill>
-              </a:rPr>
-              <a:t>Escriba el código de la función </a:t>
-            </a:r>
-            <a:r>
-              <a:rPr lang="es-ES_tradnl" sz="2400" b="1" dirty="0" err="1">
-                <a:solidFill>
-                  <a:srgbClr val="FF0000"/>
-                </a:solidFill>
-              </a:rPr>
-              <a:t>imprime_matriz</a:t>
-            </a:r>
-            <a:r>
-              <a:rPr lang="es-ES_tradnl" sz="2400" dirty="0">
-                <a:solidFill>
-                  <a:schemeClr val="bg2">
-                    <a:lumMod val="25000"/>
-                  </a:schemeClr>
-                </a:solidFill>
-              </a:rPr>
-              <a:t>, que recibe una matriz de enteros de enteros y despliega en pantalla el contenido de la matriz.</a:t>
-            </a:r>
-          </a:p>
-        </p:txBody>
-      </p:sp>
-      <p:sp>
-        <p:nvSpPr>
-          <p:cNvPr id="5" name="Rectangle 2"/>
-          <p:cNvSpPr>
-            <a:spLocks noChangeArrowheads="1"/>
-          </p:cNvSpPr>
-          <p:nvPr/>
-        </p:nvSpPr>
-        <p:spPr bwMode="auto">
-          <a:xfrm>
-            <a:off x="611560" y="379070"/>
-            <a:ext cx="7772400" cy="1008112"/>
-          </a:xfrm>
-          <a:prstGeom prst="rect">
-            <a:avLst/>
-          </a:prstGeom>
-          <a:noFill/>
-          <a:ln>
-            <a:noFill/>
-          </a:ln>
-          <a:effectLst/>
-          <a:extLst>
-            <a:ext uri="{909E8E84-426E-40DD-AFC4-6F175D3DCCD1}">
-              <a14:hiddenFill xmlns:a14="http://schemas.microsoft.com/office/drawing/2010/main">
-                <a:solidFill>
-                  <a:schemeClr val="accent1"/>
-                </a:solidFill>
-              </a14:hiddenFill>
-            </a:ext>
-            <a:ext uri="{91240B29-F687-4F45-9708-019B960494DF}">
-              <a14:hiddenLine xmlns:a14="http://schemas.microsoft.com/office/drawing/2010/main" w="9525">
-                <a:solidFill>
-                  <a:schemeClr val="tx1"/>
-                </a:solidFill>
-                <a:miter lim="800000"/>
-                <a:headEnd/>
-                <a:tailEnd/>
-              </a14:hiddenLine>
-            </a:ext>
-            <a:ext uri="{AF507438-7753-43E0-B8FC-AC1667EBCBE1}">
-              <a14:hiddenEffects xmlns:a14="http://schemas.microsoft.com/office/drawing/2010/main">
-                <a:effectLst>
-                  <a:outerShdw dist="35921" dir="2700000" algn="ctr" rotWithShape="0">
-                    <a:schemeClr val="bg2"/>
-                  </a:outerShdw>
-                </a:effectLst>
-              </a14:hiddenEffects>
-            </a:ext>
-          </a:extLst>
-        </p:spPr>
-        <p:txBody>
-          <a:bodyPr lIns="92075" tIns="46038" rIns="92075" bIns="46038" anchor="ctr"/>
-          <a:lstStyle/>
-          <a:p>
-            <a:pPr algn="ctr" eaLnBrk="0" hangingPunct="0">
-              <a:defRPr/>
-            </a:pPr>
-            <a:r>
-              <a:rPr lang="es-ES_tradnl" sz="4400" b="1" dirty="0">
-                <a:solidFill>
-                  <a:srgbClr val="0070C0"/>
-                </a:solidFill>
-                <a:effectLst>
-                  <a:outerShdw blurRad="38100" dist="38100" dir="2700000" algn="tl">
-                    <a:srgbClr val="C0C0C0"/>
-                  </a:outerShdw>
-                </a:effectLst>
-                <a:latin typeface="Dom Casual" charset="0"/>
-              </a:rPr>
-              <a:t>Actividad Grupal</a:t>
-            </a:r>
-          </a:p>
-        </p:txBody>
-      </p:sp>
-      <p:pic>
-        <p:nvPicPr>
-          <p:cNvPr id="6" name="Picture 5"/>
-          <p:cNvPicPr>
-            <a:picLocks noChangeAspect="1" noChangeArrowheads="1"/>
-          </p:cNvPicPr>
-          <p:nvPr/>
-        </p:nvPicPr>
-        <p:blipFill>
-          <a:blip r:embed="rId3">
-            <a:extLst>
-              <a:ext uri="{28A0092B-C50C-407E-A947-70E740481C1C}">
-                <a14:useLocalDpi xmlns:a14="http://schemas.microsoft.com/office/drawing/2010/main" val="0"/>
-              </a:ext>
-            </a:extLst>
-          </a:blip>
-          <a:srcRect/>
-          <a:stretch>
-            <a:fillRect/>
-          </a:stretch>
-        </p:blipFill>
-        <p:spPr bwMode="auto">
-          <a:xfrm>
-            <a:off x="2789139" y="3595465"/>
-            <a:ext cx="3700809" cy="2452343"/>
-          </a:xfrm>
-          <a:prstGeom prst="rect">
-            <a:avLst/>
-          </a:prstGeom>
-          <a:noFill/>
-          <a:ln>
-            <a:noFill/>
-          </a:ln>
-          <a:extLst>
-            <a:ext uri="{909E8E84-426E-40DD-AFC4-6F175D3DCCD1}">
-              <a14:hiddenFill xmlns:a14="http://schemas.microsoft.com/office/drawing/2010/main">
-                <a:solidFill>
-                  <a:schemeClr val="accent1"/>
-                </a:solidFill>
-              </a14:hiddenFill>
-            </a:ext>
-            <a:ext uri="{91240B29-F687-4F45-9708-019B960494DF}">
-              <a14:hiddenLine xmlns:a14="http://schemas.microsoft.com/office/drawing/2010/main" w="9525">
-                <a:solidFill>
-                  <a:schemeClr val="tx1"/>
-                </a:solidFill>
-                <a:miter lim="800000"/>
-                <a:headEnd/>
-                <a:tailEnd/>
-              </a14:hiddenLine>
-            </a:ext>
-          </a:extLst>
-        </p:spPr>
-      </p:pic>
-    </p:spTree>
-    <p:extLst>
-      <p:ext uri="{BB962C8B-B14F-4D97-AF65-F5344CB8AC3E}">
-        <p14:creationId xmlns:p14="http://schemas.microsoft.com/office/powerpoint/2010/main" val="60573319"/>
-      </p:ext>
-    </p:extLst>
-  </p:cSld>
-  <p:clrMapOvr>
-    <a:masterClrMapping/>
-  </p:clrMapOvr>
-  <p:timing>
-    <p:tnLst>
-      <p:par>
-        <p:cTn id="1" dur="indefinite" restart="never" nodeType="tmRoot">
-          <p:childTnLst>
-            <p:seq concurrent="1" nextAc="seek">
-              <p:cTn id="2" dur="indefinite" nodeType="mainSeq">
-                <p:childTnLst>
-                  <p:par>
-                    <p:cTn id="3" fill="hold" nodeType="clickPar">
-                      <p:stCondLst>
-                        <p:cond delay="indefinite"/>
-                      </p:stCondLst>
-                      <p:childTnLst>
-                        <p:par>
-                          <p:cTn id="4" fill="hold" nodeType="withGroup">
-                            <p:stCondLst>
-                              <p:cond delay="0"/>
-                            </p:stCondLst>
-                            <p:childTnLst>
-                              <p:par>
-                                <p:cTn id="5" presetID="2" presetClass="entr" presetSubtype="8" fill="hold" grpId="0" nodeType="clickEffect">
-                                  <p:stCondLst>
-                                    <p:cond delay="0"/>
-                                  </p:stCondLst>
-                                  <p:childTnLst>
-                                    <p:set>
-                                      <p:cBhvr>
-                                        <p:cTn id="6" dur="1" fill="hold">
-                                          <p:stCondLst>
-                                            <p:cond delay="0"/>
-                                          </p:stCondLst>
-                                        </p:cTn>
-                                        <p:tgtEl>
-                                          <p:spTgt spid="233476"/>
-                                        </p:tgtEl>
-                                        <p:attrNameLst>
-                                          <p:attrName>style.visibility</p:attrName>
-                                        </p:attrNameLst>
-                                      </p:cBhvr>
-                                      <p:to>
-                                        <p:strVal val="visible"/>
-                                      </p:to>
-                                    </p:set>
-                                    <p:anim calcmode="lin" valueType="num">
-                                      <p:cBhvr additive="base">
-                                        <p:cTn id="7" dur="500" fill="hold"/>
-                                        <p:tgtEl>
-                                          <p:spTgt spid="233476"/>
-                                        </p:tgtEl>
-                                        <p:attrNameLst>
-                                          <p:attrName>ppt_x</p:attrName>
-                                        </p:attrNameLst>
-                                      </p:cBhvr>
-                                      <p:tavLst>
-                                        <p:tav tm="0">
-                                          <p:val>
-                                            <p:strVal val="0-#ppt_w/2"/>
-                                          </p:val>
-                                        </p:tav>
-                                        <p:tav tm="100000">
-                                          <p:val>
-                                            <p:strVal val="#ppt_x"/>
-                                          </p:val>
-                                        </p:tav>
-                                      </p:tavLst>
-                                    </p:anim>
-                                    <p:anim calcmode="lin" valueType="num">
-                                      <p:cBhvr additive="base">
-                                        <p:cTn id="8" dur="500" fill="hold"/>
-                                        <p:tgtEl>
-                                          <p:spTgt spid="233476"/>
-                                        </p:tgtEl>
-                                        <p:attrNameLst>
-                                          <p:attrName>ppt_y</p:attrName>
-                                        </p:attrNameLst>
-                                      </p:cBhvr>
-                                      <p:tavLst>
-                                        <p:tav tm="0">
-                                          <p:val>
-                                            <p:strVal val="#ppt_y"/>
-                                          </p:val>
-                                        </p:tav>
-                                        <p:tav tm="100000">
-                                          <p:val>
-                                            <p:strVal val="#ppt_y"/>
-                                          </p:val>
-                                        </p:tav>
-                                      </p:tavLst>
-                                    </p:anim>
-                                  </p:childTnLst>
-                                </p:cTn>
-                              </p:par>
-                            </p:childTnLst>
-                          </p:cTn>
-                        </p:par>
-                      </p:childTnLst>
-                    </p:cTn>
-                  </p:par>
-                </p:childTnLst>
-              </p:cTn>
-              <p:prevCondLst>
-                <p:cond evt="onPrev" delay="0">
-                  <p:tgtEl>
-                    <p:sldTgt/>
-                  </p:tgtEl>
-                </p:cond>
-              </p:prevCondLst>
-              <p:nextCondLst>
-                <p:cond evt="onNext" delay="0">
-                  <p:tgtEl>
-                    <p:sldTgt/>
-                  </p:tgtEl>
-                </p:cond>
-              </p:nextCondLst>
-            </p:seq>
-          </p:childTnLst>
-        </p:cTn>
-      </p:par>
-    </p:tnLst>
-    <p:bldLst>
-      <p:bldP spid="233476" grpId="0" autoUpdateAnimBg="0"/>
-    </p:bldLst>
-  </p:timing>
-</p:sld>
-</file>
-
-<file path=ppt/slides/slide14.xml><?xml version="1.0" encoding="utf-8"?>
-<p:sld xmlns:a="http://schemas.openxmlformats.org/drawingml/2006/main" xmlns:r="http://schemas.openxmlformats.org/officeDocument/2006/relationships" xmlns:p="http://schemas.openxmlformats.org/presentationml/2006/main" showMasterPhAnim="0">
-  <p:cSld>
-    <p:spTree>
-      <p:nvGrpSpPr>
-        <p:cNvPr id="1" name=""/>
-        <p:cNvGrpSpPr/>
-        <p:nvPr/>
-      </p:nvGrpSpPr>
-      <p:grpSpPr>
-        <a:xfrm>
-          <a:off x="0" y="0"/>
-          <a:ext cx="0" cy="0"/>
-          <a:chOff x="0" y="0"/>
-          <a:chExt cx="0" cy="0"/>
-        </a:xfrm>
-      </p:grpSpPr>
-      <p:sp>
-        <p:nvSpPr>
-          <p:cNvPr id="7" name="Rectangle 2"/>
-          <p:cNvSpPr>
-            <a:spLocks noChangeArrowheads="1"/>
-          </p:cNvSpPr>
-          <p:nvPr/>
-        </p:nvSpPr>
-        <p:spPr bwMode="auto">
-          <a:xfrm>
-            <a:off x="3347864" y="260648"/>
-            <a:ext cx="2243262" cy="647168"/>
-          </a:xfrm>
-          <a:prstGeom prst="rect">
-            <a:avLst/>
-          </a:prstGeom>
-          <a:noFill/>
-          <a:ln>
-            <a:noFill/>
-          </a:ln>
-          <a:effectLst/>
-          <a:extLst>
-            <a:ext uri="{909E8E84-426E-40DD-AFC4-6F175D3DCCD1}">
-              <a14:hiddenFill xmlns:a14="http://schemas.microsoft.com/office/drawing/2010/main">
-                <a:solidFill>
-                  <a:schemeClr val="accent1"/>
-                </a:solidFill>
-              </a14:hiddenFill>
-            </a:ext>
-            <a:ext uri="{91240B29-F687-4F45-9708-019B960494DF}">
-              <a14:hiddenLine xmlns:a14="http://schemas.microsoft.com/office/drawing/2010/main" w="9525">
-                <a:solidFill>
-                  <a:schemeClr val="tx1"/>
-                </a:solidFill>
-                <a:miter lim="800000"/>
-                <a:headEnd/>
-                <a:tailEnd/>
-              </a14:hiddenLine>
-            </a:ext>
-            <a:ext uri="{AF507438-7753-43E0-B8FC-AC1667EBCBE1}">
-              <a14:hiddenEffects xmlns:a14="http://schemas.microsoft.com/office/drawing/2010/main">
-                <a:effectLst>
-                  <a:outerShdw dist="35921" dir="2700000" algn="ctr" rotWithShape="0">
-                    <a:schemeClr val="bg2"/>
-                  </a:outerShdw>
-                </a:effectLst>
-              </a14:hiddenEffects>
-            </a:ext>
-          </a:extLst>
-        </p:spPr>
-        <p:txBody>
-          <a:bodyPr lIns="92075" tIns="46038" rIns="92075" bIns="46038" anchor="ctr"/>
-          <a:lstStyle/>
-          <a:p>
-            <a:pPr algn="ctr" eaLnBrk="0" hangingPunct="0">
-              <a:defRPr/>
-            </a:pPr>
-            <a:r>
-              <a:rPr lang="es-ES_tradnl" sz="4000" b="1" dirty="0">
-                <a:solidFill>
-                  <a:schemeClr val="accent6">
-                    <a:lumMod val="75000"/>
-                  </a:schemeClr>
-                </a:solidFill>
-                <a:effectLst>
-                  <a:outerShdw blurRad="38100" dist="38100" dir="2700000" algn="tl">
-                    <a:srgbClr val="C0C0C0"/>
-                  </a:outerShdw>
-                </a:effectLst>
-                <a:latin typeface="Dom Casual" charset="0"/>
-              </a:rPr>
-              <a:t>Solución</a:t>
-            </a:r>
-          </a:p>
-        </p:txBody>
-      </p:sp>
-      <p:sp>
-        <p:nvSpPr>
-          <p:cNvPr id="8" name="Rectangle 2">
-            <a:extLst>
-              <a:ext uri="{FF2B5EF4-FFF2-40B4-BE49-F238E27FC236}">
-                <a16:creationId xmlns:a16="http://schemas.microsoft.com/office/drawing/2014/main" id="{F441CD57-7C90-40BE-86D4-C3A2CAE7A374}"/>
-              </a:ext>
-            </a:extLst>
-          </p:cNvPr>
-          <p:cNvSpPr txBox="1">
-            <a:spLocks noChangeArrowheads="1"/>
-          </p:cNvSpPr>
-          <p:nvPr/>
-        </p:nvSpPr>
-        <p:spPr>
-          <a:xfrm>
-            <a:off x="287524" y="908720"/>
-            <a:ext cx="7884876" cy="5040560"/>
-          </a:xfrm>
-          <a:prstGeom prst="rect">
-            <a:avLst/>
-          </a:prstGeom>
-        </p:spPr>
-        <p:txBody>
-          <a:bodyPr vert="horz" lIns="91440" tIns="45720" rIns="91440" bIns="45720" rtlCol="0">
-            <a:noAutofit/>
-          </a:bodyPr>
-          <a:lstStyle>
-            <a:lvl1pPr marL="342900" indent="-342900" algn="l" defTabSz="914400" rtl="0" eaLnBrk="1" latinLnBrk="0" hangingPunct="1">
-              <a:spcBef>
-                <a:spcPct val="20000"/>
-              </a:spcBef>
-              <a:buFont typeface="Arial" pitchFamily="34" charset="0"/>
-              <a:buChar char="•"/>
-              <a:defRPr sz="3200" kern="1200">
-                <a:solidFill>
-                  <a:schemeClr val="tx1"/>
-                </a:solidFill>
-                <a:latin typeface="+mn-lt"/>
-                <a:ea typeface="+mn-ea"/>
-                <a:cs typeface="+mn-cs"/>
-              </a:defRPr>
-            </a:lvl1pPr>
-            <a:lvl2pPr marL="742950" indent="-285750" algn="l" defTabSz="914400" rtl="0" eaLnBrk="1" latinLnBrk="0" hangingPunct="1">
-              <a:spcBef>
-                <a:spcPct val="20000"/>
-              </a:spcBef>
-              <a:buFont typeface="Arial" pitchFamily="34" charset="0"/>
-              <a:buChar char="–"/>
-              <a:defRPr sz="2800" kern="1200">
-                <a:solidFill>
-                  <a:schemeClr val="tx1"/>
-                </a:solidFill>
-                <a:latin typeface="+mn-lt"/>
-                <a:ea typeface="+mn-ea"/>
-                <a:cs typeface="+mn-cs"/>
-              </a:defRPr>
-            </a:lvl2pPr>
-            <a:lvl3pPr marL="1143000" indent="-228600" algn="l" defTabSz="914400" rtl="0" eaLnBrk="1" latinLnBrk="0" hangingPunct="1">
-              <a:spcBef>
-                <a:spcPct val="20000"/>
-              </a:spcBef>
-              <a:buFont typeface="Arial" pitchFamily="34" charset="0"/>
-              <a:buChar char="•"/>
-              <a:defRPr sz="2400" kern="1200">
-                <a:solidFill>
-                  <a:schemeClr val="tx1"/>
-                </a:solidFill>
-                <a:latin typeface="+mn-lt"/>
-                <a:ea typeface="+mn-ea"/>
-                <a:cs typeface="+mn-cs"/>
-              </a:defRPr>
-            </a:lvl3pPr>
-            <a:lvl4pPr marL="1600200" indent="-228600" algn="l" defTabSz="914400" rtl="0" eaLnBrk="1" latinLnBrk="0" hangingPunct="1">
-              <a:spcBef>
-                <a:spcPct val="20000"/>
-              </a:spcBef>
-              <a:buFont typeface="Arial" pitchFamily="34" charset="0"/>
-              <a:buChar char="–"/>
-              <a:defRPr sz="2000" kern="1200">
-                <a:solidFill>
-                  <a:schemeClr val="tx1"/>
-                </a:solidFill>
-                <a:latin typeface="+mn-lt"/>
-                <a:ea typeface="+mn-ea"/>
-                <a:cs typeface="+mn-cs"/>
-              </a:defRPr>
-            </a:lvl4pPr>
-            <a:lvl5pPr marL="2057400" indent="-228600" algn="l" defTabSz="914400" rtl="0" eaLnBrk="1" latinLnBrk="0" hangingPunct="1">
-              <a:spcBef>
-                <a:spcPct val="20000"/>
-              </a:spcBef>
-              <a:buFont typeface="Arial" pitchFamily="34" charset="0"/>
-              <a:buChar char="»"/>
-              <a:defRPr sz="2000" kern="1200">
-                <a:solidFill>
-                  <a:schemeClr val="tx1"/>
-                </a:solidFill>
-                <a:latin typeface="+mn-lt"/>
-                <a:ea typeface="+mn-ea"/>
-                <a:cs typeface="+mn-cs"/>
-              </a:defRPr>
-            </a:lvl5pPr>
-            <a:lvl6pPr marL="2514600" indent="-228600" algn="l" defTabSz="914400" rtl="0" eaLnBrk="1" latinLnBrk="0" hangingPunct="1">
-              <a:spcBef>
-                <a:spcPct val="20000"/>
-              </a:spcBef>
-              <a:buFont typeface="Arial" pitchFamily="34" charset="0"/>
-              <a:buChar char="•"/>
-              <a:defRPr sz="2000" kern="1200">
-                <a:solidFill>
-                  <a:schemeClr val="tx1"/>
-                </a:solidFill>
-                <a:latin typeface="+mn-lt"/>
-                <a:ea typeface="+mn-ea"/>
-                <a:cs typeface="+mn-cs"/>
-              </a:defRPr>
-            </a:lvl6pPr>
-            <a:lvl7pPr marL="2971800" indent="-228600" algn="l" defTabSz="914400" rtl="0" eaLnBrk="1" latinLnBrk="0" hangingPunct="1">
-              <a:spcBef>
-                <a:spcPct val="20000"/>
-              </a:spcBef>
-              <a:buFont typeface="Arial" pitchFamily="34" charset="0"/>
-              <a:buChar char="•"/>
-              <a:defRPr sz="2000" kern="1200">
-                <a:solidFill>
-                  <a:schemeClr val="tx1"/>
-                </a:solidFill>
-                <a:latin typeface="+mn-lt"/>
-                <a:ea typeface="+mn-ea"/>
-                <a:cs typeface="+mn-cs"/>
-              </a:defRPr>
-            </a:lvl7pPr>
-            <a:lvl8pPr marL="3429000" indent="-228600" algn="l" defTabSz="914400" rtl="0" eaLnBrk="1" latinLnBrk="0" hangingPunct="1">
-              <a:spcBef>
-                <a:spcPct val="20000"/>
-              </a:spcBef>
-              <a:buFont typeface="Arial" pitchFamily="34" charset="0"/>
-              <a:buChar char="•"/>
-              <a:defRPr sz="2000" kern="1200">
-                <a:solidFill>
-                  <a:schemeClr val="tx1"/>
-                </a:solidFill>
-                <a:latin typeface="+mn-lt"/>
-                <a:ea typeface="+mn-ea"/>
-                <a:cs typeface="+mn-cs"/>
-              </a:defRPr>
-            </a:lvl8pPr>
-            <a:lvl9pPr marL="3886200" indent="-228600" algn="l" defTabSz="914400" rtl="0" eaLnBrk="1" latinLnBrk="0" hangingPunct="1">
-              <a:spcBef>
-                <a:spcPct val="20000"/>
-              </a:spcBef>
-              <a:buFont typeface="Arial" pitchFamily="34" charset="0"/>
-              <a:buChar char="•"/>
-              <a:defRPr sz="2000" kern="1200">
-                <a:solidFill>
-                  <a:schemeClr val="tx1"/>
-                </a:solidFill>
-                <a:latin typeface="+mn-lt"/>
-                <a:ea typeface="+mn-ea"/>
-                <a:cs typeface="+mn-cs"/>
-              </a:defRPr>
-            </a:lvl9pPr>
-          </a:lstStyle>
-          <a:p>
-            <a:pPr>
-              <a:lnSpc>
-                <a:spcPts val="3500"/>
-              </a:lnSpc>
-              <a:spcBef>
-                <a:spcPts val="0"/>
-              </a:spcBef>
-              <a:buNone/>
-            </a:pPr>
-            <a:r>
-              <a:rPr lang="es-MX" sz="2400" b="1" dirty="0" err="1">
-                <a:solidFill>
-                  <a:srgbClr val="AF00DB"/>
-                </a:solidFill>
-                <a:latin typeface="Courier New" panose="02070309020205020404" pitchFamily="49" charset="0"/>
-              </a:rPr>
-              <a:t>import</a:t>
-            </a:r>
-            <a:r>
-              <a:rPr lang="es-MX" sz="2400" b="1" dirty="0">
-                <a:solidFill>
-                  <a:srgbClr val="000000"/>
-                </a:solidFill>
-                <a:latin typeface="Courier New" panose="02070309020205020404" pitchFamily="49" charset="0"/>
-              </a:rPr>
-              <a:t> </a:t>
-            </a:r>
-            <a:r>
-              <a:rPr lang="es-MX" sz="2400" b="1" dirty="0" err="1">
-                <a:solidFill>
-                  <a:srgbClr val="000000"/>
-                </a:solidFill>
-                <a:latin typeface="Courier New" panose="02070309020205020404" pitchFamily="49" charset="0"/>
-              </a:rPr>
-              <a:t>numpy</a:t>
-            </a:r>
-            <a:r>
-              <a:rPr lang="es-MX" sz="2400" b="1" dirty="0">
-                <a:solidFill>
-                  <a:srgbClr val="000000"/>
-                </a:solidFill>
-                <a:latin typeface="Courier New" panose="02070309020205020404" pitchFamily="49" charset="0"/>
-              </a:rPr>
-              <a:t> </a:t>
-            </a:r>
-            <a:r>
-              <a:rPr lang="es-MX" sz="2400" b="1" dirty="0">
-                <a:solidFill>
-                  <a:srgbClr val="AF00DB"/>
-                </a:solidFill>
-                <a:latin typeface="Courier New" panose="02070309020205020404" pitchFamily="49" charset="0"/>
-              </a:rPr>
-              <a:t>as</a:t>
-            </a:r>
-            <a:r>
-              <a:rPr lang="es-MX" sz="2400" b="1" dirty="0">
-                <a:solidFill>
-                  <a:srgbClr val="000000"/>
-                </a:solidFill>
-                <a:latin typeface="Courier New" panose="02070309020205020404" pitchFamily="49" charset="0"/>
-              </a:rPr>
-              <a:t> </a:t>
-            </a:r>
-            <a:r>
-              <a:rPr lang="es-MX" sz="2400" b="1" dirty="0" err="1">
-                <a:solidFill>
-                  <a:srgbClr val="000000"/>
-                </a:solidFill>
-                <a:latin typeface="Courier New" panose="02070309020205020404" pitchFamily="49" charset="0"/>
-              </a:rPr>
-              <a:t>np</a:t>
-            </a:r>
-            <a:endParaRPr lang="es-MX" sz="2400" b="1" dirty="0">
-              <a:solidFill>
-                <a:srgbClr val="000000"/>
-              </a:solidFill>
-              <a:latin typeface="Courier New" panose="02070309020205020404" pitchFamily="49" charset="0"/>
-            </a:endParaRPr>
-          </a:p>
-          <a:p>
-            <a:pPr>
-              <a:lnSpc>
-                <a:spcPts val="3500"/>
-              </a:lnSpc>
-              <a:spcBef>
-                <a:spcPts val="0"/>
-              </a:spcBef>
-              <a:buFontTx/>
-              <a:buNone/>
-            </a:pPr>
-            <a:endParaRPr lang="es-ES_tradnl" sz="2400" b="1" dirty="0">
-              <a:latin typeface="Arial" pitchFamily="34" charset="0"/>
-              <a:cs typeface="Arial" pitchFamily="34" charset="0"/>
-            </a:endParaRPr>
-          </a:p>
-          <a:p>
-            <a:pPr>
-              <a:lnSpc>
-                <a:spcPts val="3500"/>
-              </a:lnSpc>
-              <a:spcBef>
-                <a:spcPts val="0"/>
-              </a:spcBef>
-              <a:buFontTx/>
-              <a:buNone/>
-            </a:pPr>
-            <a:r>
-              <a:rPr lang="es-ES_tradnl" sz="2400" b="1" dirty="0" err="1">
-                <a:latin typeface="Arial" pitchFamily="34" charset="0"/>
-                <a:cs typeface="Arial" pitchFamily="34" charset="0"/>
-              </a:rPr>
-              <a:t>def</a:t>
-            </a:r>
-            <a:r>
-              <a:rPr lang="es-ES_tradnl" sz="2400" b="1" dirty="0">
-                <a:latin typeface="Arial" pitchFamily="34" charset="0"/>
-                <a:cs typeface="Arial" pitchFamily="34" charset="0"/>
-              </a:rPr>
-              <a:t> </a:t>
-            </a:r>
-            <a:r>
-              <a:rPr lang="es-ES_tradnl" sz="2400" b="1" dirty="0" err="1">
-                <a:solidFill>
-                  <a:srgbClr val="0070C0"/>
-                </a:solidFill>
-                <a:latin typeface="Arial" pitchFamily="34" charset="0"/>
-                <a:cs typeface="Arial" pitchFamily="34" charset="0"/>
-              </a:rPr>
-              <a:t>imprime_matriz</a:t>
-            </a:r>
-            <a:r>
-              <a:rPr lang="es-ES_tradnl" sz="2400" b="1" dirty="0">
-                <a:solidFill>
-                  <a:schemeClr val="bg2">
-                    <a:lumMod val="25000"/>
-                  </a:schemeClr>
-                </a:solidFill>
-                <a:latin typeface="Arial" pitchFamily="34" charset="0"/>
-                <a:cs typeface="Arial" pitchFamily="34" charset="0"/>
-              </a:rPr>
-              <a:t> (m):</a:t>
-            </a:r>
-          </a:p>
-          <a:p>
-            <a:pPr>
-              <a:lnSpc>
-                <a:spcPts val="3500"/>
-              </a:lnSpc>
-              <a:spcBef>
-                <a:spcPts val="0"/>
-              </a:spcBef>
-              <a:buFontTx/>
-              <a:buNone/>
-            </a:pPr>
-            <a:r>
-              <a:rPr lang="es-ES_tradnl" sz="2400" b="1" dirty="0">
-                <a:solidFill>
-                  <a:schemeClr val="bg2">
-                    <a:lumMod val="25000"/>
-                  </a:schemeClr>
-                </a:solidFill>
-                <a:latin typeface="Arial" pitchFamily="34" charset="0"/>
-                <a:cs typeface="Arial" pitchFamily="34" charset="0"/>
-              </a:rPr>
-              <a:t>	   </a:t>
-            </a:r>
-            <a:r>
-              <a:rPr lang="es-ES_tradnl" sz="2400" b="1" dirty="0" err="1">
-                <a:solidFill>
-                  <a:schemeClr val="bg2">
-                    <a:lumMod val="25000"/>
-                  </a:schemeClr>
-                </a:solidFill>
-                <a:latin typeface="Arial" pitchFamily="34" charset="0"/>
-                <a:cs typeface="Arial" pitchFamily="34" charset="0"/>
-              </a:rPr>
-              <a:t>for</a:t>
-            </a:r>
-            <a:r>
-              <a:rPr lang="es-ES_tradnl" sz="2400" b="1" dirty="0">
-                <a:solidFill>
-                  <a:schemeClr val="bg2">
-                    <a:lumMod val="25000"/>
-                  </a:schemeClr>
-                </a:solidFill>
-                <a:latin typeface="Arial" pitchFamily="34" charset="0"/>
-                <a:cs typeface="Arial" pitchFamily="34" charset="0"/>
-              </a:rPr>
-              <a:t> </a:t>
-            </a:r>
-            <a:r>
-              <a:rPr lang="es-ES_tradnl" sz="2400" b="1" dirty="0">
-                <a:solidFill>
-                  <a:srgbClr val="FF0000"/>
-                </a:solidFill>
-                <a:latin typeface="Arial" pitchFamily="34" charset="0"/>
-                <a:cs typeface="Arial" pitchFamily="34" charset="0"/>
-              </a:rPr>
-              <a:t>r</a:t>
-            </a:r>
-            <a:r>
-              <a:rPr lang="es-ES_tradnl" sz="2400" b="1" dirty="0">
-                <a:solidFill>
-                  <a:schemeClr val="bg2">
-                    <a:lumMod val="25000"/>
-                  </a:schemeClr>
-                </a:solidFill>
-                <a:latin typeface="Arial" pitchFamily="34" charset="0"/>
-                <a:cs typeface="Arial" pitchFamily="34" charset="0"/>
-              </a:rPr>
-              <a:t> in </a:t>
-            </a:r>
-            <a:r>
-              <a:rPr lang="es-ES_tradnl" sz="2400" b="1" dirty="0" err="1">
-                <a:solidFill>
-                  <a:schemeClr val="bg2">
-                    <a:lumMod val="25000"/>
-                  </a:schemeClr>
-                </a:solidFill>
-                <a:latin typeface="Arial" pitchFamily="34" charset="0"/>
-                <a:cs typeface="Arial" pitchFamily="34" charset="0"/>
-              </a:rPr>
-              <a:t>range</a:t>
-            </a:r>
-            <a:r>
-              <a:rPr lang="es-ES_tradnl" sz="2400" b="1" dirty="0">
-                <a:solidFill>
-                  <a:schemeClr val="bg2">
-                    <a:lumMod val="25000"/>
-                  </a:schemeClr>
-                </a:solidFill>
-                <a:latin typeface="Arial" pitchFamily="34" charset="0"/>
-                <a:cs typeface="Arial" pitchFamily="34" charset="0"/>
-              </a:rPr>
-              <a:t>(</a:t>
-            </a:r>
-            <a:r>
-              <a:rPr lang="es-ES_tradnl" sz="2400" b="1" dirty="0">
-                <a:solidFill>
-                  <a:srgbClr val="FF0000"/>
-                </a:solidFill>
-                <a:latin typeface="Arial" pitchFamily="34" charset="0"/>
-                <a:cs typeface="Arial" pitchFamily="34" charset="0"/>
-              </a:rPr>
-              <a:t>0, </a:t>
-            </a:r>
-            <a:r>
-              <a:rPr lang="es-ES_tradnl" sz="2400" b="1" dirty="0" err="1">
-                <a:solidFill>
-                  <a:srgbClr val="FF0000"/>
-                </a:solidFill>
-                <a:latin typeface="Arial" pitchFamily="34" charset="0"/>
-                <a:cs typeface="Arial" pitchFamily="34" charset="0"/>
-              </a:rPr>
-              <a:t>m.shape</a:t>
-            </a:r>
-            <a:r>
-              <a:rPr lang="es-ES_tradnl" sz="2400" b="1" dirty="0">
-                <a:solidFill>
-                  <a:srgbClr val="FF0000"/>
-                </a:solidFill>
-                <a:latin typeface="Arial" pitchFamily="34" charset="0"/>
-                <a:cs typeface="Arial" pitchFamily="34" charset="0"/>
-              </a:rPr>
-              <a:t>[0]</a:t>
-            </a:r>
-            <a:r>
-              <a:rPr lang="es-ES_tradnl" sz="2400" b="1" dirty="0">
-                <a:solidFill>
-                  <a:schemeClr val="bg2">
-                    <a:lumMod val="25000"/>
-                  </a:schemeClr>
-                </a:solidFill>
-                <a:latin typeface="Arial" pitchFamily="34" charset="0"/>
-                <a:cs typeface="Arial" pitchFamily="34" charset="0"/>
-              </a:rPr>
-              <a:t>):</a:t>
-            </a:r>
-          </a:p>
-          <a:p>
-            <a:pPr>
-              <a:lnSpc>
-                <a:spcPts val="3500"/>
-              </a:lnSpc>
-              <a:spcBef>
-                <a:spcPts val="0"/>
-              </a:spcBef>
-              <a:buFontTx/>
-              <a:buNone/>
-            </a:pPr>
-            <a:r>
-              <a:rPr lang="es-ES_tradnl" sz="2400" b="1" dirty="0">
-                <a:solidFill>
-                  <a:schemeClr val="bg2">
-                    <a:lumMod val="25000"/>
-                  </a:schemeClr>
-                </a:solidFill>
-                <a:latin typeface="Arial" pitchFamily="34" charset="0"/>
-                <a:cs typeface="Arial" pitchFamily="34" charset="0"/>
-              </a:rPr>
-              <a:t>		</a:t>
-            </a:r>
-            <a:r>
-              <a:rPr lang="es-ES_tradnl" sz="2400" b="1" dirty="0" err="1">
-                <a:solidFill>
-                  <a:schemeClr val="bg2">
-                    <a:lumMod val="25000"/>
-                  </a:schemeClr>
-                </a:solidFill>
-                <a:latin typeface="Arial" pitchFamily="34" charset="0"/>
-                <a:cs typeface="Arial" pitchFamily="34" charset="0"/>
-              </a:rPr>
-              <a:t>for</a:t>
-            </a:r>
-            <a:r>
-              <a:rPr lang="es-ES_tradnl" sz="2400" b="1" dirty="0">
-                <a:solidFill>
-                  <a:schemeClr val="bg2">
-                    <a:lumMod val="25000"/>
-                  </a:schemeClr>
-                </a:solidFill>
-                <a:latin typeface="Arial" pitchFamily="34" charset="0"/>
-                <a:cs typeface="Arial" pitchFamily="34" charset="0"/>
-              </a:rPr>
-              <a:t> </a:t>
-            </a:r>
-            <a:r>
-              <a:rPr lang="es-ES_tradnl" sz="2400" b="1" dirty="0">
-                <a:solidFill>
-                  <a:srgbClr val="FF0000"/>
-                </a:solidFill>
-                <a:latin typeface="Arial" pitchFamily="34" charset="0"/>
-                <a:cs typeface="Arial" pitchFamily="34" charset="0"/>
-              </a:rPr>
-              <a:t>c</a:t>
-            </a:r>
-            <a:r>
-              <a:rPr lang="es-ES_tradnl" sz="2400" b="1" dirty="0">
-                <a:solidFill>
-                  <a:schemeClr val="bg2">
-                    <a:lumMod val="25000"/>
-                  </a:schemeClr>
-                </a:solidFill>
-                <a:latin typeface="Arial" pitchFamily="34" charset="0"/>
-                <a:cs typeface="Arial" pitchFamily="34" charset="0"/>
-              </a:rPr>
-              <a:t> in </a:t>
-            </a:r>
-            <a:r>
-              <a:rPr lang="es-ES_tradnl" sz="2400" b="1" dirty="0" err="1">
-                <a:solidFill>
-                  <a:schemeClr val="bg2">
-                    <a:lumMod val="25000"/>
-                  </a:schemeClr>
-                </a:solidFill>
-                <a:latin typeface="Arial" pitchFamily="34" charset="0"/>
-                <a:cs typeface="Arial" pitchFamily="34" charset="0"/>
-              </a:rPr>
-              <a:t>range</a:t>
-            </a:r>
-            <a:r>
-              <a:rPr lang="es-ES_tradnl" sz="2400" b="1" dirty="0">
-                <a:solidFill>
-                  <a:schemeClr val="bg2">
-                    <a:lumMod val="25000"/>
-                  </a:schemeClr>
-                </a:solidFill>
-                <a:latin typeface="Arial" pitchFamily="34" charset="0"/>
-                <a:cs typeface="Arial" pitchFamily="34" charset="0"/>
-              </a:rPr>
-              <a:t>(</a:t>
-            </a:r>
-            <a:r>
-              <a:rPr lang="es-ES_tradnl" sz="2400" b="1" dirty="0">
-                <a:solidFill>
-                  <a:srgbClr val="FF0000"/>
-                </a:solidFill>
-                <a:latin typeface="Arial" pitchFamily="34" charset="0"/>
-                <a:cs typeface="Arial" pitchFamily="34" charset="0"/>
-              </a:rPr>
-              <a:t>0, </a:t>
-            </a:r>
-            <a:r>
-              <a:rPr lang="es-ES_tradnl" sz="2400" b="1" dirty="0" err="1">
-                <a:solidFill>
-                  <a:srgbClr val="FF0000"/>
-                </a:solidFill>
-                <a:latin typeface="Arial" pitchFamily="34" charset="0"/>
-                <a:cs typeface="Arial" pitchFamily="34" charset="0"/>
-              </a:rPr>
-              <a:t>m.shape</a:t>
-            </a:r>
-            <a:r>
-              <a:rPr lang="es-ES_tradnl" sz="2400" b="1" dirty="0">
-                <a:solidFill>
-                  <a:srgbClr val="FF0000"/>
-                </a:solidFill>
-                <a:latin typeface="Arial" pitchFamily="34" charset="0"/>
-                <a:cs typeface="Arial" pitchFamily="34" charset="0"/>
-              </a:rPr>
-              <a:t>[1]</a:t>
-            </a:r>
-            <a:r>
-              <a:rPr lang="es-ES_tradnl" sz="2400" b="1" dirty="0">
-                <a:solidFill>
-                  <a:schemeClr val="bg2">
-                    <a:lumMod val="25000"/>
-                  </a:schemeClr>
-                </a:solidFill>
-                <a:latin typeface="Arial" pitchFamily="34" charset="0"/>
-                <a:cs typeface="Arial" pitchFamily="34" charset="0"/>
-              </a:rPr>
-              <a:t>):</a:t>
-            </a:r>
-          </a:p>
-          <a:p>
-            <a:pPr>
-              <a:lnSpc>
-                <a:spcPts val="3500"/>
-              </a:lnSpc>
-              <a:spcBef>
-                <a:spcPts val="0"/>
-              </a:spcBef>
-              <a:buFontTx/>
-              <a:buNone/>
-            </a:pPr>
-            <a:r>
-              <a:rPr lang="es-ES_tradnl" sz="2400" b="1" dirty="0">
-                <a:solidFill>
-                  <a:schemeClr val="bg2">
-                    <a:lumMod val="25000"/>
-                  </a:schemeClr>
-                </a:solidFill>
-                <a:latin typeface="Arial" pitchFamily="34" charset="0"/>
-                <a:cs typeface="Arial" pitchFamily="34" charset="0"/>
-              </a:rPr>
-              <a:t>			</a:t>
-            </a:r>
-            <a:r>
-              <a:rPr lang="es-ES_tradnl" sz="2400" b="1" dirty="0" err="1">
-                <a:solidFill>
-                  <a:schemeClr val="bg2">
-                    <a:lumMod val="25000"/>
-                  </a:schemeClr>
-                </a:solidFill>
-                <a:latin typeface="Arial" pitchFamily="34" charset="0"/>
-                <a:cs typeface="Arial" pitchFamily="34" charset="0"/>
-              </a:rPr>
-              <a:t>print</a:t>
-            </a:r>
-            <a:r>
-              <a:rPr lang="es-ES_tradnl" sz="2400" b="1" dirty="0">
-                <a:solidFill>
-                  <a:schemeClr val="bg2">
-                    <a:lumMod val="25000"/>
-                  </a:schemeClr>
-                </a:solidFill>
-                <a:latin typeface="Arial" pitchFamily="34" charset="0"/>
-                <a:cs typeface="Arial" pitchFamily="34" charset="0"/>
-              </a:rPr>
-              <a:t>(M[ r, c ], </a:t>
-            </a:r>
-            <a:r>
-              <a:rPr lang="es-ES_tradnl" sz="2400" b="1" dirty="0" err="1">
-                <a:solidFill>
-                  <a:schemeClr val="bg2">
-                    <a:lumMod val="25000"/>
-                  </a:schemeClr>
-                </a:solidFill>
-                <a:latin typeface="Arial" pitchFamily="34" charset="0"/>
-                <a:cs typeface="Arial" pitchFamily="34" charset="0"/>
-              </a:rPr>
-              <a:t>end</a:t>
-            </a:r>
-            <a:r>
-              <a:rPr lang="es-ES_tradnl" sz="2400" b="1" dirty="0">
-                <a:solidFill>
-                  <a:schemeClr val="bg2">
-                    <a:lumMod val="25000"/>
-                  </a:schemeClr>
-                </a:solidFill>
-                <a:latin typeface="Arial" pitchFamily="34" charset="0"/>
-                <a:cs typeface="Arial" pitchFamily="34" charset="0"/>
-              </a:rPr>
-              <a:t>= '   ' )</a:t>
-            </a:r>
-          </a:p>
-          <a:p>
-            <a:pPr>
-              <a:lnSpc>
-                <a:spcPts val="3500"/>
-              </a:lnSpc>
-              <a:spcBef>
-                <a:spcPts val="0"/>
-              </a:spcBef>
-              <a:buFontTx/>
-              <a:buNone/>
-            </a:pPr>
-            <a:r>
-              <a:rPr lang="es-ES_tradnl" sz="2400" b="1" dirty="0">
-                <a:solidFill>
-                  <a:schemeClr val="bg2">
-                    <a:lumMod val="25000"/>
-                  </a:schemeClr>
-                </a:solidFill>
-                <a:latin typeface="Arial" pitchFamily="34" charset="0"/>
-                <a:cs typeface="Arial" pitchFamily="34" charset="0"/>
-              </a:rPr>
-              <a:t>		</a:t>
-            </a:r>
-            <a:r>
-              <a:rPr lang="es-ES_tradnl" sz="2400" b="1" dirty="0" err="1">
-                <a:solidFill>
-                  <a:schemeClr val="bg2">
-                    <a:lumMod val="25000"/>
-                  </a:schemeClr>
-                </a:solidFill>
-                <a:latin typeface="Arial" pitchFamily="34" charset="0"/>
-                <a:cs typeface="Arial" pitchFamily="34" charset="0"/>
-              </a:rPr>
-              <a:t>print</a:t>
-            </a:r>
-            <a:r>
-              <a:rPr lang="es-ES_tradnl" sz="2400" b="1" dirty="0">
-                <a:solidFill>
-                  <a:schemeClr val="bg2">
-                    <a:lumMod val="25000"/>
-                  </a:schemeClr>
-                </a:solidFill>
-                <a:latin typeface="Arial" pitchFamily="34" charset="0"/>
-                <a:cs typeface="Arial" pitchFamily="34" charset="0"/>
-              </a:rPr>
-              <a:t>()</a:t>
-            </a:r>
-          </a:p>
-          <a:p>
-            <a:pPr>
-              <a:lnSpc>
-                <a:spcPts val="3500"/>
-              </a:lnSpc>
-              <a:spcBef>
-                <a:spcPts val="0"/>
-              </a:spcBef>
-              <a:buFontTx/>
-              <a:buNone/>
-            </a:pPr>
-            <a:endParaRPr lang="es-ES_tradnl" sz="2400" b="1" dirty="0">
-              <a:solidFill>
-                <a:schemeClr val="bg2">
-                  <a:lumMod val="25000"/>
-                </a:schemeClr>
-              </a:solidFill>
-              <a:latin typeface="Arial" pitchFamily="34" charset="0"/>
-              <a:cs typeface="Arial" pitchFamily="34" charset="0"/>
-            </a:endParaRPr>
-          </a:p>
-          <a:p>
-            <a:pPr algn="just">
-              <a:lnSpc>
-                <a:spcPts val="3500"/>
-              </a:lnSpc>
-              <a:spcBef>
-                <a:spcPct val="0"/>
-              </a:spcBef>
-              <a:buFont typeface="Arial" pitchFamily="34" charset="0"/>
-              <a:buNone/>
-            </a:pPr>
-            <a:r>
-              <a:rPr lang="es-ES_tradnl" sz="2400" b="1" dirty="0" err="1">
-                <a:solidFill>
-                  <a:schemeClr val="tx1">
-                    <a:lumMod val="95000"/>
-                    <a:lumOff val="5000"/>
-                  </a:schemeClr>
-                </a:solidFill>
-                <a:latin typeface="Arial" pitchFamily="34" charset="0"/>
-                <a:cs typeface="Arial" pitchFamily="34" charset="0"/>
-              </a:rPr>
-              <a:t>def</a:t>
-            </a:r>
-            <a:r>
-              <a:rPr lang="es-ES_tradnl" sz="2400" b="1" dirty="0">
-                <a:solidFill>
-                  <a:schemeClr val="tx1">
-                    <a:lumMod val="95000"/>
-                    <a:lumOff val="5000"/>
-                  </a:schemeClr>
-                </a:solidFill>
-                <a:latin typeface="Arial" pitchFamily="34" charset="0"/>
-                <a:cs typeface="Arial" pitchFamily="34" charset="0"/>
-              </a:rPr>
-              <a:t> </a:t>
-            </a:r>
-            <a:r>
-              <a:rPr lang="es-ES_tradnl" sz="2400" b="1" dirty="0" err="1">
-                <a:solidFill>
-                  <a:srgbClr val="0070C0"/>
-                </a:solidFill>
-                <a:latin typeface="Arial" pitchFamily="34" charset="0"/>
-                <a:cs typeface="Arial" pitchFamily="34" charset="0"/>
-              </a:rPr>
-              <a:t>main</a:t>
-            </a:r>
-            <a:r>
-              <a:rPr lang="es-ES_tradnl" sz="2400" b="1" dirty="0">
-                <a:solidFill>
-                  <a:schemeClr val="tx1">
-                    <a:lumMod val="95000"/>
-                    <a:lumOff val="5000"/>
-                  </a:schemeClr>
-                </a:solidFill>
-                <a:latin typeface="Arial" pitchFamily="34" charset="0"/>
-                <a:cs typeface="Arial" pitchFamily="34" charset="0"/>
-              </a:rPr>
-              <a:t>():</a:t>
-            </a:r>
-            <a:r>
-              <a:rPr lang="es-ES_tradnl" sz="2400" b="1" dirty="0">
-                <a:solidFill>
-                  <a:srgbClr val="00B050"/>
-                </a:solidFill>
-                <a:latin typeface="Arial" pitchFamily="34" charset="0"/>
-                <a:cs typeface="Arial" pitchFamily="34" charset="0"/>
-              </a:rPr>
-              <a:t>	</a:t>
-            </a:r>
-          </a:p>
-          <a:p>
-            <a:pPr algn="just">
-              <a:lnSpc>
-                <a:spcPts val="3500"/>
-              </a:lnSpc>
-              <a:spcBef>
-                <a:spcPct val="0"/>
-              </a:spcBef>
-              <a:buFont typeface="Arial" pitchFamily="34" charset="0"/>
-              <a:buNone/>
-            </a:pPr>
-            <a:r>
-              <a:rPr lang="es-ES_tradnl" sz="2400" b="1" dirty="0">
-                <a:solidFill>
-                  <a:srgbClr val="00B050"/>
-                </a:solidFill>
-                <a:latin typeface="Arial" pitchFamily="34" charset="0"/>
-                <a:cs typeface="Arial" pitchFamily="34" charset="0"/>
-              </a:rPr>
-              <a:t>    matriz = </a:t>
-            </a:r>
-            <a:r>
-              <a:rPr lang="es-ES_tradnl" sz="2400" b="1" dirty="0" err="1">
-                <a:solidFill>
-                  <a:srgbClr val="00B050"/>
-                </a:solidFill>
-                <a:latin typeface="Arial" pitchFamily="34" charset="0"/>
-                <a:cs typeface="Arial" pitchFamily="34" charset="0"/>
-              </a:rPr>
-              <a:t>np.array</a:t>
-            </a:r>
-            <a:r>
-              <a:rPr lang="es-ES_tradnl" sz="2400" b="1" dirty="0">
-                <a:solidFill>
-                  <a:srgbClr val="000099"/>
-                </a:solidFill>
-                <a:latin typeface="Arial" pitchFamily="34" charset="0"/>
-                <a:cs typeface="Arial" pitchFamily="34" charset="0"/>
-              </a:rPr>
-              <a:t>( [1, 2, 3 ],[4, 5, 6],[7, 8, 9] )</a:t>
-            </a:r>
-          </a:p>
-          <a:p>
-            <a:pPr algn="just">
-              <a:lnSpc>
-                <a:spcPts val="3500"/>
-              </a:lnSpc>
-              <a:spcBef>
-                <a:spcPct val="0"/>
-              </a:spcBef>
-              <a:buFont typeface="Arial" pitchFamily="34" charset="0"/>
-              <a:buNone/>
-            </a:pPr>
-            <a:r>
-              <a:rPr lang="es-ES_tradnl" sz="2400" b="1" dirty="0">
-                <a:solidFill>
-                  <a:srgbClr val="000099"/>
-                </a:solidFill>
-                <a:latin typeface="Arial" pitchFamily="34" charset="0"/>
-                <a:cs typeface="Arial" pitchFamily="34" charset="0"/>
-              </a:rPr>
-              <a:t>	</a:t>
-            </a:r>
-            <a:r>
-              <a:rPr lang="es-ES_tradnl" sz="2400" b="1" dirty="0" err="1">
-                <a:solidFill>
-                  <a:srgbClr val="000099"/>
-                </a:solidFill>
-                <a:latin typeface="Arial" pitchFamily="34" charset="0"/>
-                <a:cs typeface="Arial" pitchFamily="34" charset="0"/>
-              </a:rPr>
-              <a:t>imprimeMatriz</a:t>
-            </a:r>
-            <a:r>
-              <a:rPr lang="es-ES_tradnl" sz="2400" b="1" dirty="0">
-                <a:solidFill>
-                  <a:srgbClr val="000099"/>
-                </a:solidFill>
-                <a:latin typeface="Arial" pitchFamily="34" charset="0"/>
-                <a:cs typeface="Arial" pitchFamily="34" charset="0"/>
-              </a:rPr>
-              <a:t>(</a:t>
-            </a:r>
-            <a:r>
-              <a:rPr lang="es-ES_tradnl" sz="2400" b="1" dirty="0">
-                <a:solidFill>
-                  <a:srgbClr val="00B050"/>
-                </a:solidFill>
-                <a:latin typeface="Arial" pitchFamily="34" charset="0"/>
-                <a:cs typeface="Arial" pitchFamily="34" charset="0"/>
-              </a:rPr>
-              <a:t>matriz</a:t>
-            </a:r>
-            <a:r>
-              <a:rPr lang="es-ES_tradnl" sz="2400" b="1" dirty="0">
-                <a:solidFill>
-                  <a:srgbClr val="000099"/>
-                </a:solidFill>
-                <a:latin typeface="Arial" pitchFamily="34" charset="0"/>
-                <a:cs typeface="Arial" pitchFamily="34" charset="0"/>
-              </a:rPr>
-              <a:t>)</a:t>
-            </a:r>
-          </a:p>
-          <a:p>
-            <a:pPr algn="just">
-              <a:lnSpc>
-                <a:spcPts val="3500"/>
-              </a:lnSpc>
-              <a:spcBef>
-                <a:spcPct val="0"/>
-              </a:spcBef>
-              <a:buFont typeface="Arial" pitchFamily="34" charset="0"/>
-              <a:buNone/>
-            </a:pPr>
-            <a:endParaRPr lang="es-ES_tradnl" sz="2400" b="1" dirty="0">
-              <a:solidFill>
-                <a:srgbClr val="000099"/>
-              </a:solidFill>
-              <a:latin typeface="Arial" pitchFamily="34" charset="0"/>
-              <a:cs typeface="Arial" pitchFamily="34" charset="0"/>
-            </a:endParaRPr>
-          </a:p>
-          <a:p>
-            <a:pPr algn="just">
-              <a:lnSpc>
-                <a:spcPts val="3500"/>
-              </a:lnSpc>
-              <a:spcBef>
-                <a:spcPct val="0"/>
-              </a:spcBef>
-              <a:buFont typeface="Arial" pitchFamily="34" charset="0"/>
-              <a:buNone/>
-            </a:pPr>
-            <a:r>
-              <a:rPr lang="es-ES_tradnl" sz="2400" b="1" dirty="0" err="1">
-                <a:solidFill>
-                  <a:srgbClr val="0070C0"/>
-                </a:solidFill>
-                <a:latin typeface="Arial" pitchFamily="34" charset="0"/>
-                <a:cs typeface="Arial" pitchFamily="34" charset="0"/>
-              </a:rPr>
-              <a:t>main</a:t>
-            </a:r>
-            <a:r>
-              <a:rPr lang="es-ES_tradnl" sz="2400" b="1" dirty="0">
-                <a:solidFill>
-                  <a:srgbClr val="0070C0"/>
-                </a:solidFill>
-                <a:latin typeface="Arial" pitchFamily="34" charset="0"/>
-                <a:cs typeface="Arial" pitchFamily="34" charset="0"/>
-              </a:rPr>
-              <a:t>()</a:t>
-            </a:r>
-            <a:endParaRPr lang="es-ES_tradnl" sz="2400" dirty="0">
-              <a:solidFill>
-                <a:srgbClr val="0070C0"/>
-              </a:solidFill>
-              <a:latin typeface="Arial" pitchFamily="34" charset="0"/>
-              <a:cs typeface="Arial" pitchFamily="34" charset="0"/>
-            </a:endParaRPr>
-          </a:p>
-        </p:txBody>
-      </p:sp>
-      <p:pic>
-        <p:nvPicPr>
-          <p:cNvPr id="9" name="2 Imagen">
-            <a:extLst>
-              <a:ext uri="{FF2B5EF4-FFF2-40B4-BE49-F238E27FC236}">
-                <a16:creationId xmlns:a16="http://schemas.microsoft.com/office/drawing/2014/main" id="{CFD7B6F3-9E66-4D61-90D7-7B4E81815E13}"/>
-              </a:ext>
-            </a:extLst>
-          </p:cNvPr>
-          <p:cNvPicPr>
-            <a:picLocks noChangeAspect="1"/>
-          </p:cNvPicPr>
-          <p:nvPr/>
-        </p:nvPicPr>
-        <p:blipFill>
-          <a:blip r:embed="rId2">
-            <a:extLst>
-              <a:ext uri="{28A0092B-C50C-407E-A947-70E740481C1C}">
-                <a14:useLocalDpi xmlns:a14="http://schemas.microsoft.com/office/drawing/2010/main" val="0"/>
-              </a:ext>
-            </a:extLst>
-          </a:blip>
-          <a:stretch>
-            <a:fillRect/>
-          </a:stretch>
-        </p:blipFill>
-        <p:spPr>
-          <a:xfrm>
-            <a:off x="6660232" y="2132856"/>
-            <a:ext cx="1889762" cy="1800200"/>
-          </a:xfrm>
-          <a:prstGeom prst="rect">
-            <a:avLst/>
-          </a:prstGeom>
-        </p:spPr>
-      </p:pic>
-    </p:spTree>
-    <p:extLst>
-      <p:ext uri="{BB962C8B-B14F-4D97-AF65-F5344CB8AC3E}">
-        <p14:creationId xmlns:p14="http://schemas.microsoft.com/office/powerpoint/2010/main" val="3781235135"/>
-      </p:ext>
-    </p:extLst>
-  </p:cSld>
-  <p:clrMapOvr>
-    <a:masterClrMapping/>
-  </p:clrMapOvr>
-  <p:timing>
-    <p:tnLst>
-      <p:par>
-        <p:cTn id="1" dur="indefinite" restart="never" nodeType="tmRoot">
-          <p:childTnLst>
-            <p:seq concurrent="1" nextAc="seek">
-              <p:cTn id="2" dur="indefinite" nodeType="mainSeq">
-                <p:childTnLst>
-                  <p:par>
-                    <p:cTn id="3" fill="hold">
-                      <p:stCondLst>
-                        <p:cond delay="indefinite"/>
-                      </p:stCondLst>
-                      <p:childTnLst>
-                        <p:par>
-                          <p:cTn id="4" fill="hold">
-                            <p:stCondLst>
-                              <p:cond delay="0"/>
-                            </p:stCondLst>
-                            <p:childTnLst>
-                              <p:par>
-                                <p:cTn id="5" presetID="2" presetClass="entr" presetSubtype="1" fill="hold" grpId="0" nodeType="clickEffect">
-                                  <p:stCondLst>
-                                    <p:cond delay="0"/>
-                                  </p:stCondLst>
-                                  <p:childTnLst>
-                                    <p:set>
-                                      <p:cBhvr>
-                                        <p:cTn id="6" dur="1" fill="hold">
-                                          <p:stCondLst>
-                                            <p:cond delay="0"/>
-                                          </p:stCondLst>
-                                        </p:cTn>
-                                        <p:tgtEl>
-                                          <p:spTgt spid="8">
-                                            <p:txEl>
-                                              <p:pRg st="0" end="0"/>
-                                            </p:txEl>
-                                          </p:spTgt>
-                                        </p:tgtEl>
-                                        <p:attrNameLst>
-                                          <p:attrName>style.visibility</p:attrName>
-                                        </p:attrNameLst>
-                                      </p:cBhvr>
-                                      <p:to>
-                                        <p:strVal val="visible"/>
-                                      </p:to>
-                                    </p:set>
-                                    <p:anim calcmode="lin" valueType="num">
-                                      <p:cBhvr additive="base">
-                                        <p:cTn id="7" dur="500" fill="hold"/>
-                                        <p:tgtEl>
-                                          <p:spTgt spid="8">
-                                            <p:txEl>
-                                              <p:pRg st="0" end="0"/>
-                                            </p:txEl>
-                                          </p:spTgt>
-                                        </p:tgtEl>
-                                        <p:attrNameLst>
-                                          <p:attrName>ppt_x</p:attrName>
-                                        </p:attrNameLst>
-                                      </p:cBhvr>
-                                      <p:tavLst>
-                                        <p:tav tm="0">
-                                          <p:val>
-                                            <p:strVal val="#ppt_x"/>
-                                          </p:val>
-                                        </p:tav>
-                                        <p:tav tm="100000">
-                                          <p:val>
-                                            <p:strVal val="#ppt_x"/>
-                                          </p:val>
-                                        </p:tav>
-                                      </p:tavLst>
-                                    </p:anim>
-                                    <p:anim calcmode="lin" valueType="num">
-                                      <p:cBhvr additive="base">
-                                        <p:cTn id="8" dur="500" fill="hold"/>
-                                        <p:tgtEl>
-                                          <p:spTgt spid="8">
-                                            <p:txEl>
-                                              <p:pRg st="0" end="0"/>
-                                            </p:txEl>
-                                          </p:spTgt>
-                                        </p:tgtEl>
-                                        <p:attrNameLst>
-                                          <p:attrName>ppt_y</p:attrName>
-                                        </p:attrNameLst>
-                                      </p:cBhvr>
-                                      <p:tavLst>
-                                        <p:tav tm="0">
-                                          <p:val>
-                                            <p:strVal val="0-#ppt_h/2"/>
-                                          </p:val>
-                                        </p:tav>
-                                        <p:tav tm="100000">
-                                          <p:val>
-                                            <p:strVal val="#ppt_y"/>
-                                          </p:val>
-                                        </p:tav>
-                                      </p:tavLst>
-                                    </p:anim>
-                                  </p:childTnLst>
-                                </p:cTn>
-                              </p:par>
-                            </p:childTnLst>
-                          </p:cTn>
-                        </p:par>
-                      </p:childTnLst>
-                    </p:cTn>
-                  </p:par>
-                  <p:par>
-                    <p:cTn id="9" fill="hold">
-                      <p:stCondLst>
-                        <p:cond delay="indefinite"/>
-                      </p:stCondLst>
-                      <p:childTnLst>
-                        <p:par>
-                          <p:cTn id="10" fill="hold">
-                            <p:stCondLst>
-                              <p:cond delay="0"/>
-                            </p:stCondLst>
-                            <p:childTnLst>
-                              <p:par>
-                                <p:cTn id="11" presetID="2" presetClass="entr" presetSubtype="1" fill="hold" grpId="0" nodeType="clickEffect">
-                                  <p:stCondLst>
-                                    <p:cond delay="0"/>
-                                  </p:stCondLst>
-                                  <p:childTnLst>
-                                    <p:set>
-                                      <p:cBhvr>
-                                        <p:cTn id="12" dur="1" fill="hold">
-                                          <p:stCondLst>
-                                            <p:cond delay="0"/>
-                                          </p:stCondLst>
-                                        </p:cTn>
-                                        <p:tgtEl>
-                                          <p:spTgt spid="8">
-                                            <p:txEl>
-                                              <p:pRg st="2" end="2"/>
-                                            </p:txEl>
-                                          </p:spTgt>
-                                        </p:tgtEl>
-                                        <p:attrNameLst>
-                                          <p:attrName>style.visibility</p:attrName>
-                                        </p:attrNameLst>
-                                      </p:cBhvr>
-                                      <p:to>
-                                        <p:strVal val="visible"/>
-                                      </p:to>
-                                    </p:set>
-                                    <p:anim calcmode="lin" valueType="num">
-                                      <p:cBhvr additive="base">
-                                        <p:cTn id="13" dur="500" fill="hold"/>
-                                        <p:tgtEl>
-                                          <p:spTgt spid="8">
-                                            <p:txEl>
-                                              <p:pRg st="2" end="2"/>
-                                            </p:txEl>
-                                          </p:spTgt>
-                                        </p:tgtEl>
-                                        <p:attrNameLst>
-                                          <p:attrName>ppt_x</p:attrName>
-                                        </p:attrNameLst>
-                                      </p:cBhvr>
-                                      <p:tavLst>
-                                        <p:tav tm="0">
-                                          <p:val>
-                                            <p:strVal val="#ppt_x"/>
-                                          </p:val>
-                                        </p:tav>
-                                        <p:tav tm="100000">
-                                          <p:val>
-                                            <p:strVal val="#ppt_x"/>
-                                          </p:val>
-                                        </p:tav>
-                                      </p:tavLst>
-                                    </p:anim>
-                                    <p:anim calcmode="lin" valueType="num">
-                                      <p:cBhvr additive="base">
-                                        <p:cTn id="14" dur="500" fill="hold"/>
-                                        <p:tgtEl>
-                                          <p:spTgt spid="8">
-                                            <p:txEl>
-                                              <p:pRg st="2" end="2"/>
-                                            </p:txEl>
-                                          </p:spTgt>
-                                        </p:tgtEl>
-                                        <p:attrNameLst>
-                                          <p:attrName>ppt_y</p:attrName>
-                                        </p:attrNameLst>
-                                      </p:cBhvr>
-                                      <p:tavLst>
-                                        <p:tav tm="0">
-                                          <p:val>
-                                            <p:strVal val="0-#ppt_h/2"/>
-                                          </p:val>
-                                        </p:tav>
-                                        <p:tav tm="100000">
-                                          <p:val>
-                                            <p:strVal val="#ppt_y"/>
-                                          </p:val>
-                                        </p:tav>
-                                      </p:tavLst>
-                                    </p:anim>
-                                  </p:childTnLst>
-                                </p:cTn>
-                              </p:par>
-                            </p:childTnLst>
-                          </p:cTn>
-                        </p:par>
-                      </p:childTnLst>
-                    </p:cTn>
-                  </p:par>
-                  <p:par>
-                    <p:cTn id="15" fill="hold">
-                      <p:stCondLst>
-                        <p:cond delay="indefinite"/>
-                      </p:stCondLst>
-                      <p:childTnLst>
-                        <p:par>
-                          <p:cTn id="16" fill="hold">
-                            <p:stCondLst>
-                              <p:cond delay="0"/>
-                            </p:stCondLst>
-                            <p:childTnLst>
-                              <p:par>
-                                <p:cTn id="17" presetID="2" presetClass="entr" presetSubtype="1" fill="hold" grpId="0" nodeType="clickEffect">
-                                  <p:stCondLst>
-                                    <p:cond delay="0"/>
-                                  </p:stCondLst>
-                                  <p:childTnLst>
-                                    <p:set>
-                                      <p:cBhvr>
-                                        <p:cTn id="18" dur="1" fill="hold">
-                                          <p:stCondLst>
-                                            <p:cond delay="0"/>
-                                          </p:stCondLst>
-                                        </p:cTn>
-                                        <p:tgtEl>
-                                          <p:spTgt spid="8">
-                                            <p:txEl>
-                                              <p:pRg st="3" end="3"/>
-                                            </p:txEl>
-                                          </p:spTgt>
-                                        </p:tgtEl>
-                                        <p:attrNameLst>
-                                          <p:attrName>style.visibility</p:attrName>
-                                        </p:attrNameLst>
-                                      </p:cBhvr>
-                                      <p:to>
-                                        <p:strVal val="visible"/>
-                                      </p:to>
-                                    </p:set>
-                                    <p:anim calcmode="lin" valueType="num">
-                                      <p:cBhvr additive="base">
-                                        <p:cTn id="19" dur="500" fill="hold"/>
-                                        <p:tgtEl>
-                                          <p:spTgt spid="8">
-                                            <p:txEl>
-                                              <p:pRg st="3" end="3"/>
-                                            </p:txEl>
-                                          </p:spTgt>
-                                        </p:tgtEl>
-                                        <p:attrNameLst>
-                                          <p:attrName>ppt_x</p:attrName>
-                                        </p:attrNameLst>
-                                      </p:cBhvr>
-                                      <p:tavLst>
-                                        <p:tav tm="0">
-                                          <p:val>
-                                            <p:strVal val="#ppt_x"/>
-                                          </p:val>
-                                        </p:tav>
-                                        <p:tav tm="100000">
-                                          <p:val>
-                                            <p:strVal val="#ppt_x"/>
-                                          </p:val>
-                                        </p:tav>
-                                      </p:tavLst>
-                                    </p:anim>
-                                    <p:anim calcmode="lin" valueType="num">
-                                      <p:cBhvr additive="base">
-                                        <p:cTn id="20" dur="500" fill="hold"/>
-                                        <p:tgtEl>
-                                          <p:spTgt spid="8">
-                                            <p:txEl>
-                                              <p:pRg st="3" end="3"/>
-                                            </p:txEl>
-                                          </p:spTgt>
-                                        </p:tgtEl>
-                                        <p:attrNameLst>
-                                          <p:attrName>ppt_y</p:attrName>
-                                        </p:attrNameLst>
-                                      </p:cBhvr>
-                                      <p:tavLst>
-                                        <p:tav tm="0">
-                                          <p:val>
-                                            <p:strVal val="0-#ppt_h/2"/>
-                                          </p:val>
-                                        </p:tav>
-                                        <p:tav tm="100000">
-                                          <p:val>
-                                            <p:strVal val="#ppt_y"/>
-                                          </p:val>
-                                        </p:tav>
-                                      </p:tavLst>
-                                    </p:anim>
-                                  </p:childTnLst>
-                                </p:cTn>
-                              </p:par>
-                            </p:childTnLst>
-                          </p:cTn>
-                        </p:par>
-                      </p:childTnLst>
-                    </p:cTn>
-                  </p:par>
-                  <p:par>
-                    <p:cTn id="21" fill="hold">
-                      <p:stCondLst>
-                        <p:cond delay="indefinite"/>
-                      </p:stCondLst>
-                      <p:childTnLst>
-                        <p:par>
-                          <p:cTn id="22" fill="hold">
-                            <p:stCondLst>
-                              <p:cond delay="0"/>
-                            </p:stCondLst>
-                            <p:childTnLst>
-                              <p:par>
-                                <p:cTn id="23" presetID="2" presetClass="entr" presetSubtype="1" fill="hold" grpId="0" nodeType="clickEffect">
-                                  <p:stCondLst>
-                                    <p:cond delay="0"/>
-                                  </p:stCondLst>
-                                  <p:childTnLst>
-                                    <p:set>
-                                      <p:cBhvr>
-                                        <p:cTn id="24" dur="1" fill="hold">
-                                          <p:stCondLst>
-                                            <p:cond delay="0"/>
-                                          </p:stCondLst>
-                                        </p:cTn>
-                                        <p:tgtEl>
-                                          <p:spTgt spid="8">
-                                            <p:txEl>
-                                              <p:pRg st="4" end="4"/>
-                                            </p:txEl>
-                                          </p:spTgt>
-                                        </p:tgtEl>
-                                        <p:attrNameLst>
-                                          <p:attrName>style.visibility</p:attrName>
-                                        </p:attrNameLst>
-                                      </p:cBhvr>
-                                      <p:to>
-                                        <p:strVal val="visible"/>
-                                      </p:to>
-                                    </p:set>
-                                    <p:anim calcmode="lin" valueType="num">
-                                      <p:cBhvr additive="base">
-                                        <p:cTn id="25" dur="500" fill="hold"/>
-                                        <p:tgtEl>
-                                          <p:spTgt spid="8">
-                                            <p:txEl>
-                                              <p:pRg st="4" end="4"/>
-                                            </p:txEl>
-                                          </p:spTgt>
-                                        </p:tgtEl>
-                                        <p:attrNameLst>
-                                          <p:attrName>ppt_x</p:attrName>
-                                        </p:attrNameLst>
-                                      </p:cBhvr>
-                                      <p:tavLst>
-                                        <p:tav tm="0">
-                                          <p:val>
-                                            <p:strVal val="#ppt_x"/>
-                                          </p:val>
-                                        </p:tav>
-                                        <p:tav tm="100000">
-                                          <p:val>
-                                            <p:strVal val="#ppt_x"/>
-                                          </p:val>
-                                        </p:tav>
-                                      </p:tavLst>
-                                    </p:anim>
-                                    <p:anim calcmode="lin" valueType="num">
-                                      <p:cBhvr additive="base">
-                                        <p:cTn id="26" dur="500" fill="hold"/>
-                                        <p:tgtEl>
-                                          <p:spTgt spid="8">
-                                            <p:txEl>
-                                              <p:pRg st="4" end="4"/>
-                                            </p:txEl>
-                                          </p:spTgt>
-                                        </p:tgtEl>
-                                        <p:attrNameLst>
-                                          <p:attrName>ppt_y</p:attrName>
-                                        </p:attrNameLst>
-                                      </p:cBhvr>
-                                      <p:tavLst>
-                                        <p:tav tm="0">
-                                          <p:val>
-                                            <p:strVal val="0-#ppt_h/2"/>
-                                          </p:val>
-                                        </p:tav>
-                                        <p:tav tm="100000">
-                                          <p:val>
-                                            <p:strVal val="#ppt_y"/>
-                                          </p:val>
-                                        </p:tav>
-                                      </p:tavLst>
-                                    </p:anim>
-                                  </p:childTnLst>
-                                </p:cTn>
-                              </p:par>
-                            </p:childTnLst>
-                          </p:cTn>
-                        </p:par>
-                      </p:childTnLst>
-                    </p:cTn>
-                  </p:par>
-                  <p:par>
-                    <p:cTn id="27" fill="hold">
-                      <p:stCondLst>
-                        <p:cond delay="indefinite"/>
-                      </p:stCondLst>
-                      <p:childTnLst>
-                        <p:par>
-                          <p:cTn id="28" fill="hold">
-                            <p:stCondLst>
-                              <p:cond delay="0"/>
-                            </p:stCondLst>
-                            <p:childTnLst>
-                              <p:par>
-                                <p:cTn id="29" presetID="2" presetClass="entr" presetSubtype="1" fill="hold" grpId="0" nodeType="clickEffect">
-                                  <p:stCondLst>
-                                    <p:cond delay="0"/>
-                                  </p:stCondLst>
-                                  <p:childTnLst>
-                                    <p:set>
-                                      <p:cBhvr>
-                                        <p:cTn id="30" dur="1" fill="hold">
-                                          <p:stCondLst>
-                                            <p:cond delay="0"/>
-                                          </p:stCondLst>
-                                        </p:cTn>
-                                        <p:tgtEl>
-                                          <p:spTgt spid="8">
-                                            <p:txEl>
-                                              <p:pRg st="5" end="5"/>
-                                            </p:txEl>
-                                          </p:spTgt>
-                                        </p:tgtEl>
-                                        <p:attrNameLst>
-                                          <p:attrName>style.visibility</p:attrName>
-                                        </p:attrNameLst>
-                                      </p:cBhvr>
-                                      <p:to>
-                                        <p:strVal val="visible"/>
-                                      </p:to>
-                                    </p:set>
-                                    <p:anim calcmode="lin" valueType="num">
-                                      <p:cBhvr additive="base">
-                                        <p:cTn id="31" dur="500" fill="hold"/>
-                                        <p:tgtEl>
-                                          <p:spTgt spid="8">
-                                            <p:txEl>
-                                              <p:pRg st="5" end="5"/>
-                                            </p:txEl>
-                                          </p:spTgt>
-                                        </p:tgtEl>
-                                        <p:attrNameLst>
-                                          <p:attrName>ppt_x</p:attrName>
-                                        </p:attrNameLst>
-                                      </p:cBhvr>
-                                      <p:tavLst>
-                                        <p:tav tm="0">
-                                          <p:val>
-                                            <p:strVal val="#ppt_x"/>
-                                          </p:val>
-                                        </p:tav>
-                                        <p:tav tm="100000">
-                                          <p:val>
-                                            <p:strVal val="#ppt_x"/>
-                                          </p:val>
-                                        </p:tav>
-                                      </p:tavLst>
-                                    </p:anim>
-                                    <p:anim calcmode="lin" valueType="num">
-                                      <p:cBhvr additive="base">
-                                        <p:cTn id="32" dur="500" fill="hold"/>
-                                        <p:tgtEl>
-                                          <p:spTgt spid="8">
-                                            <p:txEl>
-                                              <p:pRg st="5" end="5"/>
-                                            </p:txEl>
-                                          </p:spTgt>
-                                        </p:tgtEl>
-                                        <p:attrNameLst>
-                                          <p:attrName>ppt_y</p:attrName>
-                                        </p:attrNameLst>
-                                      </p:cBhvr>
-                                      <p:tavLst>
-                                        <p:tav tm="0">
-                                          <p:val>
-                                            <p:strVal val="0-#ppt_h/2"/>
-                                          </p:val>
-                                        </p:tav>
-                                        <p:tav tm="100000">
-                                          <p:val>
-                                            <p:strVal val="#ppt_y"/>
-                                          </p:val>
-                                        </p:tav>
-                                      </p:tavLst>
-                                    </p:anim>
-                                  </p:childTnLst>
-                                </p:cTn>
-                              </p:par>
-                            </p:childTnLst>
-                          </p:cTn>
-                        </p:par>
-                      </p:childTnLst>
-                    </p:cTn>
-                  </p:par>
-                  <p:par>
-                    <p:cTn id="33" fill="hold">
-                      <p:stCondLst>
-                        <p:cond delay="indefinite"/>
-                      </p:stCondLst>
-                      <p:childTnLst>
-                        <p:par>
-                          <p:cTn id="34" fill="hold">
-                            <p:stCondLst>
-                              <p:cond delay="0"/>
-                            </p:stCondLst>
-                            <p:childTnLst>
-                              <p:par>
-                                <p:cTn id="35" presetID="2" presetClass="entr" presetSubtype="1" fill="hold" grpId="0" nodeType="clickEffect">
-                                  <p:stCondLst>
-                                    <p:cond delay="0"/>
-                                  </p:stCondLst>
-                                  <p:childTnLst>
-                                    <p:set>
-                                      <p:cBhvr>
-                                        <p:cTn id="36" dur="1" fill="hold">
-                                          <p:stCondLst>
-                                            <p:cond delay="0"/>
-                                          </p:stCondLst>
-                                        </p:cTn>
-                                        <p:tgtEl>
-                                          <p:spTgt spid="8">
-                                            <p:txEl>
-                                              <p:pRg st="6" end="6"/>
-                                            </p:txEl>
-                                          </p:spTgt>
-                                        </p:tgtEl>
-                                        <p:attrNameLst>
-                                          <p:attrName>style.visibility</p:attrName>
-                                        </p:attrNameLst>
-                                      </p:cBhvr>
-                                      <p:to>
-                                        <p:strVal val="visible"/>
-                                      </p:to>
-                                    </p:set>
-                                    <p:anim calcmode="lin" valueType="num">
-                                      <p:cBhvr additive="base">
-                                        <p:cTn id="37" dur="500" fill="hold"/>
-                                        <p:tgtEl>
-                                          <p:spTgt spid="8">
-                                            <p:txEl>
-                                              <p:pRg st="6" end="6"/>
-                                            </p:txEl>
-                                          </p:spTgt>
-                                        </p:tgtEl>
-                                        <p:attrNameLst>
-                                          <p:attrName>ppt_x</p:attrName>
-                                        </p:attrNameLst>
-                                      </p:cBhvr>
-                                      <p:tavLst>
-                                        <p:tav tm="0">
-                                          <p:val>
-                                            <p:strVal val="#ppt_x"/>
-                                          </p:val>
-                                        </p:tav>
-                                        <p:tav tm="100000">
-                                          <p:val>
-                                            <p:strVal val="#ppt_x"/>
-                                          </p:val>
-                                        </p:tav>
-                                      </p:tavLst>
-                                    </p:anim>
-                                    <p:anim calcmode="lin" valueType="num">
-                                      <p:cBhvr additive="base">
-                                        <p:cTn id="38" dur="500" fill="hold"/>
-                                        <p:tgtEl>
-                                          <p:spTgt spid="8">
-                                            <p:txEl>
-                                              <p:pRg st="6" end="6"/>
-                                            </p:txEl>
-                                          </p:spTgt>
-                                        </p:tgtEl>
-                                        <p:attrNameLst>
-                                          <p:attrName>ppt_y</p:attrName>
-                                        </p:attrNameLst>
-                                      </p:cBhvr>
-                                      <p:tavLst>
-                                        <p:tav tm="0">
-                                          <p:val>
-                                            <p:strVal val="0-#ppt_h/2"/>
-                                          </p:val>
-                                        </p:tav>
-                                        <p:tav tm="100000">
-                                          <p:val>
-                                            <p:strVal val="#ppt_y"/>
-                                          </p:val>
-                                        </p:tav>
-                                      </p:tavLst>
-                                    </p:anim>
-                                  </p:childTnLst>
-                                </p:cTn>
-                              </p:par>
-                            </p:childTnLst>
-                          </p:cTn>
-                        </p:par>
-                      </p:childTnLst>
-                    </p:cTn>
-                  </p:par>
-                  <p:par>
-                    <p:cTn id="39" fill="hold">
-                      <p:stCondLst>
-                        <p:cond delay="indefinite"/>
-                      </p:stCondLst>
-                      <p:childTnLst>
-                        <p:par>
-                          <p:cTn id="40" fill="hold">
-                            <p:stCondLst>
-                              <p:cond delay="0"/>
-                            </p:stCondLst>
-                            <p:childTnLst>
-                              <p:par>
-                                <p:cTn id="41" presetID="2" presetClass="entr" presetSubtype="1" fill="hold" grpId="0" nodeType="clickEffect">
-                                  <p:stCondLst>
-                                    <p:cond delay="0"/>
-                                  </p:stCondLst>
-                                  <p:childTnLst>
-                                    <p:set>
-                                      <p:cBhvr>
-                                        <p:cTn id="42" dur="1" fill="hold">
-                                          <p:stCondLst>
-                                            <p:cond delay="0"/>
-                                          </p:stCondLst>
-                                        </p:cTn>
-                                        <p:tgtEl>
-                                          <p:spTgt spid="8">
-                                            <p:txEl>
-                                              <p:pRg st="8" end="8"/>
-                                            </p:txEl>
-                                          </p:spTgt>
-                                        </p:tgtEl>
-                                        <p:attrNameLst>
-                                          <p:attrName>style.visibility</p:attrName>
-                                        </p:attrNameLst>
-                                      </p:cBhvr>
-                                      <p:to>
-                                        <p:strVal val="visible"/>
-                                      </p:to>
-                                    </p:set>
-                                    <p:anim calcmode="lin" valueType="num">
-                                      <p:cBhvr additive="base">
-                                        <p:cTn id="43" dur="500" fill="hold"/>
-                                        <p:tgtEl>
-                                          <p:spTgt spid="8">
-                                            <p:txEl>
-                                              <p:pRg st="8" end="8"/>
-                                            </p:txEl>
-                                          </p:spTgt>
-                                        </p:tgtEl>
-                                        <p:attrNameLst>
-                                          <p:attrName>ppt_x</p:attrName>
-                                        </p:attrNameLst>
-                                      </p:cBhvr>
-                                      <p:tavLst>
-                                        <p:tav tm="0">
-                                          <p:val>
-                                            <p:strVal val="#ppt_x"/>
-                                          </p:val>
-                                        </p:tav>
-                                        <p:tav tm="100000">
-                                          <p:val>
-                                            <p:strVal val="#ppt_x"/>
-                                          </p:val>
-                                        </p:tav>
-                                      </p:tavLst>
-                                    </p:anim>
-                                    <p:anim calcmode="lin" valueType="num">
-                                      <p:cBhvr additive="base">
-                                        <p:cTn id="44" dur="500" fill="hold"/>
-                                        <p:tgtEl>
-                                          <p:spTgt spid="8">
-                                            <p:txEl>
-                                              <p:pRg st="8" end="8"/>
-                                            </p:txEl>
-                                          </p:spTgt>
-                                        </p:tgtEl>
-                                        <p:attrNameLst>
-                                          <p:attrName>ppt_y</p:attrName>
-                                        </p:attrNameLst>
-                                      </p:cBhvr>
-                                      <p:tavLst>
-                                        <p:tav tm="0">
-                                          <p:val>
-                                            <p:strVal val="0-#ppt_h/2"/>
-                                          </p:val>
-                                        </p:tav>
-                                        <p:tav tm="100000">
-                                          <p:val>
-                                            <p:strVal val="#ppt_y"/>
-                                          </p:val>
-                                        </p:tav>
-                                      </p:tavLst>
-                                    </p:anim>
-                                  </p:childTnLst>
-                                </p:cTn>
-                              </p:par>
-                            </p:childTnLst>
-                          </p:cTn>
-                        </p:par>
-                      </p:childTnLst>
-                    </p:cTn>
-                  </p:par>
-                  <p:par>
-                    <p:cTn id="45" fill="hold">
-                      <p:stCondLst>
-                        <p:cond delay="indefinite"/>
-                      </p:stCondLst>
-                      <p:childTnLst>
-                        <p:par>
-                          <p:cTn id="46" fill="hold">
-                            <p:stCondLst>
-                              <p:cond delay="0"/>
-                            </p:stCondLst>
-                            <p:childTnLst>
-                              <p:par>
-                                <p:cTn id="47" presetID="1" presetClass="entr" presetSubtype="0" fill="hold" nodeType="clickEffect">
-                                  <p:stCondLst>
-                                    <p:cond delay="0"/>
-                                  </p:stCondLst>
-                                  <p:childTnLst>
-                                    <p:set>
-                                      <p:cBhvr>
-                                        <p:cTn id="48" dur="1" fill="hold">
-                                          <p:stCondLst>
-                                            <p:cond delay="0"/>
-                                          </p:stCondLst>
-                                        </p:cTn>
-                                        <p:tgtEl>
-                                          <p:spTgt spid="8">
-                                            <p:txEl>
-                                              <p:pRg st="9" end="9"/>
-                                            </p:txEl>
-                                          </p:spTgt>
-                                        </p:tgtEl>
-                                        <p:attrNameLst>
-                                          <p:attrName>style.visibility</p:attrName>
-                                        </p:attrNameLst>
-                                      </p:cBhvr>
-                                      <p:to>
-                                        <p:strVal val="visible"/>
-                                      </p:to>
-                                    </p:set>
-                                  </p:childTnLst>
-                                </p:cTn>
-                              </p:par>
-                              <p:par>
-                                <p:cTn id="49" presetID="1" presetClass="entr" presetSubtype="0" fill="hold" nodeType="withEffect">
-                                  <p:stCondLst>
-                                    <p:cond delay="0"/>
-                                  </p:stCondLst>
-                                  <p:childTnLst>
-                                    <p:set>
-                                      <p:cBhvr>
-                                        <p:cTn id="50" dur="1" fill="hold">
-                                          <p:stCondLst>
-                                            <p:cond delay="0"/>
-                                          </p:stCondLst>
-                                        </p:cTn>
-                                        <p:tgtEl>
-                                          <p:spTgt spid="8">
-                                            <p:txEl>
-                                              <p:pRg st="10" end="10"/>
-                                            </p:txEl>
-                                          </p:spTgt>
-                                        </p:tgtEl>
-                                        <p:attrNameLst>
-                                          <p:attrName>style.visibility</p:attrName>
-                                        </p:attrNameLst>
-                                      </p:cBhvr>
-                                      <p:to>
-                                        <p:strVal val="visible"/>
-                                      </p:to>
-                                    </p:set>
-                                  </p:childTnLst>
-                                </p:cTn>
-                              </p:par>
-                              <p:par>
-                                <p:cTn id="51" presetID="1" presetClass="entr" presetSubtype="0" fill="hold" nodeType="withEffect">
-                                  <p:stCondLst>
-                                    <p:cond delay="0"/>
-                                  </p:stCondLst>
-                                  <p:childTnLst>
-                                    <p:set>
-                                      <p:cBhvr>
-                                        <p:cTn id="52" dur="1" fill="hold">
-                                          <p:stCondLst>
-                                            <p:cond delay="0"/>
-                                          </p:stCondLst>
-                                        </p:cTn>
-                                        <p:tgtEl>
-                                          <p:spTgt spid="8">
-                                            <p:txEl>
-                                              <p:pRg st="12" end="12"/>
-                                            </p:txEl>
-                                          </p:spTgt>
-                                        </p:tgtEl>
-                                        <p:attrNameLst>
-                                          <p:attrName>style.visibility</p:attrName>
-                                        </p:attrNameLst>
-                                      </p:cBhvr>
-                                      <p:to>
-                                        <p:strVal val="visible"/>
-                                      </p:to>
-                                    </p:set>
-                                  </p:childTnLst>
-                                </p:cTn>
-                              </p:par>
-                            </p:childTnLst>
-                          </p:cTn>
-                        </p:par>
-                      </p:childTnLst>
-                    </p:cTn>
-                  </p:par>
-                </p:childTnLst>
-              </p:cTn>
-              <p:prevCondLst>
-                <p:cond evt="onPrev" delay="0">
-                  <p:tgtEl>
-                    <p:sldTgt/>
-                  </p:tgtEl>
-                </p:cond>
-              </p:prevCondLst>
-              <p:nextCondLst>
-                <p:cond evt="onNext" delay="0">
-                  <p:tgtEl>
-                    <p:sldTgt/>
-                  </p:tgtEl>
-                </p:cond>
-              </p:nextCondLst>
-            </p:seq>
-          </p:childTnLst>
-        </p:cTn>
-      </p:par>
-    </p:tnLst>
-    <p:bldLst>
-      <p:bldP spid="8" grpId="0" build="p" autoUpdateAnimBg="0"/>
-    </p:bldLst>
-  </p:timing>
-</p:sld>
-</file>
-
-<file path=ppt/slides/slide15.xml><?xml version="1.0" encoding="utf-8"?>
-<p:sld xmlns:a="http://schemas.openxmlformats.org/drawingml/2006/main" xmlns:r="http://schemas.openxmlformats.org/officeDocument/2006/relationships" xmlns:p="http://schemas.openxmlformats.org/presentationml/2006/main">
-  <p:cSld>
-    <p:spTree>
-      <p:nvGrpSpPr>
-        <p:cNvPr id="1" name=""/>
-        <p:cNvGrpSpPr/>
-        <p:nvPr/>
-      </p:nvGrpSpPr>
-      <p:grpSpPr>
-        <a:xfrm>
-          <a:off x="0" y="0"/>
-          <a:ext cx="0" cy="0"/>
-          <a:chOff x="0" y="0"/>
-          <a:chExt cx="0" cy="0"/>
-        </a:xfrm>
-      </p:grpSpPr>
-      <p:sp>
-        <p:nvSpPr>
-          <p:cNvPr id="235523" name="Text Box 3"/>
-          <p:cNvSpPr txBox="1">
-            <a:spLocks noChangeArrowheads="1"/>
-          </p:cNvSpPr>
-          <p:nvPr/>
-        </p:nvSpPr>
-        <p:spPr bwMode="auto">
-          <a:xfrm>
-            <a:off x="323528" y="1401447"/>
-            <a:ext cx="7772400" cy="1845505"/>
-          </a:xfrm>
-          <a:prstGeom prst="rect">
-            <a:avLst/>
-          </a:prstGeom>
-          <a:noFill/>
-          <a:ln>
-            <a:noFill/>
-          </a:ln>
-          <a:effectLst/>
-          <a:extLst>
-            <a:ext uri="{909E8E84-426E-40DD-AFC4-6F175D3DCCD1}">
-              <a14:hiddenFill xmlns:a14="http://schemas.microsoft.com/office/drawing/2010/main">
-                <a:solidFill>
-                  <a:schemeClr val="accent1"/>
-                </a:solidFill>
-              </a14:hiddenFill>
-            </a:ext>
-            <a:ext uri="{91240B29-F687-4F45-9708-019B960494DF}">
-              <a14:hiddenLine xmlns:a14="http://schemas.microsoft.com/office/drawing/2010/main" w="12700">
-                <a:solidFill>
-                  <a:schemeClr val="tx1"/>
-                </a:solidFill>
-                <a:miter lim="800000"/>
-                <a:headEnd type="none" w="sm" len="sm"/>
-                <a:tailEnd type="none" w="sm" len="sm"/>
-              </a14:hiddenLine>
-            </a:ext>
-            <a:ext uri="{AF507438-7753-43E0-B8FC-AC1667EBCBE1}">
-              <a14:hiddenEffects xmlns:a14="http://schemas.microsoft.com/office/drawing/2010/main">
-                <a:effectLst>
-                  <a:outerShdw dist="35921" dir="2700000" algn="ctr" rotWithShape="0">
-                    <a:schemeClr val="bg2"/>
-                  </a:outerShdw>
-                </a:effectLst>
-              </a14:hiddenEffects>
-            </a:ext>
-          </a:extLst>
-        </p:spPr>
-        <p:txBody>
-          <a:bodyPr>
-            <a:spAutoFit/>
-          </a:bodyPr>
-          <a:lstStyle>
-            <a:lvl1pPr marL="457200" indent="-457200" defTabSz="762000" eaLnBrk="0" hangingPunct="0">
-              <a:defRPr sz="1600">
-                <a:solidFill>
-                  <a:schemeClr val="tx1"/>
-                </a:solidFill>
-                <a:latin typeface="Arial" pitchFamily="34" charset="0"/>
-              </a:defRPr>
-            </a:lvl1pPr>
-            <a:lvl2pPr marL="742950" indent="-285750" defTabSz="762000" eaLnBrk="0" hangingPunct="0">
-              <a:defRPr sz="1600">
-                <a:solidFill>
-                  <a:schemeClr val="tx1"/>
-                </a:solidFill>
-                <a:latin typeface="Arial" pitchFamily="34" charset="0"/>
-              </a:defRPr>
-            </a:lvl2pPr>
-            <a:lvl3pPr marL="1143000" indent="-228600" defTabSz="762000" eaLnBrk="0" hangingPunct="0">
-              <a:defRPr sz="1600">
-                <a:solidFill>
-                  <a:schemeClr val="tx1"/>
-                </a:solidFill>
-                <a:latin typeface="Arial" pitchFamily="34" charset="0"/>
-              </a:defRPr>
-            </a:lvl3pPr>
-            <a:lvl4pPr marL="1600200" indent="-228600" defTabSz="762000" eaLnBrk="0" hangingPunct="0">
-              <a:defRPr sz="1600">
-                <a:solidFill>
-                  <a:schemeClr val="tx1"/>
-                </a:solidFill>
-                <a:latin typeface="Arial" pitchFamily="34" charset="0"/>
-              </a:defRPr>
-            </a:lvl4pPr>
-            <a:lvl5pPr marL="2057400" indent="-228600" defTabSz="762000" eaLnBrk="0" hangingPunct="0">
-              <a:defRPr sz="1600">
-                <a:solidFill>
-                  <a:schemeClr val="tx1"/>
-                </a:solidFill>
-                <a:latin typeface="Arial" pitchFamily="34" charset="0"/>
-              </a:defRPr>
-            </a:lvl5pPr>
-            <a:lvl6pPr marL="2514600" indent="-228600" defTabSz="762000" eaLnBrk="0" fontAlgn="base" hangingPunct="0">
-              <a:spcBef>
-                <a:spcPct val="0"/>
-              </a:spcBef>
-              <a:spcAft>
-                <a:spcPct val="0"/>
-              </a:spcAft>
-              <a:defRPr sz="1600">
-                <a:solidFill>
-                  <a:schemeClr val="tx1"/>
-                </a:solidFill>
-                <a:latin typeface="Arial" pitchFamily="34" charset="0"/>
-              </a:defRPr>
-            </a:lvl6pPr>
-            <a:lvl7pPr marL="2971800" indent="-228600" defTabSz="762000" eaLnBrk="0" fontAlgn="base" hangingPunct="0">
-              <a:spcBef>
-                <a:spcPct val="0"/>
-              </a:spcBef>
-              <a:spcAft>
-                <a:spcPct val="0"/>
-              </a:spcAft>
-              <a:defRPr sz="1600">
-                <a:solidFill>
-                  <a:schemeClr val="tx1"/>
-                </a:solidFill>
-                <a:latin typeface="Arial" pitchFamily="34" charset="0"/>
-              </a:defRPr>
-            </a:lvl7pPr>
-            <a:lvl8pPr marL="3429000" indent="-228600" defTabSz="762000" eaLnBrk="0" fontAlgn="base" hangingPunct="0">
-              <a:spcBef>
-                <a:spcPct val="0"/>
-              </a:spcBef>
-              <a:spcAft>
-                <a:spcPct val="0"/>
-              </a:spcAft>
-              <a:defRPr sz="1600">
-                <a:solidFill>
-                  <a:schemeClr val="tx1"/>
-                </a:solidFill>
-                <a:latin typeface="Arial" pitchFamily="34" charset="0"/>
-              </a:defRPr>
-            </a:lvl8pPr>
-            <a:lvl9pPr marL="3886200" indent="-228600" defTabSz="762000" eaLnBrk="0" fontAlgn="base" hangingPunct="0">
-              <a:spcBef>
-                <a:spcPct val="0"/>
-              </a:spcBef>
-              <a:spcAft>
-                <a:spcPct val="0"/>
-              </a:spcAft>
-              <a:defRPr sz="1600">
-                <a:solidFill>
-                  <a:schemeClr val="tx1"/>
-                </a:solidFill>
-                <a:latin typeface="Arial" pitchFamily="34" charset="0"/>
-              </a:defRPr>
-            </a:lvl9pPr>
-          </a:lstStyle>
-          <a:p>
-            <a:pPr algn="ctr" eaLnBrk="1" hangingPunct="1">
-              <a:lnSpc>
-                <a:spcPts val="3500"/>
-              </a:lnSpc>
-              <a:buClr>
-                <a:schemeClr val="accent1"/>
-              </a:buClr>
-              <a:buSzPct val="80000"/>
-              <a:buFont typeface="Wingdings" pitchFamily="2" charset="2"/>
-              <a:buNone/>
-            </a:pPr>
-            <a:r>
-              <a:rPr lang="es-ES_tradnl" sz="2800" dirty="0"/>
-              <a:t>    </a:t>
-            </a:r>
-            <a:r>
-              <a:rPr lang="es-ES_tradnl" sz="2400" dirty="0">
-                <a:solidFill>
-                  <a:schemeClr val="bg2">
-                    <a:lumMod val="25000"/>
-                  </a:schemeClr>
-                </a:solidFill>
-              </a:rPr>
-              <a:t>Escriba el código de la función </a:t>
-            </a:r>
-            <a:r>
-              <a:rPr lang="es-ES_tradnl" sz="2400" b="1" dirty="0" err="1">
-                <a:solidFill>
-                  <a:srgbClr val="FF3300"/>
-                </a:solidFill>
-              </a:rPr>
-              <a:t>llena_matriz</a:t>
-            </a:r>
-            <a:r>
-              <a:rPr lang="es-ES_tradnl" sz="2400" dirty="0"/>
-              <a:t>, </a:t>
-            </a:r>
-            <a:r>
-              <a:rPr lang="es-ES_tradnl" sz="2400" dirty="0">
-                <a:solidFill>
-                  <a:schemeClr val="bg2">
-                    <a:lumMod val="25000"/>
-                  </a:schemeClr>
-                </a:solidFill>
-              </a:rPr>
-              <a:t>que recibe una matriz de enteros y le asigna a cada localidad un número consecutivo correspondiente del </a:t>
-            </a:r>
-            <a:r>
-              <a:rPr lang="es-ES_tradnl" sz="2400" b="1" dirty="0">
-                <a:solidFill>
-                  <a:srgbClr val="0070C0"/>
-                </a:solidFill>
-              </a:rPr>
-              <a:t>1</a:t>
-            </a:r>
-            <a:r>
-              <a:rPr lang="es-ES_tradnl" sz="2400" dirty="0">
-                <a:solidFill>
-                  <a:schemeClr val="accent2"/>
-                </a:solidFill>
-              </a:rPr>
-              <a:t> </a:t>
-            </a:r>
-            <a:r>
-              <a:rPr lang="es-ES_tradnl" sz="2400" dirty="0">
-                <a:solidFill>
-                  <a:schemeClr val="bg2">
-                    <a:lumMod val="25000"/>
-                  </a:schemeClr>
-                </a:solidFill>
-              </a:rPr>
-              <a:t>al </a:t>
-            </a:r>
-            <a:r>
-              <a:rPr lang="es-ES_tradnl" sz="2400" b="1" dirty="0">
-                <a:solidFill>
-                  <a:srgbClr val="0070C0"/>
-                </a:solidFill>
-              </a:rPr>
-              <a:t>9</a:t>
-            </a:r>
-            <a:r>
-              <a:rPr lang="es-ES_tradnl" sz="2400" dirty="0"/>
-              <a:t> </a:t>
-            </a:r>
-          </a:p>
-        </p:txBody>
-      </p:sp>
-      <p:sp>
-        <p:nvSpPr>
-          <p:cNvPr id="22532" name="Text Box 4"/>
-          <p:cNvSpPr txBox="1">
-            <a:spLocks noChangeArrowheads="1"/>
-          </p:cNvSpPr>
-          <p:nvPr/>
-        </p:nvSpPr>
-        <p:spPr bwMode="auto">
-          <a:xfrm>
-            <a:off x="6445076" y="4008239"/>
-            <a:ext cx="336550" cy="457200"/>
-          </a:xfrm>
-          <a:prstGeom prst="rect">
-            <a:avLst/>
-          </a:prstGeom>
-          <a:noFill/>
-          <a:ln>
-            <a:noFill/>
-          </a:ln>
-          <a:effectLst/>
-          <a:extLst>
-            <a:ext uri="{909E8E84-426E-40DD-AFC4-6F175D3DCCD1}">
-              <a14:hiddenFill xmlns:a14="http://schemas.microsoft.com/office/drawing/2010/main">
-                <a:solidFill>
-                  <a:schemeClr val="accent1"/>
-                </a:solidFill>
-              </a14:hiddenFill>
-            </a:ext>
-            <a:ext uri="{91240B29-F687-4F45-9708-019B960494DF}">
-              <a14:hiddenLine xmlns:a14="http://schemas.microsoft.com/office/drawing/2010/main" w="12700">
-                <a:solidFill>
-                  <a:schemeClr val="tx1"/>
-                </a:solidFill>
-                <a:miter lim="800000"/>
-                <a:headEnd type="none" w="sm" len="sm"/>
-                <a:tailEnd type="none" w="sm" len="sm"/>
-              </a14:hiddenLine>
-            </a:ext>
-            <a:ext uri="{AF507438-7753-43E0-B8FC-AC1667EBCBE1}">
-              <a14:hiddenEffects xmlns:a14="http://schemas.microsoft.com/office/drawing/2010/main">
-                <a:effectLst>
-                  <a:outerShdw dist="35921" dir="2700000" algn="ctr" rotWithShape="0">
-                    <a:schemeClr val="bg2"/>
-                  </a:outerShdw>
-                </a:effectLst>
-              </a14:hiddenEffects>
-            </a:ext>
-          </a:extLst>
-        </p:spPr>
-        <p:txBody>
-          <a:bodyPr wrap="none">
-            <a:spAutoFit/>
-          </a:bodyPr>
-          <a:lstStyle>
-            <a:lvl1pPr defTabSz="762000" eaLnBrk="0" hangingPunct="0">
-              <a:defRPr sz="1600">
-                <a:solidFill>
-                  <a:schemeClr val="tx1"/>
-                </a:solidFill>
-                <a:latin typeface="Arial" pitchFamily="34" charset="0"/>
-              </a:defRPr>
-            </a:lvl1pPr>
-            <a:lvl2pPr marL="742950" indent="-285750" defTabSz="762000" eaLnBrk="0" hangingPunct="0">
-              <a:defRPr sz="1600">
-                <a:solidFill>
-                  <a:schemeClr val="tx1"/>
-                </a:solidFill>
-                <a:latin typeface="Arial" pitchFamily="34" charset="0"/>
-              </a:defRPr>
-            </a:lvl2pPr>
-            <a:lvl3pPr marL="1143000" indent="-228600" defTabSz="762000" eaLnBrk="0" hangingPunct="0">
-              <a:defRPr sz="1600">
-                <a:solidFill>
-                  <a:schemeClr val="tx1"/>
-                </a:solidFill>
-                <a:latin typeface="Arial" pitchFamily="34" charset="0"/>
-              </a:defRPr>
-            </a:lvl3pPr>
-            <a:lvl4pPr marL="1600200" indent="-228600" defTabSz="762000" eaLnBrk="0" hangingPunct="0">
-              <a:defRPr sz="1600">
-                <a:solidFill>
-                  <a:schemeClr val="tx1"/>
-                </a:solidFill>
-                <a:latin typeface="Arial" pitchFamily="34" charset="0"/>
-              </a:defRPr>
-            </a:lvl4pPr>
-            <a:lvl5pPr marL="2057400" indent="-228600" defTabSz="762000" eaLnBrk="0" hangingPunct="0">
-              <a:defRPr sz="1600">
-                <a:solidFill>
-                  <a:schemeClr val="tx1"/>
-                </a:solidFill>
-                <a:latin typeface="Arial" pitchFamily="34" charset="0"/>
-              </a:defRPr>
-            </a:lvl5pPr>
-            <a:lvl6pPr marL="2514600" indent="-228600" defTabSz="762000" eaLnBrk="0" fontAlgn="base" hangingPunct="0">
-              <a:spcBef>
-                <a:spcPct val="0"/>
-              </a:spcBef>
-              <a:spcAft>
-                <a:spcPct val="0"/>
-              </a:spcAft>
-              <a:defRPr sz="1600">
-                <a:solidFill>
-                  <a:schemeClr val="tx1"/>
-                </a:solidFill>
-                <a:latin typeface="Arial" pitchFamily="34" charset="0"/>
-              </a:defRPr>
-            </a:lvl6pPr>
-            <a:lvl7pPr marL="2971800" indent="-228600" defTabSz="762000" eaLnBrk="0" fontAlgn="base" hangingPunct="0">
-              <a:spcBef>
-                <a:spcPct val="0"/>
-              </a:spcBef>
-              <a:spcAft>
-                <a:spcPct val="0"/>
-              </a:spcAft>
-              <a:defRPr sz="1600">
-                <a:solidFill>
-                  <a:schemeClr val="tx1"/>
-                </a:solidFill>
-                <a:latin typeface="Arial" pitchFamily="34" charset="0"/>
-              </a:defRPr>
-            </a:lvl7pPr>
-            <a:lvl8pPr marL="3429000" indent="-228600" defTabSz="762000" eaLnBrk="0" fontAlgn="base" hangingPunct="0">
-              <a:spcBef>
-                <a:spcPct val="0"/>
-              </a:spcBef>
-              <a:spcAft>
-                <a:spcPct val="0"/>
-              </a:spcAft>
-              <a:defRPr sz="1600">
-                <a:solidFill>
-                  <a:schemeClr val="tx1"/>
-                </a:solidFill>
-                <a:latin typeface="Arial" pitchFamily="34" charset="0"/>
-              </a:defRPr>
-            </a:lvl8pPr>
-            <a:lvl9pPr marL="3886200" indent="-228600" defTabSz="762000" eaLnBrk="0" fontAlgn="base" hangingPunct="0">
-              <a:spcBef>
-                <a:spcPct val="0"/>
-              </a:spcBef>
-              <a:spcAft>
-                <a:spcPct val="0"/>
-              </a:spcAft>
-              <a:defRPr sz="1600">
-                <a:solidFill>
-                  <a:schemeClr val="tx1"/>
-                </a:solidFill>
-                <a:latin typeface="Arial" pitchFamily="34" charset="0"/>
-              </a:defRPr>
-            </a:lvl9pPr>
-          </a:lstStyle>
-          <a:p>
-            <a:pPr algn="ctr" eaLnBrk="1" hangingPunct="1"/>
-            <a:r>
-              <a:rPr lang="es-ES_tradnl" sz="2400" b="1">
-                <a:solidFill>
-                  <a:srgbClr val="FF0000"/>
-                </a:solidFill>
-                <a:latin typeface="Times New Roman" pitchFamily="18" charset="0"/>
-              </a:rPr>
-              <a:t>0</a:t>
-            </a:r>
-          </a:p>
-        </p:txBody>
-      </p:sp>
-      <p:sp>
-        <p:nvSpPr>
-          <p:cNvPr id="22533" name="Text Box 5"/>
-          <p:cNvSpPr txBox="1">
-            <a:spLocks noChangeArrowheads="1"/>
-          </p:cNvSpPr>
-          <p:nvPr/>
-        </p:nvSpPr>
-        <p:spPr bwMode="auto">
-          <a:xfrm>
-            <a:off x="6984826" y="4005064"/>
-            <a:ext cx="336550" cy="457200"/>
-          </a:xfrm>
-          <a:prstGeom prst="rect">
-            <a:avLst/>
-          </a:prstGeom>
-          <a:noFill/>
-          <a:ln>
-            <a:noFill/>
-          </a:ln>
-          <a:effectLst/>
-          <a:extLst>
-            <a:ext uri="{909E8E84-426E-40DD-AFC4-6F175D3DCCD1}">
-              <a14:hiddenFill xmlns:a14="http://schemas.microsoft.com/office/drawing/2010/main">
-                <a:solidFill>
-                  <a:schemeClr val="accent1"/>
-                </a:solidFill>
-              </a14:hiddenFill>
-            </a:ext>
-            <a:ext uri="{91240B29-F687-4F45-9708-019B960494DF}">
-              <a14:hiddenLine xmlns:a14="http://schemas.microsoft.com/office/drawing/2010/main" w="12700">
-                <a:solidFill>
-                  <a:schemeClr val="tx1"/>
-                </a:solidFill>
-                <a:miter lim="800000"/>
-                <a:headEnd type="none" w="sm" len="sm"/>
-                <a:tailEnd type="none" w="sm" len="sm"/>
-              </a14:hiddenLine>
-            </a:ext>
-            <a:ext uri="{AF507438-7753-43E0-B8FC-AC1667EBCBE1}">
-              <a14:hiddenEffects xmlns:a14="http://schemas.microsoft.com/office/drawing/2010/main">
-                <a:effectLst>
-                  <a:outerShdw dist="35921" dir="2700000" algn="ctr" rotWithShape="0">
-                    <a:schemeClr val="bg2"/>
-                  </a:outerShdw>
-                </a:effectLst>
-              </a14:hiddenEffects>
-            </a:ext>
-          </a:extLst>
-        </p:spPr>
-        <p:txBody>
-          <a:bodyPr wrap="none">
-            <a:spAutoFit/>
-          </a:bodyPr>
-          <a:lstStyle>
-            <a:lvl1pPr defTabSz="762000" eaLnBrk="0" hangingPunct="0">
-              <a:defRPr sz="1600">
-                <a:solidFill>
-                  <a:schemeClr val="tx1"/>
-                </a:solidFill>
-                <a:latin typeface="Arial" pitchFamily="34" charset="0"/>
-              </a:defRPr>
-            </a:lvl1pPr>
-            <a:lvl2pPr marL="742950" indent="-285750" defTabSz="762000" eaLnBrk="0" hangingPunct="0">
-              <a:defRPr sz="1600">
-                <a:solidFill>
-                  <a:schemeClr val="tx1"/>
-                </a:solidFill>
-                <a:latin typeface="Arial" pitchFamily="34" charset="0"/>
-              </a:defRPr>
-            </a:lvl2pPr>
-            <a:lvl3pPr marL="1143000" indent="-228600" defTabSz="762000" eaLnBrk="0" hangingPunct="0">
-              <a:defRPr sz="1600">
-                <a:solidFill>
-                  <a:schemeClr val="tx1"/>
-                </a:solidFill>
-                <a:latin typeface="Arial" pitchFamily="34" charset="0"/>
-              </a:defRPr>
-            </a:lvl3pPr>
-            <a:lvl4pPr marL="1600200" indent="-228600" defTabSz="762000" eaLnBrk="0" hangingPunct="0">
-              <a:defRPr sz="1600">
-                <a:solidFill>
-                  <a:schemeClr val="tx1"/>
-                </a:solidFill>
-                <a:latin typeface="Arial" pitchFamily="34" charset="0"/>
-              </a:defRPr>
-            </a:lvl4pPr>
-            <a:lvl5pPr marL="2057400" indent="-228600" defTabSz="762000" eaLnBrk="0" hangingPunct="0">
-              <a:defRPr sz="1600">
-                <a:solidFill>
-                  <a:schemeClr val="tx1"/>
-                </a:solidFill>
-                <a:latin typeface="Arial" pitchFamily="34" charset="0"/>
-              </a:defRPr>
-            </a:lvl5pPr>
-            <a:lvl6pPr marL="2514600" indent="-228600" defTabSz="762000" eaLnBrk="0" fontAlgn="base" hangingPunct="0">
-              <a:spcBef>
-                <a:spcPct val="0"/>
-              </a:spcBef>
-              <a:spcAft>
-                <a:spcPct val="0"/>
-              </a:spcAft>
-              <a:defRPr sz="1600">
-                <a:solidFill>
-                  <a:schemeClr val="tx1"/>
-                </a:solidFill>
-                <a:latin typeface="Arial" pitchFamily="34" charset="0"/>
-              </a:defRPr>
-            </a:lvl6pPr>
-            <a:lvl7pPr marL="2971800" indent="-228600" defTabSz="762000" eaLnBrk="0" fontAlgn="base" hangingPunct="0">
-              <a:spcBef>
-                <a:spcPct val="0"/>
-              </a:spcBef>
-              <a:spcAft>
-                <a:spcPct val="0"/>
-              </a:spcAft>
-              <a:defRPr sz="1600">
-                <a:solidFill>
-                  <a:schemeClr val="tx1"/>
-                </a:solidFill>
-                <a:latin typeface="Arial" pitchFamily="34" charset="0"/>
-              </a:defRPr>
-            </a:lvl7pPr>
-            <a:lvl8pPr marL="3429000" indent="-228600" defTabSz="762000" eaLnBrk="0" fontAlgn="base" hangingPunct="0">
-              <a:spcBef>
-                <a:spcPct val="0"/>
-              </a:spcBef>
-              <a:spcAft>
-                <a:spcPct val="0"/>
-              </a:spcAft>
-              <a:defRPr sz="1600">
-                <a:solidFill>
-                  <a:schemeClr val="tx1"/>
-                </a:solidFill>
-                <a:latin typeface="Arial" pitchFamily="34" charset="0"/>
-              </a:defRPr>
-            </a:lvl8pPr>
-            <a:lvl9pPr marL="3886200" indent="-228600" defTabSz="762000" eaLnBrk="0" fontAlgn="base" hangingPunct="0">
-              <a:spcBef>
-                <a:spcPct val="0"/>
-              </a:spcBef>
-              <a:spcAft>
-                <a:spcPct val="0"/>
-              </a:spcAft>
-              <a:defRPr sz="1600">
-                <a:solidFill>
-                  <a:schemeClr val="tx1"/>
-                </a:solidFill>
-                <a:latin typeface="Arial" pitchFamily="34" charset="0"/>
-              </a:defRPr>
-            </a:lvl9pPr>
-          </a:lstStyle>
-          <a:p>
-            <a:pPr algn="ctr" eaLnBrk="1" hangingPunct="1"/>
-            <a:r>
-              <a:rPr lang="es-ES_tradnl" sz="2400" b="1">
-                <a:solidFill>
-                  <a:srgbClr val="FF0000"/>
-                </a:solidFill>
-                <a:latin typeface="Times New Roman" pitchFamily="18" charset="0"/>
-              </a:rPr>
-              <a:t>1</a:t>
-            </a:r>
-          </a:p>
-        </p:txBody>
-      </p:sp>
-      <p:sp>
-        <p:nvSpPr>
-          <p:cNvPr id="22534" name="Text Box 6"/>
-          <p:cNvSpPr txBox="1">
-            <a:spLocks noChangeArrowheads="1"/>
-          </p:cNvSpPr>
-          <p:nvPr/>
-        </p:nvSpPr>
-        <p:spPr bwMode="auto">
-          <a:xfrm>
-            <a:off x="7473776" y="4005064"/>
-            <a:ext cx="336550" cy="457200"/>
-          </a:xfrm>
-          <a:prstGeom prst="rect">
-            <a:avLst/>
-          </a:prstGeom>
-          <a:noFill/>
-          <a:ln>
-            <a:noFill/>
-          </a:ln>
-          <a:effectLst/>
-          <a:extLst>
-            <a:ext uri="{909E8E84-426E-40DD-AFC4-6F175D3DCCD1}">
-              <a14:hiddenFill xmlns:a14="http://schemas.microsoft.com/office/drawing/2010/main">
-                <a:solidFill>
-                  <a:schemeClr val="accent1"/>
-                </a:solidFill>
-              </a14:hiddenFill>
-            </a:ext>
-            <a:ext uri="{91240B29-F687-4F45-9708-019B960494DF}">
-              <a14:hiddenLine xmlns:a14="http://schemas.microsoft.com/office/drawing/2010/main" w="12700">
-                <a:solidFill>
-                  <a:schemeClr val="tx1"/>
-                </a:solidFill>
-                <a:miter lim="800000"/>
-                <a:headEnd type="none" w="sm" len="sm"/>
-                <a:tailEnd type="none" w="sm" len="sm"/>
-              </a14:hiddenLine>
-            </a:ext>
-            <a:ext uri="{AF507438-7753-43E0-B8FC-AC1667EBCBE1}">
-              <a14:hiddenEffects xmlns:a14="http://schemas.microsoft.com/office/drawing/2010/main">
-                <a:effectLst>
-                  <a:outerShdw dist="35921" dir="2700000" algn="ctr" rotWithShape="0">
-                    <a:schemeClr val="bg2"/>
-                  </a:outerShdw>
-                </a:effectLst>
-              </a14:hiddenEffects>
-            </a:ext>
-          </a:extLst>
-        </p:spPr>
-        <p:txBody>
-          <a:bodyPr wrap="none">
-            <a:spAutoFit/>
-          </a:bodyPr>
-          <a:lstStyle>
-            <a:lvl1pPr defTabSz="762000" eaLnBrk="0" hangingPunct="0">
-              <a:defRPr sz="1600">
-                <a:solidFill>
-                  <a:schemeClr val="tx1"/>
-                </a:solidFill>
-                <a:latin typeface="Arial" pitchFamily="34" charset="0"/>
-              </a:defRPr>
-            </a:lvl1pPr>
-            <a:lvl2pPr marL="742950" indent="-285750" defTabSz="762000" eaLnBrk="0" hangingPunct="0">
-              <a:defRPr sz="1600">
-                <a:solidFill>
-                  <a:schemeClr val="tx1"/>
-                </a:solidFill>
-                <a:latin typeface="Arial" pitchFamily="34" charset="0"/>
-              </a:defRPr>
-            </a:lvl2pPr>
-            <a:lvl3pPr marL="1143000" indent="-228600" defTabSz="762000" eaLnBrk="0" hangingPunct="0">
-              <a:defRPr sz="1600">
-                <a:solidFill>
-                  <a:schemeClr val="tx1"/>
-                </a:solidFill>
-                <a:latin typeface="Arial" pitchFamily="34" charset="0"/>
-              </a:defRPr>
-            </a:lvl3pPr>
-            <a:lvl4pPr marL="1600200" indent="-228600" defTabSz="762000" eaLnBrk="0" hangingPunct="0">
-              <a:defRPr sz="1600">
-                <a:solidFill>
-                  <a:schemeClr val="tx1"/>
-                </a:solidFill>
-                <a:latin typeface="Arial" pitchFamily="34" charset="0"/>
-              </a:defRPr>
-            </a:lvl4pPr>
-            <a:lvl5pPr marL="2057400" indent="-228600" defTabSz="762000" eaLnBrk="0" hangingPunct="0">
-              <a:defRPr sz="1600">
-                <a:solidFill>
-                  <a:schemeClr val="tx1"/>
-                </a:solidFill>
-                <a:latin typeface="Arial" pitchFamily="34" charset="0"/>
-              </a:defRPr>
-            </a:lvl5pPr>
-            <a:lvl6pPr marL="2514600" indent="-228600" defTabSz="762000" eaLnBrk="0" fontAlgn="base" hangingPunct="0">
-              <a:spcBef>
-                <a:spcPct val="0"/>
-              </a:spcBef>
-              <a:spcAft>
-                <a:spcPct val="0"/>
-              </a:spcAft>
-              <a:defRPr sz="1600">
-                <a:solidFill>
-                  <a:schemeClr val="tx1"/>
-                </a:solidFill>
-                <a:latin typeface="Arial" pitchFamily="34" charset="0"/>
-              </a:defRPr>
-            </a:lvl6pPr>
-            <a:lvl7pPr marL="2971800" indent="-228600" defTabSz="762000" eaLnBrk="0" fontAlgn="base" hangingPunct="0">
-              <a:spcBef>
-                <a:spcPct val="0"/>
-              </a:spcBef>
-              <a:spcAft>
-                <a:spcPct val="0"/>
-              </a:spcAft>
-              <a:defRPr sz="1600">
-                <a:solidFill>
-                  <a:schemeClr val="tx1"/>
-                </a:solidFill>
-                <a:latin typeface="Arial" pitchFamily="34" charset="0"/>
-              </a:defRPr>
-            </a:lvl7pPr>
-            <a:lvl8pPr marL="3429000" indent="-228600" defTabSz="762000" eaLnBrk="0" fontAlgn="base" hangingPunct="0">
-              <a:spcBef>
-                <a:spcPct val="0"/>
-              </a:spcBef>
-              <a:spcAft>
-                <a:spcPct val="0"/>
-              </a:spcAft>
-              <a:defRPr sz="1600">
-                <a:solidFill>
-                  <a:schemeClr val="tx1"/>
-                </a:solidFill>
-                <a:latin typeface="Arial" pitchFamily="34" charset="0"/>
-              </a:defRPr>
-            </a:lvl8pPr>
-            <a:lvl9pPr marL="3886200" indent="-228600" defTabSz="762000" eaLnBrk="0" fontAlgn="base" hangingPunct="0">
-              <a:spcBef>
-                <a:spcPct val="0"/>
-              </a:spcBef>
-              <a:spcAft>
-                <a:spcPct val="0"/>
-              </a:spcAft>
-              <a:defRPr sz="1600">
-                <a:solidFill>
-                  <a:schemeClr val="tx1"/>
-                </a:solidFill>
-                <a:latin typeface="Arial" pitchFamily="34" charset="0"/>
-              </a:defRPr>
-            </a:lvl9pPr>
-          </a:lstStyle>
-          <a:p>
-            <a:pPr algn="ctr" eaLnBrk="1" hangingPunct="1"/>
-            <a:r>
-              <a:rPr lang="es-ES_tradnl" sz="2400" b="1">
-                <a:solidFill>
-                  <a:srgbClr val="FF0000"/>
-                </a:solidFill>
-                <a:latin typeface="Times New Roman" pitchFamily="18" charset="0"/>
-              </a:rPr>
-              <a:t>2</a:t>
-            </a:r>
-          </a:p>
-        </p:txBody>
-      </p:sp>
-      <p:sp>
-        <p:nvSpPr>
-          <p:cNvPr id="22535" name="Rectangle 7"/>
-          <p:cNvSpPr>
-            <a:spLocks noChangeArrowheads="1"/>
-          </p:cNvSpPr>
-          <p:nvPr/>
-        </p:nvSpPr>
-        <p:spPr bwMode="auto">
-          <a:xfrm>
-            <a:off x="6330776" y="4484489"/>
-            <a:ext cx="533400" cy="533400"/>
-          </a:xfrm>
-          <a:prstGeom prst="rect">
-            <a:avLst/>
-          </a:prstGeom>
-          <a:solidFill>
-            <a:schemeClr val="bg1"/>
-          </a:solidFill>
-          <a:ln w="38100">
-            <a:solidFill>
-              <a:schemeClr val="tx1"/>
-            </a:solidFill>
-            <a:miter lim="800000"/>
-            <a:headEnd type="none" w="sm" len="sm"/>
-            <a:tailEnd type="none" w="sm" len="sm"/>
-          </a:ln>
-          <a:effectLst/>
-          <a:extLst>
-            <a:ext uri="{AF507438-7753-43E0-B8FC-AC1667EBCBE1}">
-              <a14:hiddenEffects xmlns:a14="http://schemas.microsoft.com/office/drawing/2010/main">
-                <a:effectLst>
-                  <a:outerShdw dist="35921" dir="2700000" algn="ctr" rotWithShape="0">
-                    <a:schemeClr val="bg2"/>
-                  </a:outerShdw>
-                </a:effectLst>
-              </a14:hiddenEffects>
-            </a:ext>
-          </a:extLst>
-        </p:spPr>
-        <p:txBody>
-          <a:bodyPr wrap="none" anchor="ctr"/>
-          <a:lstStyle/>
-          <a:p>
-            <a:pPr algn="ctr" defTabSz="762000"/>
-            <a:endParaRPr lang="es-MX" sz="2400">
-              <a:latin typeface="Times New Roman" pitchFamily="18" charset="0"/>
-            </a:endParaRPr>
-          </a:p>
-        </p:txBody>
-      </p:sp>
-      <p:sp>
-        <p:nvSpPr>
-          <p:cNvPr id="22536" name="Rectangle 8"/>
-          <p:cNvSpPr>
-            <a:spLocks noChangeArrowheads="1"/>
-          </p:cNvSpPr>
-          <p:nvPr/>
-        </p:nvSpPr>
-        <p:spPr bwMode="auto">
-          <a:xfrm>
-            <a:off x="6864176" y="4484489"/>
-            <a:ext cx="533400" cy="533400"/>
-          </a:xfrm>
-          <a:prstGeom prst="rect">
-            <a:avLst/>
-          </a:prstGeom>
-          <a:solidFill>
-            <a:schemeClr val="bg1"/>
-          </a:solidFill>
-          <a:ln w="38100">
-            <a:solidFill>
-              <a:schemeClr val="tx1"/>
-            </a:solidFill>
-            <a:miter lim="800000"/>
-            <a:headEnd type="none" w="sm" len="sm"/>
-            <a:tailEnd type="none" w="sm" len="sm"/>
-          </a:ln>
-          <a:effectLst/>
-          <a:extLst>
-            <a:ext uri="{AF507438-7753-43E0-B8FC-AC1667EBCBE1}">
-              <a14:hiddenEffects xmlns:a14="http://schemas.microsoft.com/office/drawing/2010/main">
-                <a:effectLst>
-                  <a:outerShdw dist="35921" dir="2700000" algn="ctr" rotWithShape="0">
-                    <a:schemeClr val="bg2"/>
-                  </a:outerShdw>
-                </a:effectLst>
-              </a14:hiddenEffects>
-            </a:ext>
-          </a:extLst>
-        </p:spPr>
-        <p:txBody>
-          <a:bodyPr wrap="none" anchor="ctr"/>
-          <a:lstStyle/>
-          <a:p>
-            <a:pPr algn="ctr" defTabSz="762000"/>
-            <a:endParaRPr lang="es-ES" sz="2400">
-              <a:latin typeface="Times New Roman" pitchFamily="18" charset="0"/>
-            </a:endParaRPr>
-          </a:p>
-        </p:txBody>
-      </p:sp>
-      <p:sp>
-        <p:nvSpPr>
-          <p:cNvPr id="22537" name="Rectangle 9"/>
-          <p:cNvSpPr>
-            <a:spLocks noChangeArrowheads="1"/>
-          </p:cNvSpPr>
-          <p:nvPr/>
-        </p:nvSpPr>
-        <p:spPr bwMode="auto">
-          <a:xfrm>
-            <a:off x="7397576" y="4484489"/>
-            <a:ext cx="533400" cy="533400"/>
-          </a:xfrm>
-          <a:prstGeom prst="rect">
-            <a:avLst/>
-          </a:prstGeom>
-          <a:solidFill>
-            <a:schemeClr val="bg1"/>
-          </a:solidFill>
-          <a:ln w="38100">
-            <a:solidFill>
-              <a:schemeClr val="tx1"/>
-            </a:solidFill>
-            <a:miter lim="800000"/>
-            <a:headEnd type="none" w="sm" len="sm"/>
-            <a:tailEnd type="none" w="sm" len="sm"/>
-          </a:ln>
-          <a:effectLst/>
-          <a:extLst>
-            <a:ext uri="{AF507438-7753-43E0-B8FC-AC1667EBCBE1}">
-              <a14:hiddenEffects xmlns:a14="http://schemas.microsoft.com/office/drawing/2010/main">
-                <a:effectLst>
-                  <a:outerShdw dist="35921" dir="2700000" algn="ctr" rotWithShape="0">
-                    <a:schemeClr val="bg2"/>
-                  </a:outerShdw>
-                </a:effectLst>
-              </a14:hiddenEffects>
-            </a:ext>
-          </a:extLst>
-        </p:spPr>
-        <p:txBody>
-          <a:bodyPr wrap="none" anchor="ctr"/>
-          <a:lstStyle/>
-          <a:p>
-            <a:endParaRPr lang="es-MX"/>
-          </a:p>
-        </p:txBody>
-      </p:sp>
-      <p:sp>
-        <p:nvSpPr>
-          <p:cNvPr id="22538" name="Rectangle 10"/>
-          <p:cNvSpPr>
-            <a:spLocks noChangeArrowheads="1"/>
-          </p:cNvSpPr>
-          <p:nvPr/>
-        </p:nvSpPr>
-        <p:spPr bwMode="auto">
-          <a:xfrm>
-            <a:off x="6330776" y="5017889"/>
-            <a:ext cx="533400" cy="533400"/>
-          </a:xfrm>
-          <a:prstGeom prst="rect">
-            <a:avLst/>
-          </a:prstGeom>
-          <a:solidFill>
-            <a:schemeClr val="bg1"/>
-          </a:solidFill>
-          <a:ln w="38100">
-            <a:solidFill>
-              <a:schemeClr val="tx1"/>
-            </a:solidFill>
-            <a:miter lim="800000"/>
-            <a:headEnd type="none" w="sm" len="sm"/>
-            <a:tailEnd type="none" w="sm" len="sm"/>
-          </a:ln>
-          <a:effectLst/>
-          <a:extLst>
-            <a:ext uri="{AF507438-7753-43E0-B8FC-AC1667EBCBE1}">
-              <a14:hiddenEffects xmlns:a14="http://schemas.microsoft.com/office/drawing/2010/main">
-                <a:effectLst>
-                  <a:outerShdw dist="35921" dir="2700000" algn="ctr" rotWithShape="0">
-                    <a:schemeClr val="bg2"/>
-                  </a:outerShdw>
-                </a:effectLst>
-              </a14:hiddenEffects>
-            </a:ext>
-          </a:extLst>
-        </p:spPr>
-        <p:txBody>
-          <a:bodyPr wrap="none" anchor="ctr"/>
-          <a:lstStyle/>
-          <a:p>
-            <a:endParaRPr lang="es-MX"/>
-          </a:p>
-        </p:txBody>
-      </p:sp>
-      <p:sp>
-        <p:nvSpPr>
-          <p:cNvPr id="22539" name="Rectangle 11"/>
-          <p:cNvSpPr>
-            <a:spLocks noChangeArrowheads="1"/>
-          </p:cNvSpPr>
-          <p:nvPr/>
-        </p:nvSpPr>
-        <p:spPr bwMode="auto">
-          <a:xfrm>
-            <a:off x="7397576" y="5017889"/>
-            <a:ext cx="533400" cy="533400"/>
-          </a:xfrm>
-          <a:prstGeom prst="rect">
-            <a:avLst/>
-          </a:prstGeom>
-          <a:solidFill>
-            <a:schemeClr val="bg1"/>
-          </a:solidFill>
-          <a:ln w="38100">
-            <a:solidFill>
-              <a:schemeClr val="tx1"/>
-            </a:solidFill>
-            <a:miter lim="800000"/>
-            <a:headEnd type="none" w="sm" len="sm"/>
-            <a:tailEnd type="none" w="sm" len="sm"/>
-          </a:ln>
-          <a:effectLst/>
-          <a:extLst>
-            <a:ext uri="{AF507438-7753-43E0-B8FC-AC1667EBCBE1}">
-              <a14:hiddenEffects xmlns:a14="http://schemas.microsoft.com/office/drawing/2010/main">
-                <a:effectLst>
-                  <a:outerShdw dist="35921" dir="2700000" algn="ctr" rotWithShape="0">
-                    <a:schemeClr val="bg2"/>
-                  </a:outerShdw>
-                </a:effectLst>
-              </a14:hiddenEffects>
-            </a:ext>
-          </a:extLst>
-        </p:spPr>
-        <p:txBody>
-          <a:bodyPr wrap="none" anchor="ctr"/>
-          <a:lstStyle/>
-          <a:p>
-            <a:endParaRPr lang="es-MX"/>
-          </a:p>
-        </p:txBody>
-      </p:sp>
-      <p:sp>
-        <p:nvSpPr>
-          <p:cNvPr id="22540" name="Rectangle 12"/>
-          <p:cNvSpPr>
-            <a:spLocks noChangeArrowheads="1"/>
-          </p:cNvSpPr>
-          <p:nvPr/>
-        </p:nvSpPr>
-        <p:spPr bwMode="auto">
-          <a:xfrm>
-            <a:off x="6330776" y="5551289"/>
-            <a:ext cx="533400" cy="533400"/>
-          </a:xfrm>
-          <a:prstGeom prst="rect">
-            <a:avLst/>
-          </a:prstGeom>
-          <a:solidFill>
-            <a:schemeClr val="bg1"/>
-          </a:solidFill>
-          <a:ln w="38100">
-            <a:solidFill>
-              <a:schemeClr val="tx1"/>
-            </a:solidFill>
-            <a:miter lim="800000"/>
-            <a:headEnd type="none" w="sm" len="sm"/>
-            <a:tailEnd type="none" w="sm" len="sm"/>
-          </a:ln>
-          <a:effectLst/>
-          <a:extLst>
-            <a:ext uri="{AF507438-7753-43E0-B8FC-AC1667EBCBE1}">
-              <a14:hiddenEffects xmlns:a14="http://schemas.microsoft.com/office/drawing/2010/main">
-                <a:effectLst>
-                  <a:outerShdw dist="35921" dir="2700000" algn="ctr" rotWithShape="0">
-                    <a:schemeClr val="bg2"/>
-                  </a:outerShdw>
-                </a:effectLst>
-              </a14:hiddenEffects>
-            </a:ext>
-          </a:extLst>
-        </p:spPr>
-        <p:txBody>
-          <a:bodyPr wrap="none" anchor="ctr"/>
-          <a:lstStyle/>
-          <a:p>
-            <a:endParaRPr lang="es-MX"/>
-          </a:p>
-        </p:txBody>
-      </p:sp>
-      <p:sp>
-        <p:nvSpPr>
-          <p:cNvPr id="22541" name="Rectangle 13"/>
-          <p:cNvSpPr>
-            <a:spLocks noChangeArrowheads="1"/>
-          </p:cNvSpPr>
-          <p:nvPr/>
-        </p:nvSpPr>
-        <p:spPr bwMode="auto">
-          <a:xfrm>
-            <a:off x="6864176" y="5551289"/>
-            <a:ext cx="533400" cy="533400"/>
-          </a:xfrm>
-          <a:prstGeom prst="rect">
-            <a:avLst/>
-          </a:prstGeom>
-          <a:solidFill>
-            <a:schemeClr val="bg1"/>
-          </a:solidFill>
-          <a:ln w="38100">
-            <a:solidFill>
-              <a:schemeClr val="tx1"/>
-            </a:solidFill>
-            <a:miter lim="800000"/>
-            <a:headEnd type="none" w="sm" len="sm"/>
-            <a:tailEnd type="none" w="sm" len="sm"/>
-          </a:ln>
-          <a:effectLst/>
-          <a:extLst>
-            <a:ext uri="{AF507438-7753-43E0-B8FC-AC1667EBCBE1}">
-              <a14:hiddenEffects xmlns:a14="http://schemas.microsoft.com/office/drawing/2010/main">
-                <a:effectLst>
-                  <a:outerShdw dist="35921" dir="2700000" algn="ctr" rotWithShape="0">
-                    <a:schemeClr val="bg2"/>
-                  </a:outerShdw>
-                </a:effectLst>
-              </a14:hiddenEffects>
-            </a:ext>
-          </a:extLst>
-        </p:spPr>
-        <p:txBody>
-          <a:bodyPr wrap="none" anchor="ctr"/>
-          <a:lstStyle/>
-          <a:p>
-            <a:endParaRPr lang="es-MX"/>
-          </a:p>
-        </p:txBody>
-      </p:sp>
-      <p:sp>
-        <p:nvSpPr>
-          <p:cNvPr id="22542" name="Text Box 14"/>
-          <p:cNvSpPr txBox="1">
-            <a:spLocks noChangeArrowheads="1"/>
-          </p:cNvSpPr>
-          <p:nvPr/>
-        </p:nvSpPr>
-        <p:spPr bwMode="auto">
-          <a:xfrm>
-            <a:off x="5975176" y="4484489"/>
-            <a:ext cx="336550" cy="457200"/>
-          </a:xfrm>
-          <a:prstGeom prst="rect">
-            <a:avLst/>
-          </a:prstGeom>
-          <a:noFill/>
-          <a:ln>
-            <a:noFill/>
-          </a:ln>
-          <a:effectLst/>
-          <a:extLst>
-            <a:ext uri="{909E8E84-426E-40DD-AFC4-6F175D3DCCD1}">
-              <a14:hiddenFill xmlns:a14="http://schemas.microsoft.com/office/drawing/2010/main">
-                <a:solidFill>
-                  <a:schemeClr val="accent1"/>
-                </a:solidFill>
-              </a14:hiddenFill>
-            </a:ext>
-            <a:ext uri="{91240B29-F687-4F45-9708-019B960494DF}">
-              <a14:hiddenLine xmlns:a14="http://schemas.microsoft.com/office/drawing/2010/main" w="12700">
-                <a:solidFill>
-                  <a:schemeClr val="tx1"/>
-                </a:solidFill>
-                <a:miter lim="800000"/>
-                <a:headEnd type="none" w="sm" len="sm"/>
-                <a:tailEnd type="none" w="sm" len="sm"/>
-              </a14:hiddenLine>
-            </a:ext>
-            <a:ext uri="{AF507438-7753-43E0-B8FC-AC1667EBCBE1}">
-              <a14:hiddenEffects xmlns:a14="http://schemas.microsoft.com/office/drawing/2010/main">
-                <a:effectLst>
-                  <a:outerShdw dist="35921" dir="2700000" algn="ctr" rotWithShape="0">
-                    <a:schemeClr val="bg2"/>
-                  </a:outerShdw>
-                </a:effectLst>
-              </a14:hiddenEffects>
-            </a:ext>
-          </a:extLst>
-        </p:spPr>
-        <p:txBody>
-          <a:bodyPr wrap="none">
-            <a:spAutoFit/>
-          </a:bodyPr>
-          <a:lstStyle>
-            <a:lvl1pPr defTabSz="762000" eaLnBrk="0" hangingPunct="0">
-              <a:defRPr sz="1600">
-                <a:solidFill>
-                  <a:schemeClr val="tx1"/>
-                </a:solidFill>
-                <a:latin typeface="Arial" pitchFamily="34" charset="0"/>
-              </a:defRPr>
-            </a:lvl1pPr>
-            <a:lvl2pPr marL="742950" indent="-285750" defTabSz="762000" eaLnBrk="0" hangingPunct="0">
-              <a:defRPr sz="1600">
-                <a:solidFill>
-                  <a:schemeClr val="tx1"/>
-                </a:solidFill>
-                <a:latin typeface="Arial" pitchFamily="34" charset="0"/>
-              </a:defRPr>
-            </a:lvl2pPr>
-            <a:lvl3pPr marL="1143000" indent="-228600" defTabSz="762000" eaLnBrk="0" hangingPunct="0">
-              <a:defRPr sz="1600">
-                <a:solidFill>
-                  <a:schemeClr val="tx1"/>
-                </a:solidFill>
-                <a:latin typeface="Arial" pitchFamily="34" charset="0"/>
-              </a:defRPr>
-            </a:lvl3pPr>
-            <a:lvl4pPr marL="1600200" indent="-228600" defTabSz="762000" eaLnBrk="0" hangingPunct="0">
-              <a:defRPr sz="1600">
-                <a:solidFill>
-                  <a:schemeClr val="tx1"/>
-                </a:solidFill>
-                <a:latin typeface="Arial" pitchFamily="34" charset="0"/>
-              </a:defRPr>
-            </a:lvl4pPr>
-            <a:lvl5pPr marL="2057400" indent="-228600" defTabSz="762000" eaLnBrk="0" hangingPunct="0">
-              <a:defRPr sz="1600">
-                <a:solidFill>
-                  <a:schemeClr val="tx1"/>
-                </a:solidFill>
-                <a:latin typeface="Arial" pitchFamily="34" charset="0"/>
-              </a:defRPr>
-            </a:lvl5pPr>
-            <a:lvl6pPr marL="2514600" indent="-228600" defTabSz="762000" eaLnBrk="0" fontAlgn="base" hangingPunct="0">
-              <a:spcBef>
-                <a:spcPct val="0"/>
-              </a:spcBef>
-              <a:spcAft>
-                <a:spcPct val="0"/>
-              </a:spcAft>
-              <a:defRPr sz="1600">
-                <a:solidFill>
-                  <a:schemeClr val="tx1"/>
-                </a:solidFill>
-                <a:latin typeface="Arial" pitchFamily="34" charset="0"/>
-              </a:defRPr>
-            </a:lvl6pPr>
-            <a:lvl7pPr marL="2971800" indent="-228600" defTabSz="762000" eaLnBrk="0" fontAlgn="base" hangingPunct="0">
-              <a:spcBef>
-                <a:spcPct val="0"/>
-              </a:spcBef>
-              <a:spcAft>
-                <a:spcPct val="0"/>
-              </a:spcAft>
-              <a:defRPr sz="1600">
-                <a:solidFill>
-                  <a:schemeClr val="tx1"/>
-                </a:solidFill>
-                <a:latin typeface="Arial" pitchFamily="34" charset="0"/>
-              </a:defRPr>
-            </a:lvl7pPr>
-            <a:lvl8pPr marL="3429000" indent="-228600" defTabSz="762000" eaLnBrk="0" fontAlgn="base" hangingPunct="0">
-              <a:spcBef>
-                <a:spcPct val="0"/>
-              </a:spcBef>
-              <a:spcAft>
-                <a:spcPct val="0"/>
-              </a:spcAft>
-              <a:defRPr sz="1600">
-                <a:solidFill>
-                  <a:schemeClr val="tx1"/>
-                </a:solidFill>
-                <a:latin typeface="Arial" pitchFamily="34" charset="0"/>
-              </a:defRPr>
-            </a:lvl8pPr>
-            <a:lvl9pPr marL="3886200" indent="-228600" defTabSz="762000" eaLnBrk="0" fontAlgn="base" hangingPunct="0">
-              <a:spcBef>
-                <a:spcPct val="0"/>
-              </a:spcBef>
-              <a:spcAft>
-                <a:spcPct val="0"/>
-              </a:spcAft>
-              <a:defRPr sz="1600">
-                <a:solidFill>
-                  <a:schemeClr val="tx1"/>
-                </a:solidFill>
-                <a:latin typeface="Arial" pitchFamily="34" charset="0"/>
-              </a:defRPr>
-            </a:lvl9pPr>
-          </a:lstStyle>
-          <a:p>
-            <a:pPr algn="ctr" eaLnBrk="1" hangingPunct="1"/>
-            <a:r>
-              <a:rPr lang="es-ES_tradnl" sz="2400" b="1">
-                <a:solidFill>
-                  <a:srgbClr val="FF0000"/>
-                </a:solidFill>
-                <a:latin typeface="Times New Roman" pitchFamily="18" charset="0"/>
-              </a:rPr>
-              <a:t>0</a:t>
-            </a:r>
-          </a:p>
-        </p:txBody>
-      </p:sp>
-      <p:sp>
-        <p:nvSpPr>
-          <p:cNvPr id="22543" name="Text Box 15"/>
-          <p:cNvSpPr txBox="1">
-            <a:spLocks noChangeArrowheads="1"/>
-          </p:cNvSpPr>
-          <p:nvPr/>
-        </p:nvSpPr>
-        <p:spPr bwMode="auto">
-          <a:xfrm>
-            <a:off x="5975176" y="5055989"/>
-            <a:ext cx="336550" cy="457200"/>
-          </a:xfrm>
-          <a:prstGeom prst="rect">
-            <a:avLst/>
-          </a:prstGeom>
-          <a:noFill/>
-          <a:ln>
-            <a:noFill/>
-          </a:ln>
-          <a:effectLst/>
-          <a:extLst>
-            <a:ext uri="{909E8E84-426E-40DD-AFC4-6F175D3DCCD1}">
-              <a14:hiddenFill xmlns:a14="http://schemas.microsoft.com/office/drawing/2010/main">
-                <a:solidFill>
-                  <a:schemeClr val="accent1"/>
-                </a:solidFill>
-              </a14:hiddenFill>
-            </a:ext>
-            <a:ext uri="{91240B29-F687-4F45-9708-019B960494DF}">
-              <a14:hiddenLine xmlns:a14="http://schemas.microsoft.com/office/drawing/2010/main" w="12700">
-                <a:solidFill>
-                  <a:schemeClr val="tx1"/>
-                </a:solidFill>
-                <a:miter lim="800000"/>
-                <a:headEnd type="none" w="sm" len="sm"/>
-                <a:tailEnd type="none" w="sm" len="sm"/>
-              </a14:hiddenLine>
-            </a:ext>
-            <a:ext uri="{AF507438-7753-43E0-B8FC-AC1667EBCBE1}">
-              <a14:hiddenEffects xmlns:a14="http://schemas.microsoft.com/office/drawing/2010/main">
-                <a:effectLst>
-                  <a:outerShdw dist="35921" dir="2700000" algn="ctr" rotWithShape="0">
-                    <a:schemeClr val="bg2"/>
-                  </a:outerShdw>
-                </a:effectLst>
-              </a14:hiddenEffects>
-            </a:ext>
-          </a:extLst>
-        </p:spPr>
-        <p:txBody>
-          <a:bodyPr wrap="none">
-            <a:spAutoFit/>
-          </a:bodyPr>
-          <a:lstStyle>
-            <a:lvl1pPr defTabSz="762000" eaLnBrk="0" hangingPunct="0">
-              <a:defRPr sz="1600">
-                <a:solidFill>
-                  <a:schemeClr val="tx1"/>
-                </a:solidFill>
-                <a:latin typeface="Arial" pitchFamily="34" charset="0"/>
-              </a:defRPr>
-            </a:lvl1pPr>
-            <a:lvl2pPr marL="742950" indent="-285750" defTabSz="762000" eaLnBrk="0" hangingPunct="0">
-              <a:defRPr sz="1600">
-                <a:solidFill>
-                  <a:schemeClr val="tx1"/>
-                </a:solidFill>
-                <a:latin typeface="Arial" pitchFamily="34" charset="0"/>
-              </a:defRPr>
-            </a:lvl2pPr>
-            <a:lvl3pPr marL="1143000" indent="-228600" defTabSz="762000" eaLnBrk="0" hangingPunct="0">
-              <a:defRPr sz="1600">
-                <a:solidFill>
-                  <a:schemeClr val="tx1"/>
-                </a:solidFill>
-                <a:latin typeface="Arial" pitchFamily="34" charset="0"/>
-              </a:defRPr>
-            </a:lvl3pPr>
-            <a:lvl4pPr marL="1600200" indent="-228600" defTabSz="762000" eaLnBrk="0" hangingPunct="0">
-              <a:defRPr sz="1600">
-                <a:solidFill>
-                  <a:schemeClr val="tx1"/>
-                </a:solidFill>
-                <a:latin typeface="Arial" pitchFamily="34" charset="0"/>
-              </a:defRPr>
-            </a:lvl4pPr>
-            <a:lvl5pPr marL="2057400" indent="-228600" defTabSz="762000" eaLnBrk="0" hangingPunct="0">
-              <a:defRPr sz="1600">
-                <a:solidFill>
-                  <a:schemeClr val="tx1"/>
-                </a:solidFill>
-                <a:latin typeface="Arial" pitchFamily="34" charset="0"/>
-              </a:defRPr>
-            </a:lvl5pPr>
-            <a:lvl6pPr marL="2514600" indent="-228600" defTabSz="762000" eaLnBrk="0" fontAlgn="base" hangingPunct="0">
-              <a:spcBef>
-                <a:spcPct val="0"/>
-              </a:spcBef>
-              <a:spcAft>
-                <a:spcPct val="0"/>
-              </a:spcAft>
-              <a:defRPr sz="1600">
-                <a:solidFill>
-                  <a:schemeClr val="tx1"/>
-                </a:solidFill>
-                <a:latin typeface="Arial" pitchFamily="34" charset="0"/>
-              </a:defRPr>
-            </a:lvl6pPr>
-            <a:lvl7pPr marL="2971800" indent="-228600" defTabSz="762000" eaLnBrk="0" fontAlgn="base" hangingPunct="0">
-              <a:spcBef>
-                <a:spcPct val="0"/>
-              </a:spcBef>
-              <a:spcAft>
-                <a:spcPct val="0"/>
-              </a:spcAft>
-              <a:defRPr sz="1600">
-                <a:solidFill>
-                  <a:schemeClr val="tx1"/>
-                </a:solidFill>
-                <a:latin typeface="Arial" pitchFamily="34" charset="0"/>
-              </a:defRPr>
-            </a:lvl7pPr>
-            <a:lvl8pPr marL="3429000" indent="-228600" defTabSz="762000" eaLnBrk="0" fontAlgn="base" hangingPunct="0">
-              <a:spcBef>
-                <a:spcPct val="0"/>
-              </a:spcBef>
-              <a:spcAft>
-                <a:spcPct val="0"/>
-              </a:spcAft>
-              <a:defRPr sz="1600">
-                <a:solidFill>
-                  <a:schemeClr val="tx1"/>
-                </a:solidFill>
-                <a:latin typeface="Arial" pitchFamily="34" charset="0"/>
-              </a:defRPr>
-            </a:lvl8pPr>
-            <a:lvl9pPr marL="3886200" indent="-228600" defTabSz="762000" eaLnBrk="0" fontAlgn="base" hangingPunct="0">
-              <a:spcBef>
-                <a:spcPct val="0"/>
-              </a:spcBef>
-              <a:spcAft>
-                <a:spcPct val="0"/>
-              </a:spcAft>
-              <a:defRPr sz="1600">
-                <a:solidFill>
-                  <a:schemeClr val="tx1"/>
-                </a:solidFill>
-                <a:latin typeface="Arial" pitchFamily="34" charset="0"/>
-              </a:defRPr>
-            </a:lvl9pPr>
-          </a:lstStyle>
-          <a:p>
-            <a:pPr algn="ctr" eaLnBrk="1" hangingPunct="1"/>
-            <a:r>
-              <a:rPr lang="es-ES_tradnl" sz="2400" b="1">
-                <a:solidFill>
-                  <a:srgbClr val="FF0000"/>
-                </a:solidFill>
-                <a:latin typeface="Times New Roman" pitchFamily="18" charset="0"/>
-              </a:rPr>
-              <a:t>1</a:t>
-            </a:r>
-          </a:p>
-        </p:txBody>
-      </p:sp>
-      <p:sp>
-        <p:nvSpPr>
-          <p:cNvPr id="22544" name="Text Box 16"/>
-          <p:cNvSpPr txBox="1">
-            <a:spLocks noChangeArrowheads="1"/>
-          </p:cNvSpPr>
-          <p:nvPr/>
-        </p:nvSpPr>
-        <p:spPr bwMode="auto">
-          <a:xfrm>
-            <a:off x="5975176" y="5589389"/>
-            <a:ext cx="336550" cy="457200"/>
-          </a:xfrm>
-          <a:prstGeom prst="rect">
-            <a:avLst/>
-          </a:prstGeom>
-          <a:noFill/>
-          <a:ln>
-            <a:noFill/>
-          </a:ln>
-          <a:effectLst/>
-          <a:extLst>
-            <a:ext uri="{909E8E84-426E-40DD-AFC4-6F175D3DCCD1}">
-              <a14:hiddenFill xmlns:a14="http://schemas.microsoft.com/office/drawing/2010/main">
-                <a:solidFill>
-                  <a:schemeClr val="accent1"/>
-                </a:solidFill>
-              </a14:hiddenFill>
-            </a:ext>
-            <a:ext uri="{91240B29-F687-4F45-9708-019B960494DF}">
-              <a14:hiddenLine xmlns:a14="http://schemas.microsoft.com/office/drawing/2010/main" w="12700">
-                <a:solidFill>
-                  <a:schemeClr val="tx1"/>
-                </a:solidFill>
-                <a:miter lim="800000"/>
-                <a:headEnd type="none" w="sm" len="sm"/>
-                <a:tailEnd type="none" w="sm" len="sm"/>
-              </a14:hiddenLine>
-            </a:ext>
-            <a:ext uri="{AF507438-7753-43E0-B8FC-AC1667EBCBE1}">
-              <a14:hiddenEffects xmlns:a14="http://schemas.microsoft.com/office/drawing/2010/main">
-                <a:effectLst>
-                  <a:outerShdw dist="35921" dir="2700000" algn="ctr" rotWithShape="0">
-                    <a:schemeClr val="bg2"/>
-                  </a:outerShdw>
-                </a:effectLst>
-              </a14:hiddenEffects>
-            </a:ext>
-          </a:extLst>
-        </p:spPr>
-        <p:txBody>
-          <a:bodyPr wrap="none">
-            <a:spAutoFit/>
-          </a:bodyPr>
-          <a:lstStyle>
-            <a:lvl1pPr defTabSz="762000" eaLnBrk="0" hangingPunct="0">
-              <a:defRPr sz="1600">
-                <a:solidFill>
-                  <a:schemeClr val="tx1"/>
-                </a:solidFill>
-                <a:latin typeface="Arial" pitchFamily="34" charset="0"/>
-              </a:defRPr>
-            </a:lvl1pPr>
-            <a:lvl2pPr marL="742950" indent="-285750" defTabSz="762000" eaLnBrk="0" hangingPunct="0">
-              <a:defRPr sz="1600">
-                <a:solidFill>
-                  <a:schemeClr val="tx1"/>
-                </a:solidFill>
-                <a:latin typeface="Arial" pitchFamily="34" charset="0"/>
-              </a:defRPr>
-            </a:lvl2pPr>
-            <a:lvl3pPr marL="1143000" indent="-228600" defTabSz="762000" eaLnBrk="0" hangingPunct="0">
-              <a:defRPr sz="1600">
-                <a:solidFill>
-                  <a:schemeClr val="tx1"/>
-                </a:solidFill>
-                <a:latin typeface="Arial" pitchFamily="34" charset="0"/>
-              </a:defRPr>
-            </a:lvl3pPr>
-            <a:lvl4pPr marL="1600200" indent="-228600" defTabSz="762000" eaLnBrk="0" hangingPunct="0">
-              <a:defRPr sz="1600">
-                <a:solidFill>
-                  <a:schemeClr val="tx1"/>
-                </a:solidFill>
-                <a:latin typeface="Arial" pitchFamily="34" charset="0"/>
-              </a:defRPr>
-            </a:lvl4pPr>
-            <a:lvl5pPr marL="2057400" indent="-228600" defTabSz="762000" eaLnBrk="0" hangingPunct="0">
-              <a:defRPr sz="1600">
-                <a:solidFill>
-                  <a:schemeClr val="tx1"/>
-                </a:solidFill>
-                <a:latin typeface="Arial" pitchFamily="34" charset="0"/>
-              </a:defRPr>
-            </a:lvl5pPr>
-            <a:lvl6pPr marL="2514600" indent="-228600" defTabSz="762000" eaLnBrk="0" fontAlgn="base" hangingPunct="0">
-              <a:spcBef>
-                <a:spcPct val="0"/>
-              </a:spcBef>
-              <a:spcAft>
-                <a:spcPct val="0"/>
-              </a:spcAft>
-              <a:defRPr sz="1600">
-                <a:solidFill>
-                  <a:schemeClr val="tx1"/>
-                </a:solidFill>
-                <a:latin typeface="Arial" pitchFamily="34" charset="0"/>
-              </a:defRPr>
-            </a:lvl6pPr>
-            <a:lvl7pPr marL="2971800" indent="-228600" defTabSz="762000" eaLnBrk="0" fontAlgn="base" hangingPunct="0">
-              <a:spcBef>
-                <a:spcPct val="0"/>
-              </a:spcBef>
-              <a:spcAft>
-                <a:spcPct val="0"/>
-              </a:spcAft>
-              <a:defRPr sz="1600">
-                <a:solidFill>
-                  <a:schemeClr val="tx1"/>
-                </a:solidFill>
-                <a:latin typeface="Arial" pitchFamily="34" charset="0"/>
-              </a:defRPr>
-            </a:lvl7pPr>
-            <a:lvl8pPr marL="3429000" indent="-228600" defTabSz="762000" eaLnBrk="0" fontAlgn="base" hangingPunct="0">
-              <a:spcBef>
-                <a:spcPct val="0"/>
-              </a:spcBef>
-              <a:spcAft>
-                <a:spcPct val="0"/>
-              </a:spcAft>
-              <a:defRPr sz="1600">
-                <a:solidFill>
-                  <a:schemeClr val="tx1"/>
-                </a:solidFill>
-                <a:latin typeface="Arial" pitchFamily="34" charset="0"/>
-              </a:defRPr>
-            </a:lvl8pPr>
-            <a:lvl9pPr marL="3886200" indent="-228600" defTabSz="762000" eaLnBrk="0" fontAlgn="base" hangingPunct="0">
-              <a:spcBef>
-                <a:spcPct val="0"/>
-              </a:spcBef>
-              <a:spcAft>
-                <a:spcPct val="0"/>
-              </a:spcAft>
-              <a:defRPr sz="1600">
-                <a:solidFill>
-                  <a:schemeClr val="tx1"/>
-                </a:solidFill>
-                <a:latin typeface="Arial" pitchFamily="34" charset="0"/>
-              </a:defRPr>
-            </a:lvl9pPr>
-          </a:lstStyle>
-          <a:p>
-            <a:pPr algn="ctr" eaLnBrk="1" hangingPunct="1"/>
-            <a:r>
-              <a:rPr lang="es-ES_tradnl" sz="2400" b="1">
-                <a:solidFill>
-                  <a:srgbClr val="FF0000"/>
-                </a:solidFill>
-                <a:latin typeface="Times New Roman" pitchFamily="18" charset="0"/>
-              </a:rPr>
-              <a:t>2</a:t>
-            </a:r>
-          </a:p>
-        </p:txBody>
-      </p:sp>
-      <p:sp>
-        <p:nvSpPr>
-          <p:cNvPr id="235537" name="Rectangle 17"/>
-          <p:cNvSpPr>
-            <a:spLocks noChangeArrowheads="1"/>
-          </p:cNvSpPr>
-          <p:nvPr/>
-        </p:nvSpPr>
-        <p:spPr bwMode="auto">
-          <a:xfrm>
-            <a:off x="6330776" y="4484489"/>
-            <a:ext cx="533400" cy="533400"/>
-          </a:xfrm>
-          <a:prstGeom prst="rect">
-            <a:avLst/>
-          </a:prstGeom>
-          <a:solidFill>
-            <a:schemeClr val="bg1"/>
-          </a:solidFill>
-          <a:ln w="38100">
-            <a:solidFill>
-              <a:schemeClr val="tx1"/>
-            </a:solidFill>
-            <a:miter lim="800000"/>
-            <a:headEnd type="none" w="sm" len="sm"/>
-            <a:tailEnd type="none" w="sm" len="sm"/>
-          </a:ln>
-          <a:effectLst/>
-          <a:extLst>
-            <a:ext uri="{AF507438-7753-43E0-B8FC-AC1667EBCBE1}">
-              <a14:hiddenEffects xmlns:a14="http://schemas.microsoft.com/office/drawing/2010/main">
-                <a:effectLst>
-                  <a:outerShdw dist="35921" dir="2700000" algn="ctr" rotWithShape="0">
-                    <a:schemeClr val="bg2"/>
-                  </a:outerShdw>
-                </a:effectLst>
-              </a14:hiddenEffects>
-            </a:ext>
-          </a:extLst>
-        </p:spPr>
-        <p:txBody>
-          <a:bodyPr wrap="none" anchor="ctr"/>
-          <a:lstStyle/>
-          <a:p>
-            <a:pPr algn="ctr" defTabSz="762000"/>
-            <a:r>
-              <a:rPr lang="es-ES_tradnl" sz="2800" b="1" dirty="0">
-                <a:solidFill>
-                  <a:srgbClr val="000099"/>
-                </a:solidFill>
-                <a:latin typeface="Times New Roman" pitchFamily="18" charset="0"/>
-              </a:rPr>
-              <a:t>1</a:t>
-            </a:r>
-            <a:endParaRPr lang="es-ES_tradnl" sz="2400" dirty="0">
-              <a:latin typeface="Times New Roman" pitchFamily="18" charset="0"/>
-            </a:endParaRPr>
-          </a:p>
-        </p:txBody>
-      </p:sp>
-      <p:sp>
-        <p:nvSpPr>
-          <p:cNvPr id="235538" name="Rectangle 18"/>
-          <p:cNvSpPr>
-            <a:spLocks noChangeArrowheads="1"/>
-          </p:cNvSpPr>
-          <p:nvPr/>
-        </p:nvSpPr>
-        <p:spPr bwMode="auto">
-          <a:xfrm>
-            <a:off x="6864176" y="5017889"/>
-            <a:ext cx="533400" cy="533400"/>
-          </a:xfrm>
-          <a:prstGeom prst="rect">
-            <a:avLst/>
-          </a:prstGeom>
-          <a:solidFill>
-            <a:schemeClr val="bg1"/>
-          </a:solidFill>
-          <a:ln w="38100">
-            <a:solidFill>
-              <a:schemeClr val="tx1"/>
-            </a:solidFill>
-            <a:miter lim="800000"/>
-            <a:headEnd type="none" w="sm" len="sm"/>
-            <a:tailEnd type="none" w="sm" len="sm"/>
-          </a:ln>
-          <a:effectLst/>
-          <a:extLst>
-            <a:ext uri="{AF507438-7753-43E0-B8FC-AC1667EBCBE1}">
-              <a14:hiddenEffects xmlns:a14="http://schemas.microsoft.com/office/drawing/2010/main">
-                <a:effectLst>
-                  <a:outerShdw dist="35921" dir="2700000" algn="ctr" rotWithShape="0">
-                    <a:schemeClr val="bg2"/>
-                  </a:outerShdw>
-                </a:effectLst>
-              </a14:hiddenEffects>
-            </a:ext>
-          </a:extLst>
-        </p:spPr>
-        <p:txBody>
-          <a:bodyPr wrap="none" anchor="ctr"/>
-          <a:lstStyle/>
-          <a:p>
-            <a:pPr algn="ctr" defTabSz="762000"/>
-            <a:r>
-              <a:rPr lang="es-ES_tradnl" sz="2800" b="1" dirty="0">
-                <a:solidFill>
-                  <a:srgbClr val="000099"/>
-                </a:solidFill>
-                <a:latin typeface="Times New Roman" pitchFamily="18" charset="0"/>
-              </a:rPr>
-              <a:t>5</a:t>
-            </a:r>
-          </a:p>
-        </p:txBody>
-      </p:sp>
-      <p:sp>
-        <p:nvSpPr>
-          <p:cNvPr id="235539" name="Rectangle 19"/>
-          <p:cNvSpPr>
-            <a:spLocks noChangeArrowheads="1"/>
-          </p:cNvSpPr>
-          <p:nvPr/>
-        </p:nvSpPr>
-        <p:spPr bwMode="auto">
-          <a:xfrm>
-            <a:off x="7397576" y="5551289"/>
-            <a:ext cx="533400" cy="533400"/>
-          </a:xfrm>
-          <a:prstGeom prst="rect">
-            <a:avLst/>
-          </a:prstGeom>
-          <a:solidFill>
-            <a:schemeClr val="bg1"/>
-          </a:solidFill>
-          <a:ln w="38100">
-            <a:solidFill>
-              <a:schemeClr val="tx1"/>
-            </a:solidFill>
-            <a:miter lim="800000"/>
-            <a:headEnd type="none" w="sm" len="sm"/>
-            <a:tailEnd type="none" w="sm" len="sm"/>
-          </a:ln>
-          <a:effectLst/>
-          <a:extLst>
-            <a:ext uri="{AF507438-7753-43E0-B8FC-AC1667EBCBE1}">
-              <a14:hiddenEffects xmlns:a14="http://schemas.microsoft.com/office/drawing/2010/main">
-                <a:effectLst>
-                  <a:outerShdw dist="35921" dir="2700000" algn="ctr" rotWithShape="0">
-                    <a:schemeClr val="bg2"/>
-                  </a:outerShdw>
-                </a:effectLst>
-              </a14:hiddenEffects>
-            </a:ext>
-          </a:extLst>
-        </p:spPr>
-        <p:txBody>
-          <a:bodyPr wrap="none" anchor="ctr"/>
-          <a:lstStyle/>
-          <a:p>
-            <a:pPr algn="ctr" defTabSz="762000"/>
-            <a:r>
-              <a:rPr lang="es-ES_tradnl" sz="2800" b="1">
-                <a:solidFill>
-                  <a:srgbClr val="000099"/>
-                </a:solidFill>
-                <a:latin typeface="Times New Roman" pitchFamily="18" charset="0"/>
-              </a:rPr>
-              <a:t>9</a:t>
-            </a:r>
-          </a:p>
-        </p:txBody>
-      </p:sp>
-      <p:sp>
-        <p:nvSpPr>
-          <p:cNvPr id="235540" name="Rectangle 20"/>
-          <p:cNvSpPr>
-            <a:spLocks noChangeArrowheads="1"/>
-          </p:cNvSpPr>
-          <p:nvPr/>
-        </p:nvSpPr>
-        <p:spPr bwMode="auto">
-          <a:xfrm>
-            <a:off x="7397576" y="5017889"/>
-            <a:ext cx="533400" cy="533400"/>
-          </a:xfrm>
-          <a:prstGeom prst="rect">
-            <a:avLst/>
-          </a:prstGeom>
-          <a:solidFill>
-            <a:schemeClr val="bg1"/>
-          </a:solidFill>
-          <a:ln w="38100">
-            <a:solidFill>
-              <a:schemeClr val="tx1"/>
-            </a:solidFill>
-            <a:miter lim="800000"/>
-            <a:headEnd type="none" w="sm" len="sm"/>
-            <a:tailEnd type="none" w="sm" len="sm"/>
-          </a:ln>
-          <a:effectLst/>
-          <a:extLst>
-            <a:ext uri="{AF507438-7753-43E0-B8FC-AC1667EBCBE1}">
-              <a14:hiddenEffects xmlns:a14="http://schemas.microsoft.com/office/drawing/2010/main">
-                <a:effectLst>
-                  <a:outerShdw dist="35921" dir="2700000" algn="ctr" rotWithShape="0">
-                    <a:schemeClr val="bg2"/>
-                  </a:outerShdw>
-                </a:effectLst>
-              </a14:hiddenEffects>
-            </a:ext>
-          </a:extLst>
-        </p:spPr>
-        <p:txBody>
-          <a:bodyPr wrap="none" anchor="ctr"/>
-          <a:lstStyle/>
-          <a:p>
-            <a:pPr algn="ctr" defTabSz="762000"/>
-            <a:r>
-              <a:rPr lang="es-ES_tradnl" sz="2800" b="1">
-                <a:solidFill>
-                  <a:srgbClr val="000099"/>
-                </a:solidFill>
-                <a:latin typeface="Times New Roman" pitchFamily="18" charset="0"/>
-              </a:rPr>
-              <a:t>6</a:t>
-            </a:r>
-            <a:endParaRPr lang="es-ES_tradnl" sz="2400">
-              <a:latin typeface="Times New Roman" pitchFamily="18" charset="0"/>
-            </a:endParaRPr>
-          </a:p>
-        </p:txBody>
-      </p:sp>
-      <p:sp>
-        <p:nvSpPr>
-          <p:cNvPr id="235541" name="Rectangle 21"/>
-          <p:cNvSpPr>
-            <a:spLocks noChangeArrowheads="1"/>
-          </p:cNvSpPr>
-          <p:nvPr/>
-        </p:nvSpPr>
-        <p:spPr bwMode="auto">
-          <a:xfrm>
-            <a:off x="6864176" y="5551289"/>
-            <a:ext cx="533400" cy="533400"/>
-          </a:xfrm>
-          <a:prstGeom prst="rect">
-            <a:avLst/>
-          </a:prstGeom>
-          <a:solidFill>
-            <a:schemeClr val="bg1"/>
-          </a:solidFill>
-          <a:ln w="38100">
-            <a:solidFill>
-              <a:schemeClr val="tx1"/>
-            </a:solidFill>
-            <a:miter lim="800000"/>
-            <a:headEnd type="none" w="sm" len="sm"/>
-            <a:tailEnd type="none" w="sm" len="sm"/>
-          </a:ln>
-          <a:effectLst/>
-          <a:extLst>
-            <a:ext uri="{AF507438-7753-43E0-B8FC-AC1667EBCBE1}">
-              <a14:hiddenEffects xmlns:a14="http://schemas.microsoft.com/office/drawing/2010/main">
-                <a:effectLst>
-                  <a:outerShdw dist="35921" dir="2700000" algn="ctr" rotWithShape="0">
-                    <a:schemeClr val="bg2"/>
-                  </a:outerShdw>
-                </a:effectLst>
-              </a14:hiddenEffects>
-            </a:ext>
-          </a:extLst>
-        </p:spPr>
-        <p:txBody>
-          <a:bodyPr wrap="none" anchor="ctr"/>
-          <a:lstStyle/>
-          <a:p>
-            <a:pPr algn="ctr" defTabSz="762000"/>
-            <a:r>
-              <a:rPr lang="es-ES_tradnl" sz="2800" b="1">
-                <a:solidFill>
-                  <a:srgbClr val="000099"/>
-                </a:solidFill>
-                <a:latin typeface="Times New Roman" pitchFamily="18" charset="0"/>
-              </a:rPr>
-              <a:t>8</a:t>
-            </a:r>
-            <a:endParaRPr lang="es-ES_tradnl" sz="2400">
-              <a:latin typeface="Times New Roman" pitchFamily="18" charset="0"/>
-            </a:endParaRPr>
-          </a:p>
-        </p:txBody>
-      </p:sp>
-      <p:sp>
-        <p:nvSpPr>
-          <p:cNvPr id="235542" name="Rectangle 22"/>
-          <p:cNvSpPr>
-            <a:spLocks noChangeArrowheads="1"/>
-          </p:cNvSpPr>
-          <p:nvPr/>
-        </p:nvSpPr>
-        <p:spPr bwMode="auto">
-          <a:xfrm>
-            <a:off x="6356176" y="5017889"/>
-            <a:ext cx="533400" cy="533400"/>
-          </a:xfrm>
-          <a:prstGeom prst="rect">
-            <a:avLst/>
-          </a:prstGeom>
-          <a:solidFill>
-            <a:schemeClr val="bg1"/>
-          </a:solidFill>
-          <a:ln w="38100">
-            <a:solidFill>
-              <a:schemeClr val="tx1"/>
-            </a:solidFill>
-            <a:miter lim="800000"/>
-            <a:headEnd type="none" w="sm" len="sm"/>
-            <a:tailEnd type="none" w="sm" len="sm"/>
-          </a:ln>
-          <a:effectLst/>
-          <a:extLst>
-            <a:ext uri="{AF507438-7753-43E0-B8FC-AC1667EBCBE1}">
-              <a14:hiddenEffects xmlns:a14="http://schemas.microsoft.com/office/drawing/2010/main">
-                <a:effectLst>
-                  <a:outerShdw dist="35921" dir="2700000" algn="ctr" rotWithShape="0">
-                    <a:schemeClr val="bg2"/>
-                  </a:outerShdw>
-                </a:effectLst>
-              </a14:hiddenEffects>
-            </a:ext>
-          </a:extLst>
-        </p:spPr>
-        <p:txBody>
-          <a:bodyPr wrap="none" anchor="ctr"/>
-          <a:lstStyle/>
-          <a:p>
-            <a:pPr algn="ctr" defTabSz="762000"/>
-            <a:r>
-              <a:rPr lang="es-ES_tradnl" sz="2800" b="1">
-                <a:solidFill>
-                  <a:srgbClr val="000099"/>
-                </a:solidFill>
-                <a:latin typeface="Times New Roman" pitchFamily="18" charset="0"/>
-              </a:rPr>
-              <a:t>4</a:t>
-            </a:r>
-          </a:p>
-        </p:txBody>
-      </p:sp>
-      <p:sp>
-        <p:nvSpPr>
-          <p:cNvPr id="235543" name="Rectangle 23"/>
-          <p:cNvSpPr>
-            <a:spLocks noChangeArrowheads="1"/>
-          </p:cNvSpPr>
-          <p:nvPr/>
-        </p:nvSpPr>
-        <p:spPr bwMode="auto">
-          <a:xfrm>
-            <a:off x="6356176" y="5551289"/>
-            <a:ext cx="533400" cy="533400"/>
-          </a:xfrm>
-          <a:prstGeom prst="rect">
-            <a:avLst/>
-          </a:prstGeom>
-          <a:solidFill>
-            <a:schemeClr val="bg1"/>
-          </a:solidFill>
-          <a:ln w="38100">
-            <a:solidFill>
-              <a:schemeClr val="tx1"/>
-            </a:solidFill>
-            <a:miter lim="800000"/>
-            <a:headEnd type="none" w="sm" len="sm"/>
-            <a:tailEnd type="none" w="sm" len="sm"/>
-          </a:ln>
-          <a:effectLst/>
-          <a:extLst>
-            <a:ext uri="{AF507438-7753-43E0-B8FC-AC1667EBCBE1}">
-              <a14:hiddenEffects xmlns:a14="http://schemas.microsoft.com/office/drawing/2010/main">
-                <a:effectLst>
-                  <a:outerShdw dist="35921" dir="2700000" algn="ctr" rotWithShape="0">
-                    <a:schemeClr val="bg2"/>
-                  </a:outerShdw>
-                </a:effectLst>
-              </a14:hiddenEffects>
-            </a:ext>
-          </a:extLst>
-        </p:spPr>
-        <p:txBody>
-          <a:bodyPr wrap="none" anchor="ctr"/>
-          <a:lstStyle/>
-          <a:p>
-            <a:pPr algn="ctr" defTabSz="762000"/>
-            <a:r>
-              <a:rPr lang="es-ES_tradnl" sz="2800" b="1">
-                <a:solidFill>
-                  <a:srgbClr val="000099"/>
-                </a:solidFill>
-                <a:latin typeface="Times New Roman" pitchFamily="18" charset="0"/>
-              </a:rPr>
-              <a:t>7</a:t>
-            </a:r>
-          </a:p>
-        </p:txBody>
-      </p:sp>
-      <p:sp>
-        <p:nvSpPr>
-          <p:cNvPr id="235544" name="Rectangle 24"/>
-          <p:cNvSpPr>
-            <a:spLocks noChangeArrowheads="1"/>
-          </p:cNvSpPr>
-          <p:nvPr/>
-        </p:nvSpPr>
-        <p:spPr bwMode="auto">
-          <a:xfrm>
-            <a:off x="6846083" y="4484489"/>
-            <a:ext cx="533400" cy="533400"/>
-          </a:xfrm>
-          <a:prstGeom prst="rect">
-            <a:avLst/>
-          </a:prstGeom>
-          <a:solidFill>
-            <a:schemeClr val="bg1"/>
-          </a:solidFill>
-          <a:ln w="38100">
-            <a:solidFill>
-              <a:schemeClr val="tx1"/>
-            </a:solidFill>
-            <a:miter lim="800000"/>
-            <a:headEnd type="none" w="sm" len="sm"/>
-            <a:tailEnd type="none" w="sm" len="sm"/>
-          </a:ln>
-          <a:effectLst/>
-          <a:extLst>
-            <a:ext uri="{AF507438-7753-43E0-B8FC-AC1667EBCBE1}">
-              <a14:hiddenEffects xmlns:a14="http://schemas.microsoft.com/office/drawing/2010/main">
-                <a:effectLst>
-                  <a:outerShdw dist="35921" dir="2700000" algn="ctr" rotWithShape="0">
-                    <a:schemeClr val="bg2"/>
-                  </a:outerShdw>
-                </a:effectLst>
-              </a14:hiddenEffects>
-            </a:ext>
-          </a:extLst>
-        </p:spPr>
-        <p:txBody>
-          <a:bodyPr wrap="none" anchor="ctr"/>
-          <a:lstStyle/>
-          <a:p>
-            <a:pPr algn="ctr" defTabSz="762000"/>
-            <a:r>
-              <a:rPr lang="es-ES_tradnl" sz="2800" b="1">
-                <a:solidFill>
-                  <a:srgbClr val="000099"/>
-                </a:solidFill>
-                <a:latin typeface="Times New Roman" pitchFamily="18" charset="0"/>
-              </a:rPr>
-              <a:t>2</a:t>
-            </a:r>
-          </a:p>
-        </p:txBody>
-      </p:sp>
-      <p:sp>
-        <p:nvSpPr>
-          <p:cNvPr id="235545" name="Rectangle 25"/>
-          <p:cNvSpPr>
-            <a:spLocks noChangeArrowheads="1"/>
-          </p:cNvSpPr>
-          <p:nvPr/>
-        </p:nvSpPr>
-        <p:spPr bwMode="auto">
-          <a:xfrm>
-            <a:off x="7392803" y="4484489"/>
-            <a:ext cx="533400" cy="533400"/>
-          </a:xfrm>
-          <a:prstGeom prst="rect">
-            <a:avLst/>
-          </a:prstGeom>
-          <a:solidFill>
-            <a:schemeClr val="bg1"/>
-          </a:solidFill>
-          <a:ln w="38100">
-            <a:solidFill>
-              <a:schemeClr val="tx1"/>
-            </a:solidFill>
-            <a:miter lim="800000"/>
-            <a:headEnd type="none" w="sm" len="sm"/>
-            <a:tailEnd type="none" w="sm" len="sm"/>
-          </a:ln>
-          <a:effectLst/>
-          <a:extLst>
-            <a:ext uri="{AF507438-7753-43E0-B8FC-AC1667EBCBE1}">
-              <a14:hiddenEffects xmlns:a14="http://schemas.microsoft.com/office/drawing/2010/main">
-                <a:effectLst>
-                  <a:outerShdw dist="35921" dir="2700000" algn="ctr" rotWithShape="0">
-                    <a:schemeClr val="bg2"/>
-                  </a:outerShdw>
-                </a:effectLst>
-              </a14:hiddenEffects>
-            </a:ext>
-          </a:extLst>
-        </p:spPr>
-        <p:txBody>
-          <a:bodyPr wrap="none" anchor="ctr"/>
-          <a:lstStyle/>
-          <a:p>
-            <a:pPr algn="ctr" defTabSz="762000"/>
-            <a:r>
-              <a:rPr lang="es-ES_tradnl" sz="2800" b="1" dirty="0">
-                <a:solidFill>
-                  <a:srgbClr val="000099"/>
-                </a:solidFill>
-                <a:latin typeface="Times New Roman" pitchFamily="18" charset="0"/>
-              </a:rPr>
-              <a:t>3</a:t>
-            </a:r>
-          </a:p>
-        </p:txBody>
-      </p:sp>
-      <p:pic>
-        <p:nvPicPr>
-          <p:cNvPr id="28" name="Picture 2"/>
-          <p:cNvPicPr>
-            <a:picLocks noChangeAspect="1" noChangeArrowheads="1"/>
-          </p:cNvPicPr>
-          <p:nvPr/>
-        </p:nvPicPr>
-        <p:blipFill>
-          <a:blip r:embed="rId2">
-            <a:extLst>
-              <a:ext uri="{28A0092B-C50C-407E-A947-70E740481C1C}">
-                <a14:useLocalDpi xmlns:a14="http://schemas.microsoft.com/office/drawing/2010/main" val="0"/>
-              </a:ext>
-            </a:extLst>
-          </a:blip>
-          <a:srcRect/>
-          <a:stretch>
-            <a:fillRect/>
-          </a:stretch>
-        </p:blipFill>
-        <p:spPr bwMode="auto">
-          <a:xfrm>
-            <a:off x="2349711" y="3668560"/>
-            <a:ext cx="3240360" cy="2698658"/>
-          </a:xfrm>
-          <a:prstGeom prst="rect">
-            <a:avLst/>
-          </a:prstGeom>
-          <a:noFill/>
-          <a:ln>
-            <a:noFill/>
-          </a:ln>
-          <a:extLst>
-            <a:ext uri="{909E8E84-426E-40DD-AFC4-6F175D3DCCD1}">
-              <a14:hiddenFill xmlns:a14="http://schemas.microsoft.com/office/drawing/2010/main">
-                <a:solidFill>
-                  <a:schemeClr val="accent1"/>
-                </a:solidFill>
-              </a14:hiddenFill>
-            </a:ext>
-            <a:ext uri="{91240B29-F687-4F45-9708-019B960494DF}">
-              <a14:hiddenLine xmlns:a14="http://schemas.microsoft.com/office/drawing/2010/main" w="9525">
-                <a:solidFill>
-                  <a:schemeClr val="tx1"/>
-                </a:solidFill>
-                <a:miter lim="800000"/>
-                <a:headEnd/>
-                <a:tailEnd/>
-              </a14:hiddenLine>
-            </a:ext>
-          </a:extLst>
-        </p:spPr>
-      </p:pic>
-      <p:sp>
-        <p:nvSpPr>
-          <p:cNvPr id="29" name="Rectangle 2">
-            <a:extLst>
-              <a:ext uri="{FF2B5EF4-FFF2-40B4-BE49-F238E27FC236}">
-                <a16:creationId xmlns:a16="http://schemas.microsoft.com/office/drawing/2014/main" id="{FAC83C92-A3B5-443D-A810-9EFF49C3C067}"/>
-              </a:ext>
-            </a:extLst>
-          </p:cNvPr>
-          <p:cNvSpPr>
-            <a:spLocks noChangeArrowheads="1"/>
-          </p:cNvSpPr>
-          <p:nvPr/>
-        </p:nvSpPr>
-        <p:spPr bwMode="auto">
-          <a:xfrm>
-            <a:off x="611560" y="260648"/>
-            <a:ext cx="7772400" cy="1008112"/>
-          </a:xfrm>
-          <a:prstGeom prst="rect">
-            <a:avLst/>
-          </a:prstGeom>
-          <a:noFill/>
-          <a:ln>
-            <a:noFill/>
-          </a:ln>
-          <a:effectLst/>
-          <a:extLst>
-            <a:ext uri="{909E8E84-426E-40DD-AFC4-6F175D3DCCD1}">
-              <a14:hiddenFill xmlns:a14="http://schemas.microsoft.com/office/drawing/2010/main">
-                <a:solidFill>
-                  <a:schemeClr val="accent1"/>
-                </a:solidFill>
-              </a14:hiddenFill>
-            </a:ext>
-            <a:ext uri="{91240B29-F687-4F45-9708-019B960494DF}">
-              <a14:hiddenLine xmlns:a14="http://schemas.microsoft.com/office/drawing/2010/main" w="9525">
-                <a:solidFill>
-                  <a:schemeClr val="tx1"/>
-                </a:solidFill>
-                <a:miter lim="800000"/>
-                <a:headEnd/>
-                <a:tailEnd/>
-              </a14:hiddenLine>
-            </a:ext>
-            <a:ext uri="{AF507438-7753-43E0-B8FC-AC1667EBCBE1}">
-              <a14:hiddenEffects xmlns:a14="http://schemas.microsoft.com/office/drawing/2010/main">
-                <a:effectLst>
-                  <a:outerShdw dist="35921" dir="2700000" algn="ctr" rotWithShape="0">
-                    <a:schemeClr val="bg2"/>
-                  </a:outerShdw>
-                </a:effectLst>
-              </a14:hiddenEffects>
-            </a:ext>
-          </a:extLst>
-        </p:spPr>
-        <p:txBody>
-          <a:bodyPr lIns="92075" tIns="46038" rIns="92075" bIns="46038" anchor="ctr"/>
-          <a:lstStyle/>
-          <a:p>
-            <a:pPr algn="ctr" eaLnBrk="0" hangingPunct="0">
-              <a:defRPr/>
-            </a:pPr>
-            <a:r>
-              <a:rPr lang="es-ES_tradnl" sz="4400" b="1" dirty="0">
-                <a:solidFill>
-                  <a:srgbClr val="0070C0"/>
-                </a:solidFill>
-                <a:effectLst>
-                  <a:outerShdw blurRad="38100" dist="38100" dir="2700000" algn="tl">
-                    <a:srgbClr val="C0C0C0"/>
-                  </a:outerShdw>
-                </a:effectLst>
-                <a:latin typeface="Dom Casual" charset="0"/>
-              </a:rPr>
-              <a:t>Actividad Grupal</a:t>
-            </a:r>
-          </a:p>
-        </p:txBody>
-      </p:sp>
-    </p:spTree>
-    <p:extLst>
-      <p:ext uri="{BB962C8B-B14F-4D97-AF65-F5344CB8AC3E}">
-        <p14:creationId xmlns:p14="http://schemas.microsoft.com/office/powerpoint/2010/main" val="720340203"/>
-      </p:ext>
-    </p:extLst>
-  </p:cSld>
-  <p:clrMapOvr>
-    <a:masterClrMapping/>
-  </p:clrMapOvr>
-  <p:timing>
-    <p:tnLst>
-      <p:par>
-        <p:cTn id="1" dur="indefinite" restart="never" nodeType="tmRoot">
-          <p:childTnLst>
-            <p:seq concurrent="1" nextAc="seek">
-              <p:cTn id="2" dur="indefinite" nodeType="mainSeq">
-                <p:childTnLst>
-                  <p:par>
-                    <p:cTn id="3" fill="hold" nodeType="clickPar">
-                      <p:stCondLst>
-                        <p:cond delay="indefinite"/>
-                      </p:stCondLst>
-                      <p:childTnLst>
-                        <p:par>
-                          <p:cTn id="4" fill="hold" nodeType="withGroup">
-                            <p:stCondLst>
-                              <p:cond delay="0"/>
-                            </p:stCondLst>
-                            <p:childTnLst>
-                              <p:par>
-                                <p:cTn id="5" presetID="2" presetClass="entr" presetSubtype="8" fill="hold" grpId="0" nodeType="clickEffect">
-                                  <p:stCondLst>
-                                    <p:cond delay="0"/>
-                                  </p:stCondLst>
-                                  <p:childTnLst>
-                                    <p:set>
-                                      <p:cBhvr>
-                                        <p:cTn id="6" dur="1" fill="hold">
-                                          <p:stCondLst>
-                                            <p:cond delay="0"/>
-                                          </p:stCondLst>
-                                        </p:cTn>
-                                        <p:tgtEl>
-                                          <p:spTgt spid="235537"/>
-                                        </p:tgtEl>
-                                        <p:attrNameLst>
-                                          <p:attrName>style.visibility</p:attrName>
-                                        </p:attrNameLst>
-                                      </p:cBhvr>
-                                      <p:to>
-                                        <p:strVal val="visible"/>
-                                      </p:to>
-                                    </p:set>
-                                    <p:anim calcmode="lin" valueType="num">
-                                      <p:cBhvr additive="base">
-                                        <p:cTn id="7" dur="500" fill="hold"/>
-                                        <p:tgtEl>
-                                          <p:spTgt spid="235537"/>
-                                        </p:tgtEl>
-                                        <p:attrNameLst>
-                                          <p:attrName>ppt_x</p:attrName>
-                                        </p:attrNameLst>
-                                      </p:cBhvr>
-                                      <p:tavLst>
-                                        <p:tav tm="0">
-                                          <p:val>
-                                            <p:strVal val="0-#ppt_w/2"/>
-                                          </p:val>
-                                        </p:tav>
-                                        <p:tav tm="100000">
-                                          <p:val>
-                                            <p:strVal val="#ppt_x"/>
-                                          </p:val>
-                                        </p:tav>
-                                      </p:tavLst>
-                                    </p:anim>
-                                    <p:anim calcmode="lin" valueType="num">
-                                      <p:cBhvr additive="base">
-                                        <p:cTn id="8" dur="500" fill="hold"/>
-                                        <p:tgtEl>
-                                          <p:spTgt spid="235537"/>
-                                        </p:tgtEl>
-                                        <p:attrNameLst>
-                                          <p:attrName>ppt_y</p:attrName>
-                                        </p:attrNameLst>
-                                      </p:cBhvr>
-                                      <p:tavLst>
-                                        <p:tav tm="0">
-                                          <p:val>
-                                            <p:strVal val="#ppt_y"/>
-                                          </p:val>
-                                        </p:tav>
-                                        <p:tav tm="100000">
-                                          <p:val>
-                                            <p:strVal val="#ppt_y"/>
-                                          </p:val>
-                                        </p:tav>
-                                      </p:tavLst>
-                                    </p:anim>
-                                  </p:childTnLst>
-                                </p:cTn>
-                              </p:par>
-                            </p:childTnLst>
-                          </p:cTn>
-                        </p:par>
-                      </p:childTnLst>
-                    </p:cTn>
-                  </p:par>
-                  <p:par>
-                    <p:cTn id="9" fill="hold" nodeType="clickPar">
-                      <p:stCondLst>
-                        <p:cond delay="indefinite"/>
-                      </p:stCondLst>
-                      <p:childTnLst>
-                        <p:par>
-                          <p:cTn id="10" fill="hold" nodeType="withGroup">
-                            <p:stCondLst>
-                              <p:cond delay="0"/>
-                            </p:stCondLst>
-                            <p:childTnLst>
-                              <p:par>
-                                <p:cTn id="11" presetID="2" presetClass="entr" presetSubtype="8" fill="hold" grpId="0" nodeType="clickEffect">
-                                  <p:stCondLst>
-                                    <p:cond delay="0"/>
-                                  </p:stCondLst>
-                                  <p:childTnLst>
-                                    <p:set>
-                                      <p:cBhvr>
-                                        <p:cTn id="12" dur="1" fill="hold">
-                                          <p:stCondLst>
-                                            <p:cond delay="0"/>
-                                          </p:stCondLst>
-                                        </p:cTn>
-                                        <p:tgtEl>
-                                          <p:spTgt spid="235544"/>
-                                        </p:tgtEl>
-                                        <p:attrNameLst>
-                                          <p:attrName>style.visibility</p:attrName>
-                                        </p:attrNameLst>
-                                      </p:cBhvr>
-                                      <p:to>
-                                        <p:strVal val="visible"/>
-                                      </p:to>
-                                    </p:set>
-                                    <p:anim calcmode="lin" valueType="num">
-                                      <p:cBhvr additive="base">
-                                        <p:cTn id="13" dur="500" fill="hold"/>
-                                        <p:tgtEl>
-                                          <p:spTgt spid="235544"/>
-                                        </p:tgtEl>
-                                        <p:attrNameLst>
-                                          <p:attrName>ppt_x</p:attrName>
-                                        </p:attrNameLst>
-                                      </p:cBhvr>
-                                      <p:tavLst>
-                                        <p:tav tm="0">
-                                          <p:val>
-                                            <p:strVal val="0-#ppt_w/2"/>
-                                          </p:val>
-                                        </p:tav>
-                                        <p:tav tm="100000">
-                                          <p:val>
-                                            <p:strVal val="#ppt_x"/>
-                                          </p:val>
-                                        </p:tav>
-                                      </p:tavLst>
-                                    </p:anim>
-                                    <p:anim calcmode="lin" valueType="num">
-                                      <p:cBhvr additive="base">
-                                        <p:cTn id="14" dur="500" fill="hold"/>
-                                        <p:tgtEl>
-                                          <p:spTgt spid="235544"/>
-                                        </p:tgtEl>
-                                        <p:attrNameLst>
-                                          <p:attrName>ppt_y</p:attrName>
-                                        </p:attrNameLst>
-                                      </p:cBhvr>
-                                      <p:tavLst>
-                                        <p:tav tm="0">
-                                          <p:val>
-                                            <p:strVal val="#ppt_y"/>
-                                          </p:val>
-                                        </p:tav>
-                                        <p:tav tm="100000">
-                                          <p:val>
-                                            <p:strVal val="#ppt_y"/>
-                                          </p:val>
-                                        </p:tav>
-                                      </p:tavLst>
-                                    </p:anim>
-                                  </p:childTnLst>
-                                </p:cTn>
-                              </p:par>
-                            </p:childTnLst>
-                          </p:cTn>
-                        </p:par>
-                      </p:childTnLst>
-                    </p:cTn>
-                  </p:par>
-                  <p:par>
-                    <p:cTn id="15" fill="hold">
-                      <p:stCondLst>
-                        <p:cond delay="indefinite"/>
-                      </p:stCondLst>
-                      <p:childTnLst>
-                        <p:par>
-                          <p:cTn id="16" fill="hold">
-                            <p:stCondLst>
-                              <p:cond delay="0"/>
-                            </p:stCondLst>
-                            <p:childTnLst>
-                              <p:par>
-                                <p:cTn id="17" presetID="2" presetClass="entr" presetSubtype="8" fill="hold" grpId="0" nodeType="clickEffect">
-                                  <p:stCondLst>
-                                    <p:cond delay="0"/>
-                                  </p:stCondLst>
-                                  <p:childTnLst>
-                                    <p:set>
-                                      <p:cBhvr>
-                                        <p:cTn id="18" dur="1" fill="hold">
-                                          <p:stCondLst>
-                                            <p:cond delay="0"/>
-                                          </p:stCondLst>
-                                        </p:cTn>
-                                        <p:tgtEl>
-                                          <p:spTgt spid="235545"/>
-                                        </p:tgtEl>
-                                        <p:attrNameLst>
-                                          <p:attrName>style.visibility</p:attrName>
-                                        </p:attrNameLst>
-                                      </p:cBhvr>
-                                      <p:to>
-                                        <p:strVal val="visible"/>
-                                      </p:to>
-                                    </p:set>
-                                    <p:anim calcmode="lin" valueType="num">
-                                      <p:cBhvr additive="base">
-                                        <p:cTn id="19" dur="500" fill="hold"/>
-                                        <p:tgtEl>
-                                          <p:spTgt spid="235545"/>
-                                        </p:tgtEl>
-                                        <p:attrNameLst>
-                                          <p:attrName>ppt_x</p:attrName>
-                                        </p:attrNameLst>
-                                      </p:cBhvr>
-                                      <p:tavLst>
-                                        <p:tav tm="0">
-                                          <p:val>
-                                            <p:strVal val="0-#ppt_w/2"/>
-                                          </p:val>
-                                        </p:tav>
-                                        <p:tav tm="100000">
-                                          <p:val>
-                                            <p:strVal val="#ppt_x"/>
-                                          </p:val>
-                                        </p:tav>
-                                      </p:tavLst>
-                                    </p:anim>
-                                    <p:anim calcmode="lin" valueType="num">
-                                      <p:cBhvr additive="base">
-                                        <p:cTn id="20" dur="500" fill="hold"/>
-                                        <p:tgtEl>
-                                          <p:spTgt spid="235545"/>
-                                        </p:tgtEl>
-                                        <p:attrNameLst>
-                                          <p:attrName>ppt_y</p:attrName>
-                                        </p:attrNameLst>
-                                      </p:cBhvr>
-                                      <p:tavLst>
-                                        <p:tav tm="0">
-                                          <p:val>
-                                            <p:strVal val="#ppt_y"/>
-                                          </p:val>
-                                        </p:tav>
-                                        <p:tav tm="100000">
-                                          <p:val>
-                                            <p:strVal val="#ppt_y"/>
-                                          </p:val>
-                                        </p:tav>
-                                      </p:tavLst>
-                                    </p:anim>
-                                  </p:childTnLst>
-                                </p:cTn>
-                              </p:par>
-                            </p:childTnLst>
-                          </p:cTn>
-                        </p:par>
-                      </p:childTnLst>
-                    </p:cTn>
-                  </p:par>
-                  <p:par>
-                    <p:cTn id="21" fill="hold">
-                      <p:stCondLst>
-                        <p:cond delay="indefinite"/>
-                      </p:stCondLst>
-                      <p:childTnLst>
-                        <p:par>
-                          <p:cTn id="22" fill="hold">
-                            <p:stCondLst>
-                              <p:cond delay="0"/>
-                            </p:stCondLst>
-                            <p:childTnLst>
-                              <p:par>
-                                <p:cTn id="23" presetID="2" presetClass="entr" presetSubtype="8" fill="hold" grpId="0" nodeType="clickEffect">
-                                  <p:stCondLst>
-                                    <p:cond delay="0"/>
-                                  </p:stCondLst>
-                                  <p:childTnLst>
-                                    <p:set>
-                                      <p:cBhvr>
-                                        <p:cTn id="24" dur="1" fill="hold">
-                                          <p:stCondLst>
-                                            <p:cond delay="0"/>
-                                          </p:stCondLst>
-                                        </p:cTn>
-                                        <p:tgtEl>
-                                          <p:spTgt spid="235542"/>
-                                        </p:tgtEl>
-                                        <p:attrNameLst>
-                                          <p:attrName>style.visibility</p:attrName>
-                                        </p:attrNameLst>
-                                      </p:cBhvr>
-                                      <p:to>
-                                        <p:strVal val="visible"/>
-                                      </p:to>
-                                    </p:set>
-                                    <p:anim calcmode="lin" valueType="num">
-                                      <p:cBhvr additive="base">
-                                        <p:cTn id="25" dur="500" fill="hold"/>
-                                        <p:tgtEl>
-                                          <p:spTgt spid="235542"/>
-                                        </p:tgtEl>
-                                        <p:attrNameLst>
-                                          <p:attrName>ppt_x</p:attrName>
-                                        </p:attrNameLst>
-                                      </p:cBhvr>
-                                      <p:tavLst>
-                                        <p:tav tm="0">
-                                          <p:val>
-                                            <p:strVal val="0-#ppt_w/2"/>
-                                          </p:val>
-                                        </p:tav>
-                                        <p:tav tm="100000">
-                                          <p:val>
-                                            <p:strVal val="#ppt_x"/>
-                                          </p:val>
-                                        </p:tav>
-                                      </p:tavLst>
-                                    </p:anim>
-                                    <p:anim calcmode="lin" valueType="num">
-                                      <p:cBhvr additive="base">
-                                        <p:cTn id="26" dur="500" fill="hold"/>
-                                        <p:tgtEl>
-                                          <p:spTgt spid="235542"/>
-                                        </p:tgtEl>
-                                        <p:attrNameLst>
-                                          <p:attrName>ppt_y</p:attrName>
-                                        </p:attrNameLst>
-                                      </p:cBhvr>
-                                      <p:tavLst>
-                                        <p:tav tm="0">
-                                          <p:val>
-                                            <p:strVal val="#ppt_y"/>
-                                          </p:val>
-                                        </p:tav>
-                                        <p:tav tm="100000">
-                                          <p:val>
-                                            <p:strVal val="#ppt_y"/>
-                                          </p:val>
-                                        </p:tav>
-                                      </p:tavLst>
-                                    </p:anim>
-                                  </p:childTnLst>
-                                </p:cTn>
-                              </p:par>
-                            </p:childTnLst>
-                          </p:cTn>
-                        </p:par>
-                      </p:childTnLst>
-                    </p:cTn>
-                  </p:par>
-                  <p:par>
-                    <p:cTn id="27" fill="hold">
-                      <p:stCondLst>
-                        <p:cond delay="indefinite"/>
-                      </p:stCondLst>
-                      <p:childTnLst>
-                        <p:par>
-                          <p:cTn id="28" fill="hold">
-                            <p:stCondLst>
-                              <p:cond delay="0"/>
-                            </p:stCondLst>
-                            <p:childTnLst>
-                              <p:par>
-                                <p:cTn id="29" presetID="2" presetClass="entr" presetSubtype="8" fill="hold" grpId="0" nodeType="clickEffect">
-                                  <p:stCondLst>
-                                    <p:cond delay="0"/>
-                                  </p:stCondLst>
-                                  <p:childTnLst>
-                                    <p:set>
-                                      <p:cBhvr>
-                                        <p:cTn id="30" dur="1" fill="hold">
-                                          <p:stCondLst>
-                                            <p:cond delay="0"/>
-                                          </p:stCondLst>
-                                        </p:cTn>
-                                        <p:tgtEl>
-                                          <p:spTgt spid="235538"/>
-                                        </p:tgtEl>
-                                        <p:attrNameLst>
-                                          <p:attrName>style.visibility</p:attrName>
-                                        </p:attrNameLst>
-                                      </p:cBhvr>
-                                      <p:to>
-                                        <p:strVal val="visible"/>
-                                      </p:to>
-                                    </p:set>
-                                    <p:anim calcmode="lin" valueType="num">
-                                      <p:cBhvr additive="base">
-                                        <p:cTn id="31" dur="500" fill="hold"/>
-                                        <p:tgtEl>
-                                          <p:spTgt spid="235538"/>
-                                        </p:tgtEl>
-                                        <p:attrNameLst>
-                                          <p:attrName>ppt_x</p:attrName>
-                                        </p:attrNameLst>
-                                      </p:cBhvr>
-                                      <p:tavLst>
-                                        <p:tav tm="0">
-                                          <p:val>
-                                            <p:strVal val="0-#ppt_w/2"/>
-                                          </p:val>
-                                        </p:tav>
-                                        <p:tav tm="100000">
-                                          <p:val>
-                                            <p:strVal val="#ppt_x"/>
-                                          </p:val>
-                                        </p:tav>
-                                      </p:tavLst>
-                                    </p:anim>
-                                    <p:anim calcmode="lin" valueType="num">
-                                      <p:cBhvr additive="base">
-                                        <p:cTn id="32" dur="500" fill="hold"/>
-                                        <p:tgtEl>
-                                          <p:spTgt spid="235538"/>
-                                        </p:tgtEl>
-                                        <p:attrNameLst>
-                                          <p:attrName>ppt_y</p:attrName>
-                                        </p:attrNameLst>
-                                      </p:cBhvr>
-                                      <p:tavLst>
-                                        <p:tav tm="0">
-                                          <p:val>
-                                            <p:strVal val="#ppt_y"/>
-                                          </p:val>
-                                        </p:tav>
-                                        <p:tav tm="100000">
-                                          <p:val>
-                                            <p:strVal val="#ppt_y"/>
-                                          </p:val>
-                                        </p:tav>
-                                      </p:tavLst>
-                                    </p:anim>
-                                  </p:childTnLst>
-                                </p:cTn>
-                              </p:par>
-                            </p:childTnLst>
-                          </p:cTn>
-                        </p:par>
-                      </p:childTnLst>
-                    </p:cTn>
-                  </p:par>
-                  <p:par>
-                    <p:cTn id="33" fill="hold">
-                      <p:stCondLst>
-                        <p:cond delay="indefinite"/>
-                      </p:stCondLst>
-                      <p:childTnLst>
-                        <p:par>
-                          <p:cTn id="34" fill="hold">
-                            <p:stCondLst>
-                              <p:cond delay="0"/>
-                            </p:stCondLst>
-                            <p:childTnLst>
-                              <p:par>
-                                <p:cTn id="35" presetID="2" presetClass="entr" presetSubtype="8" fill="hold" grpId="0" nodeType="clickEffect">
-                                  <p:stCondLst>
-                                    <p:cond delay="0"/>
-                                  </p:stCondLst>
-                                  <p:childTnLst>
-                                    <p:set>
-                                      <p:cBhvr>
-                                        <p:cTn id="36" dur="1" fill="hold">
-                                          <p:stCondLst>
-                                            <p:cond delay="0"/>
-                                          </p:stCondLst>
-                                        </p:cTn>
-                                        <p:tgtEl>
-                                          <p:spTgt spid="235540"/>
-                                        </p:tgtEl>
-                                        <p:attrNameLst>
-                                          <p:attrName>style.visibility</p:attrName>
-                                        </p:attrNameLst>
-                                      </p:cBhvr>
-                                      <p:to>
-                                        <p:strVal val="visible"/>
-                                      </p:to>
-                                    </p:set>
-                                    <p:anim calcmode="lin" valueType="num">
-                                      <p:cBhvr additive="base">
-                                        <p:cTn id="37" dur="500" fill="hold"/>
-                                        <p:tgtEl>
-                                          <p:spTgt spid="235540"/>
-                                        </p:tgtEl>
-                                        <p:attrNameLst>
-                                          <p:attrName>ppt_x</p:attrName>
-                                        </p:attrNameLst>
-                                      </p:cBhvr>
-                                      <p:tavLst>
-                                        <p:tav tm="0">
-                                          <p:val>
-                                            <p:strVal val="0-#ppt_w/2"/>
-                                          </p:val>
-                                        </p:tav>
-                                        <p:tav tm="100000">
-                                          <p:val>
-                                            <p:strVal val="#ppt_x"/>
-                                          </p:val>
-                                        </p:tav>
-                                      </p:tavLst>
-                                    </p:anim>
-                                    <p:anim calcmode="lin" valueType="num">
-                                      <p:cBhvr additive="base">
-                                        <p:cTn id="38" dur="500" fill="hold"/>
-                                        <p:tgtEl>
-                                          <p:spTgt spid="235540"/>
-                                        </p:tgtEl>
-                                        <p:attrNameLst>
-                                          <p:attrName>ppt_y</p:attrName>
-                                        </p:attrNameLst>
-                                      </p:cBhvr>
-                                      <p:tavLst>
-                                        <p:tav tm="0">
-                                          <p:val>
-                                            <p:strVal val="#ppt_y"/>
-                                          </p:val>
-                                        </p:tav>
-                                        <p:tav tm="100000">
-                                          <p:val>
-                                            <p:strVal val="#ppt_y"/>
-                                          </p:val>
-                                        </p:tav>
-                                      </p:tavLst>
-                                    </p:anim>
-                                  </p:childTnLst>
-                                </p:cTn>
-                              </p:par>
-                            </p:childTnLst>
-                          </p:cTn>
-                        </p:par>
-                      </p:childTnLst>
-                    </p:cTn>
-                  </p:par>
-                  <p:par>
-                    <p:cTn id="39" fill="hold">
-                      <p:stCondLst>
-                        <p:cond delay="indefinite"/>
-                      </p:stCondLst>
-                      <p:childTnLst>
-                        <p:par>
-                          <p:cTn id="40" fill="hold">
-                            <p:stCondLst>
-                              <p:cond delay="0"/>
-                            </p:stCondLst>
-                            <p:childTnLst>
-                              <p:par>
-                                <p:cTn id="41" presetID="2" presetClass="entr" presetSubtype="8" fill="hold" grpId="0" nodeType="clickEffect">
-                                  <p:stCondLst>
-                                    <p:cond delay="0"/>
-                                  </p:stCondLst>
-                                  <p:childTnLst>
-                                    <p:set>
-                                      <p:cBhvr>
-                                        <p:cTn id="42" dur="1" fill="hold">
-                                          <p:stCondLst>
-                                            <p:cond delay="0"/>
-                                          </p:stCondLst>
-                                        </p:cTn>
-                                        <p:tgtEl>
-                                          <p:spTgt spid="235543"/>
-                                        </p:tgtEl>
-                                        <p:attrNameLst>
-                                          <p:attrName>style.visibility</p:attrName>
-                                        </p:attrNameLst>
-                                      </p:cBhvr>
-                                      <p:to>
-                                        <p:strVal val="visible"/>
-                                      </p:to>
-                                    </p:set>
-                                    <p:anim calcmode="lin" valueType="num">
-                                      <p:cBhvr additive="base">
-                                        <p:cTn id="43" dur="500" fill="hold"/>
-                                        <p:tgtEl>
-                                          <p:spTgt spid="235543"/>
-                                        </p:tgtEl>
-                                        <p:attrNameLst>
-                                          <p:attrName>ppt_x</p:attrName>
-                                        </p:attrNameLst>
-                                      </p:cBhvr>
-                                      <p:tavLst>
-                                        <p:tav tm="0">
-                                          <p:val>
-                                            <p:strVal val="0-#ppt_w/2"/>
-                                          </p:val>
-                                        </p:tav>
-                                        <p:tav tm="100000">
-                                          <p:val>
-                                            <p:strVal val="#ppt_x"/>
-                                          </p:val>
-                                        </p:tav>
-                                      </p:tavLst>
-                                    </p:anim>
-                                    <p:anim calcmode="lin" valueType="num">
-                                      <p:cBhvr additive="base">
-                                        <p:cTn id="44" dur="500" fill="hold"/>
-                                        <p:tgtEl>
-                                          <p:spTgt spid="235543"/>
-                                        </p:tgtEl>
-                                        <p:attrNameLst>
-                                          <p:attrName>ppt_y</p:attrName>
-                                        </p:attrNameLst>
-                                      </p:cBhvr>
-                                      <p:tavLst>
-                                        <p:tav tm="0">
-                                          <p:val>
-                                            <p:strVal val="#ppt_y"/>
-                                          </p:val>
-                                        </p:tav>
-                                        <p:tav tm="100000">
-                                          <p:val>
-                                            <p:strVal val="#ppt_y"/>
-                                          </p:val>
-                                        </p:tav>
-                                      </p:tavLst>
-                                    </p:anim>
-                                  </p:childTnLst>
-                                </p:cTn>
-                              </p:par>
-                            </p:childTnLst>
-                          </p:cTn>
-                        </p:par>
-                      </p:childTnLst>
-                    </p:cTn>
-                  </p:par>
-                  <p:par>
-                    <p:cTn id="45" fill="hold">
-                      <p:stCondLst>
-                        <p:cond delay="indefinite"/>
-                      </p:stCondLst>
-                      <p:childTnLst>
-                        <p:par>
-                          <p:cTn id="46" fill="hold">
-                            <p:stCondLst>
-                              <p:cond delay="0"/>
-                            </p:stCondLst>
-                            <p:childTnLst>
-                              <p:par>
-                                <p:cTn id="47" presetID="2" presetClass="entr" presetSubtype="8" fill="hold" grpId="0" nodeType="clickEffect">
-                                  <p:stCondLst>
-                                    <p:cond delay="0"/>
-                                  </p:stCondLst>
-                                  <p:childTnLst>
-                                    <p:set>
-                                      <p:cBhvr>
-                                        <p:cTn id="48" dur="1" fill="hold">
-                                          <p:stCondLst>
-                                            <p:cond delay="0"/>
-                                          </p:stCondLst>
-                                        </p:cTn>
-                                        <p:tgtEl>
-                                          <p:spTgt spid="235541"/>
-                                        </p:tgtEl>
-                                        <p:attrNameLst>
-                                          <p:attrName>style.visibility</p:attrName>
-                                        </p:attrNameLst>
-                                      </p:cBhvr>
-                                      <p:to>
-                                        <p:strVal val="visible"/>
-                                      </p:to>
-                                    </p:set>
-                                    <p:anim calcmode="lin" valueType="num">
-                                      <p:cBhvr additive="base">
-                                        <p:cTn id="49" dur="500" fill="hold"/>
-                                        <p:tgtEl>
-                                          <p:spTgt spid="235541"/>
-                                        </p:tgtEl>
-                                        <p:attrNameLst>
-                                          <p:attrName>ppt_x</p:attrName>
-                                        </p:attrNameLst>
-                                      </p:cBhvr>
-                                      <p:tavLst>
-                                        <p:tav tm="0">
-                                          <p:val>
-                                            <p:strVal val="0-#ppt_w/2"/>
-                                          </p:val>
-                                        </p:tav>
-                                        <p:tav tm="100000">
-                                          <p:val>
-                                            <p:strVal val="#ppt_x"/>
-                                          </p:val>
-                                        </p:tav>
-                                      </p:tavLst>
-                                    </p:anim>
-                                    <p:anim calcmode="lin" valueType="num">
-                                      <p:cBhvr additive="base">
-                                        <p:cTn id="50" dur="500" fill="hold"/>
-                                        <p:tgtEl>
-                                          <p:spTgt spid="235541"/>
-                                        </p:tgtEl>
-                                        <p:attrNameLst>
-                                          <p:attrName>ppt_y</p:attrName>
-                                        </p:attrNameLst>
-                                      </p:cBhvr>
-                                      <p:tavLst>
-                                        <p:tav tm="0">
-                                          <p:val>
-                                            <p:strVal val="#ppt_y"/>
-                                          </p:val>
-                                        </p:tav>
-                                        <p:tav tm="100000">
-                                          <p:val>
-                                            <p:strVal val="#ppt_y"/>
-                                          </p:val>
-                                        </p:tav>
-                                      </p:tavLst>
-                                    </p:anim>
-                                  </p:childTnLst>
-                                </p:cTn>
-                              </p:par>
-                            </p:childTnLst>
-                          </p:cTn>
-                        </p:par>
-                      </p:childTnLst>
-                    </p:cTn>
-                  </p:par>
-                  <p:par>
-                    <p:cTn id="51" fill="hold">
-                      <p:stCondLst>
-                        <p:cond delay="indefinite"/>
-                      </p:stCondLst>
-                      <p:childTnLst>
-                        <p:par>
-                          <p:cTn id="52" fill="hold">
-                            <p:stCondLst>
-                              <p:cond delay="0"/>
-                            </p:stCondLst>
-                            <p:childTnLst>
-                              <p:par>
-                                <p:cTn id="53" presetID="2" presetClass="entr" presetSubtype="8" fill="hold" grpId="0" nodeType="clickEffect">
-                                  <p:stCondLst>
-                                    <p:cond delay="0"/>
-                                  </p:stCondLst>
-                                  <p:childTnLst>
-                                    <p:set>
-                                      <p:cBhvr>
-                                        <p:cTn id="54" dur="1" fill="hold">
-                                          <p:stCondLst>
-                                            <p:cond delay="0"/>
-                                          </p:stCondLst>
-                                        </p:cTn>
-                                        <p:tgtEl>
-                                          <p:spTgt spid="235539"/>
-                                        </p:tgtEl>
-                                        <p:attrNameLst>
-                                          <p:attrName>style.visibility</p:attrName>
-                                        </p:attrNameLst>
-                                      </p:cBhvr>
-                                      <p:to>
-                                        <p:strVal val="visible"/>
-                                      </p:to>
-                                    </p:set>
-                                    <p:anim calcmode="lin" valueType="num">
-                                      <p:cBhvr additive="base">
-                                        <p:cTn id="55" dur="500" fill="hold"/>
-                                        <p:tgtEl>
-                                          <p:spTgt spid="235539"/>
-                                        </p:tgtEl>
-                                        <p:attrNameLst>
-                                          <p:attrName>ppt_x</p:attrName>
-                                        </p:attrNameLst>
-                                      </p:cBhvr>
-                                      <p:tavLst>
-                                        <p:tav tm="0">
-                                          <p:val>
-                                            <p:strVal val="0-#ppt_w/2"/>
-                                          </p:val>
-                                        </p:tav>
-                                        <p:tav tm="100000">
-                                          <p:val>
-                                            <p:strVal val="#ppt_x"/>
-                                          </p:val>
-                                        </p:tav>
-                                      </p:tavLst>
-                                    </p:anim>
-                                    <p:anim calcmode="lin" valueType="num">
-                                      <p:cBhvr additive="base">
-                                        <p:cTn id="56" dur="500" fill="hold"/>
-                                        <p:tgtEl>
-                                          <p:spTgt spid="235539"/>
-                                        </p:tgtEl>
-                                        <p:attrNameLst>
-                                          <p:attrName>ppt_y</p:attrName>
-                                        </p:attrNameLst>
-                                      </p:cBhvr>
-                                      <p:tavLst>
-                                        <p:tav tm="0">
-                                          <p:val>
-                                            <p:strVal val="#ppt_y"/>
-                                          </p:val>
-                                        </p:tav>
-                                        <p:tav tm="100000">
-                                          <p:val>
-                                            <p:strVal val="#ppt_y"/>
-                                          </p:val>
-                                        </p:tav>
-                                      </p:tavLst>
-                                    </p:anim>
-                                  </p:childTnLst>
-                                </p:cTn>
-                              </p:par>
-                            </p:childTnLst>
-                          </p:cTn>
-                        </p:par>
-                      </p:childTnLst>
-                    </p:cTn>
-                  </p:par>
-                  <p:par>
-                    <p:cTn id="57" fill="hold">
-                      <p:stCondLst>
-                        <p:cond delay="indefinite"/>
-                      </p:stCondLst>
-                      <p:childTnLst>
-                        <p:par>
-                          <p:cTn id="58" fill="hold">
-                            <p:stCondLst>
-                              <p:cond delay="0"/>
-                            </p:stCondLst>
-                            <p:childTnLst>
-                              <p:par>
-                                <p:cTn id="59" presetID="2" presetClass="entr" presetSubtype="8" fill="hold" grpId="0" nodeType="clickEffect">
-                                  <p:stCondLst>
-                                    <p:cond delay="0"/>
-                                  </p:stCondLst>
-                                  <p:childTnLst>
-                                    <p:set>
-                                      <p:cBhvr>
-                                        <p:cTn id="60" dur="1" fill="hold">
-                                          <p:stCondLst>
-                                            <p:cond delay="0"/>
-                                          </p:stCondLst>
-                                        </p:cTn>
-                                        <p:tgtEl>
-                                          <p:spTgt spid="235523"/>
-                                        </p:tgtEl>
-                                        <p:attrNameLst>
-                                          <p:attrName>style.visibility</p:attrName>
-                                        </p:attrNameLst>
-                                      </p:cBhvr>
-                                      <p:to>
-                                        <p:strVal val="visible"/>
-                                      </p:to>
-                                    </p:set>
-                                    <p:anim calcmode="lin" valueType="num">
-                                      <p:cBhvr additive="base">
-                                        <p:cTn id="61" dur="500" fill="hold"/>
-                                        <p:tgtEl>
-                                          <p:spTgt spid="235523"/>
-                                        </p:tgtEl>
-                                        <p:attrNameLst>
-                                          <p:attrName>ppt_x</p:attrName>
-                                        </p:attrNameLst>
-                                      </p:cBhvr>
-                                      <p:tavLst>
-                                        <p:tav tm="0">
-                                          <p:val>
-                                            <p:strVal val="0-#ppt_w/2"/>
-                                          </p:val>
-                                        </p:tav>
-                                        <p:tav tm="100000">
-                                          <p:val>
-                                            <p:strVal val="#ppt_x"/>
-                                          </p:val>
-                                        </p:tav>
-                                      </p:tavLst>
-                                    </p:anim>
-                                    <p:anim calcmode="lin" valueType="num">
-                                      <p:cBhvr additive="base">
-                                        <p:cTn id="62" dur="500" fill="hold"/>
-                                        <p:tgtEl>
-                                          <p:spTgt spid="235523"/>
-                                        </p:tgtEl>
-                                        <p:attrNameLst>
-                                          <p:attrName>ppt_y</p:attrName>
-                                        </p:attrNameLst>
-                                      </p:cBhvr>
-                                      <p:tavLst>
-                                        <p:tav tm="0">
-                                          <p:val>
-                                            <p:strVal val="#ppt_y"/>
-                                          </p:val>
-                                        </p:tav>
-                                        <p:tav tm="100000">
-                                          <p:val>
-                                            <p:strVal val="#ppt_y"/>
-                                          </p:val>
-                                        </p:tav>
-                                      </p:tavLst>
-                                    </p:anim>
-                                  </p:childTnLst>
-                                </p:cTn>
-                              </p:par>
-                            </p:childTnLst>
-                          </p:cTn>
-                        </p:par>
-                      </p:childTnLst>
-                    </p:cTn>
-                  </p:par>
-                </p:childTnLst>
-              </p:cTn>
-              <p:prevCondLst>
-                <p:cond evt="onPrev" delay="0">
-                  <p:tgtEl>
-                    <p:sldTgt/>
-                  </p:tgtEl>
-                </p:cond>
-              </p:prevCondLst>
-              <p:nextCondLst>
-                <p:cond evt="onNext" delay="0">
-                  <p:tgtEl>
-                    <p:sldTgt/>
-                  </p:tgtEl>
-                </p:cond>
-              </p:nextCondLst>
-            </p:seq>
-          </p:childTnLst>
-        </p:cTn>
-      </p:par>
-    </p:tnLst>
-    <p:bldLst>
-      <p:bldP spid="235523" grpId="0" autoUpdateAnimBg="0"/>
-      <p:bldP spid="235537" grpId="0" animBg="1" autoUpdateAnimBg="0"/>
-      <p:bldP spid="235538" grpId="0" animBg="1" autoUpdateAnimBg="0"/>
-      <p:bldP spid="235539" grpId="0" animBg="1" autoUpdateAnimBg="0"/>
-      <p:bldP spid="235540" grpId="0" animBg="1" autoUpdateAnimBg="0"/>
-      <p:bldP spid="235541" grpId="0" animBg="1" autoUpdateAnimBg="0"/>
-      <p:bldP spid="235542" grpId="0" animBg="1" autoUpdateAnimBg="0"/>
-      <p:bldP spid="235543" grpId="0" animBg="1" autoUpdateAnimBg="0"/>
-      <p:bldP spid="235544" grpId="0" animBg="1" autoUpdateAnimBg="0"/>
-      <p:bldP spid="235545" grpId="0" animBg="1" autoUpdateAnimBg="0"/>
-    </p:bldLst>
-  </p:timing>
-</p:sld>
-</file>
-
-<file path=ppt/slides/slide16.xml><?xml version="1.0" encoding="utf-8"?>
-<p:sld xmlns:a="http://schemas.openxmlformats.org/drawingml/2006/main" xmlns:r="http://schemas.openxmlformats.org/officeDocument/2006/relationships" xmlns:p="http://schemas.openxmlformats.org/presentationml/2006/main" showMasterPhAnim="0">
-  <p:cSld>
-    <p:spTree>
-      <p:nvGrpSpPr>
-        <p:cNvPr id="1" name=""/>
-        <p:cNvGrpSpPr/>
-        <p:nvPr/>
-      </p:nvGrpSpPr>
-      <p:grpSpPr>
-        <a:xfrm>
-          <a:off x="0" y="0"/>
-          <a:ext cx="0" cy="0"/>
-          <a:chOff x="0" y="0"/>
-          <a:chExt cx="0" cy="0"/>
-        </a:xfrm>
-      </p:grpSpPr>
-      <p:sp>
-        <p:nvSpPr>
-          <p:cNvPr id="7" name="Rectangle 2"/>
-          <p:cNvSpPr>
-            <a:spLocks noChangeArrowheads="1"/>
-          </p:cNvSpPr>
-          <p:nvPr/>
-        </p:nvSpPr>
-        <p:spPr bwMode="auto">
-          <a:xfrm>
-            <a:off x="3275856" y="332656"/>
-            <a:ext cx="2009775" cy="574253"/>
-          </a:xfrm>
-          <a:prstGeom prst="rect">
-            <a:avLst/>
-          </a:prstGeom>
-          <a:noFill/>
-          <a:ln>
-            <a:noFill/>
-          </a:ln>
-          <a:effectLst/>
-          <a:extLst>
-            <a:ext uri="{909E8E84-426E-40DD-AFC4-6F175D3DCCD1}">
-              <a14:hiddenFill xmlns:a14="http://schemas.microsoft.com/office/drawing/2010/main">
-                <a:solidFill>
-                  <a:schemeClr val="accent1"/>
-                </a:solidFill>
-              </a14:hiddenFill>
-            </a:ext>
-            <a:ext uri="{91240B29-F687-4F45-9708-019B960494DF}">
-              <a14:hiddenLine xmlns:a14="http://schemas.microsoft.com/office/drawing/2010/main" w="9525">
-                <a:solidFill>
-                  <a:schemeClr val="tx1"/>
-                </a:solidFill>
-                <a:miter lim="800000"/>
-                <a:headEnd/>
-                <a:tailEnd/>
-              </a14:hiddenLine>
-            </a:ext>
-            <a:ext uri="{AF507438-7753-43E0-B8FC-AC1667EBCBE1}">
-              <a14:hiddenEffects xmlns:a14="http://schemas.microsoft.com/office/drawing/2010/main">
-                <a:effectLst>
-                  <a:outerShdw dist="35921" dir="2700000" algn="ctr" rotWithShape="0">
-                    <a:schemeClr val="bg2"/>
-                  </a:outerShdw>
-                </a:effectLst>
-              </a14:hiddenEffects>
-            </a:ext>
-          </a:extLst>
-        </p:spPr>
-        <p:txBody>
-          <a:bodyPr lIns="92075" tIns="46038" rIns="92075" bIns="46038" anchor="ctr"/>
-          <a:lstStyle/>
-          <a:p>
-            <a:pPr algn="ctr" eaLnBrk="0" hangingPunct="0">
-              <a:defRPr/>
-            </a:pPr>
-            <a:r>
-              <a:rPr lang="es-ES_tradnl" sz="4000" b="1" dirty="0">
-                <a:solidFill>
-                  <a:schemeClr val="accent6">
-                    <a:lumMod val="75000"/>
-                  </a:schemeClr>
-                </a:solidFill>
-                <a:effectLst>
-                  <a:outerShdw blurRad="38100" dist="38100" dir="2700000" algn="tl">
-                    <a:srgbClr val="C0C0C0"/>
-                  </a:outerShdw>
-                </a:effectLst>
-                <a:latin typeface="Dom Casual" charset="0"/>
-              </a:rPr>
-              <a:t>Solución</a:t>
-            </a:r>
-          </a:p>
-        </p:txBody>
-      </p:sp>
-      <p:pic>
-        <p:nvPicPr>
-          <p:cNvPr id="9" name="2 Imagen">
-            <a:extLst>
-              <a:ext uri="{FF2B5EF4-FFF2-40B4-BE49-F238E27FC236}">
-                <a16:creationId xmlns:a16="http://schemas.microsoft.com/office/drawing/2014/main" id="{C06038E6-FD7D-4CAA-A192-31DED8149559}"/>
-              </a:ext>
-            </a:extLst>
-          </p:cNvPr>
-          <p:cNvPicPr>
-            <a:picLocks noChangeAspect="1"/>
-          </p:cNvPicPr>
-          <p:nvPr/>
-        </p:nvPicPr>
-        <p:blipFill>
-          <a:blip r:embed="rId3">
-            <a:extLst>
-              <a:ext uri="{28A0092B-C50C-407E-A947-70E740481C1C}">
-                <a14:useLocalDpi xmlns:a14="http://schemas.microsoft.com/office/drawing/2010/main" val="0"/>
-              </a:ext>
-            </a:extLst>
-          </a:blip>
-          <a:stretch>
-            <a:fillRect/>
-          </a:stretch>
-        </p:blipFill>
-        <p:spPr>
-          <a:xfrm>
-            <a:off x="6588224" y="4509179"/>
-            <a:ext cx="2009775" cy="1914525"/>
-          </a:xfrm>
-          <a:prstGeom prst="rect">
-            <a:avLst/>
-          </a:prstGeom>
-        </p:spPr>
-      </p:pic>
-      <p:pic>
-        <p:nvPicPr>
-          <p:cNvPr id="10" name="1 Imagen">
-            <a:extLst>
-              <a:ext uri="{FF2B5EF4-FFF2-40B4-BE49-F238E27FC236}">
-                <a16:creationId xmlns:a16="http://schemas.microsoft.com/office/drawing/2014/main" id="{DA728E73-99F8-4976-B396-99F5BD7382FB}"/>
-              </a:ext>
-            </a:extLst>
-          </p:cNvPr>
-          <p:cNvPicPr>
-            <a:picLocks noChangeAspect="1"/>
-          </p:cNvPicPr>
-          <p:nvPr/>
-        </p:nvPicPr>
-        <p:blipFill>
-          <a:blip r:embed="rId4">
-            <a:extLst>
-              <a:ext uri="{28A0092B-C50C-407E-A947-70E740481C1C}">
-                <a14:useLocalDpi xmlns:a14="http://schemas.microsoft.com/office/drawing/2010/main" val="0"/>
-              </a:ext>
-            </a:extLst>
-          </a:blip>
-          <a:stretch>
-            <a:fillRect/>
-          </a:stretch>
-        </p:blipFill>
-        <p:spPr>
-          <a:xfrm>
-            <a:off x="6260437" y="256284"/>
-            <a:ext cx="1728192" cy="1603861"/>
-          </a:xfrm>
-          <a:prstGeom prst="rect">
-            <a:avLst/>
-          </a:prstGeom>
-        </p:spPr>
-      </p:pic>
-      <p:pic>
-        <p:nvPicPr>
-          <p:cNvPr id="6" name="Imagen 5">
-            <a:extLst>
-              <a:ext uri="{FF2B5EF4-FFF2-40B4-BE49-F238E27FC236}">
-                <a16:creationId xmlns:a16="http://schemas.microsoft.com/office/drawing/2014/main" id="{FD03391B-C6AF-EF7E-7D67-A331AF68104A}"/>
-              </a:ext>
-            </a:extLst>
-          </p:cNvPr>
-          <p:cNvPicPr>
-            <a:picLocks noChangeAspect="1"/>
-          </p:cNvPicPr>
-          <p:nvPr/>
-        </p:nvPicPr>
-        <p:blipFill>
-          <a:blip r:embed="rId5"/>
-          <a:stretch>
-            <a:fillRect/>
-          </a:stretch>
-        </p:blipFill>
-        <p:spPr>
-          <a:xfrm>
-            <a:off x="1213030" y="1988840"/>
-            <a:ext cx="6717939" cy="1990006"/>
-          </a:xfrm>
-          <a:prstGeom prst="rect">
-            <a:avLst/>
-          </a:prstGeom>
-        </p:spPr>
-      </p:pic>
-    </p:spTree>
-    <p:extLst>
-      <p:ext uri="{BB962C8B-B14F-4D97-AF65-F5344CB8AC3E}">
-        <p14:creationId xmlns:p14="http://schemas.microsoft.com/office/powerpoint/2010/main" val="798083237"/>
-      </p:ext>
-    </p:extLst>
-  </p:cSld>
-  <p:clrMapOvr>
-    <a:masterClrMapping/>
-  </p:clrMapOvr>
-</p:sld>
-</file>
-
-<file path=ppt/slides/slide17.xml><?xml version="1.0" encoding="utf-8"?>
-<p:sld xmlns:a="http://schemas.openxmlformats.org/drawingml/2006/main" xmlns:r="http://schemas.openxmlformats.org/officeDocument/2006/relationships" xmlns:p="http://schemas.openxmlformats.org/presentationml/2006/main">
-  <p:cSld>
-    <p:spTree>
-      <p:nvGrpSpPr>
-        <p:cNvPr id="1" name=""/>
-        <p:cNvGrpSpPr/>
-        <p:nvPr/>
-      </p:nvGrpSpPr>
-      <p:grpSpPr>
-        <a:xfrm>
-          <a:off x="0" y="0"/>
-          <a:ext cx="0" cy="0"/>
-          <a:chOff x="0" y="0"/>
-          <a:chExt cx="0" cy="0"/>
-        </a:xfrm>
-      </p:grpSpPr>
-      <p:sp>
-        <p:nvSpPr>
-          <p:cNvPr id="209924" name="Text Box 4"/>
-          <p:cNvSpPr txBox="1">
-            <a:spLocks noChangeArrowheads="1"/>
-          </p:cNvSpPr>
-          <p:nvPr/>
-        </p:nvSpPr>
-        <p:spPr bwMode="auto">
-          <a:xfrm>
-            <a:off x="877403" y="1556792"/>
-            <a:ext cx="7340352" cy="1131848"/>
-          </a:xfrm>
-          <a:prstGeom prst="rect">
-            <a:avLst/>
-          </a:prstGeom>
-          <a:noFill/>
-          <a:ln>
-            <a:noFill/>
-          </a:ln>
-          <a:effectLst/>
-          <a:extLst>
-            <a:ext uri="{909E8E84-426E-40DD-AFC4-6F175D3DCCD1}">
-              <a14:hiddenFill xmlns:a14="http://schemas.microsoft.com/office/drawing/2010/main">
-                <a:solidFill>
-                  <a:schemeClr val="accent1"/>
-                </a:solidFill>
-              </a14:hiddenFill>
-            </a:ext>
-            <a:ext uri="{91240B29-F687-4F45-9708-019B960494DF}">
-              <a14:hiddenLine xmlns:a14="http://schemas.microsoft.com/office/drawing/2010/main" w="12700">
-                <a:solidFill>
-                  <a:schemeClr val="tx1"/>
-                </a:solidFill>
-                <a:miter lim="800000"/>
-                <a:headEnd type="none" w="sm" len="sm"/>
-                <a:tailEnd type="none" w="sm" len="sm"/>
-              </a14:hiddenLine>
-            </a:ext>
-            <a:ext uri="{AF507438-7753-43E0-B8FC-AC1667EBCBE1}">
-              <a14:hiddenEffects xmlns:a14="http://schemas.microsoft.com/office/drawing/2010/main">
-                <a:effectLst>
-                  <a:outerShdw dist="35921" dir="2700000" algn="ctr" rotWithShape="0">
-                    <a:schemeClr val="bg2"/>
-                  </a:outerShdw>
-                </a:effectLst>
-              </a14:hiddenEffects>
-            </a:ext>
-          </a:extLst>
-        </p:spPr>
-        <p:txBody>
-          <a:bodyPr wrap="square">
-            <a:spAutoFit/>
-          </a:bodyPr>
-          <a:lstStyle>
-            <a:lvl1pPr marL="457200" indent="-457200" defTabSz="762000" eaLnBrk="0" hangingPunct="0">
-              <a:defRPr sz="1600">
-                <a:solidFill>
-                  <a:schemeClr val="tx1"/>
-                </a:solidFill>
-                <a:latin typeface="Arial" pitchFamily="34" charset="0"/>
-              </a:defRPr>
-            </a:lvl1pPr>
-            <a:lvl2pPr marL="742950" indent="-285750" defTabSz="762000" eaLnBrk="0" hangingPunct="0">
-              <a:defRPr sz="1600">
-                <a:solidFill>
-                  <a:schemeClr val="tx1"/>
-                </a:solidFill>
-                <a:latin typeface="Arial" pitchFamily="34" charset="0"/>
-              </a:defRPr>
-            </a:lvl2pPr>
-            <a:lvl3pPr marL="1143000" indent="-228600" defTabSz="762000" eaLnBrk="0" hangingPunct="0">
-              <a:defRPr sz="1600">
-                <a:solidFill>
-                  <a:schemeClr val="tx1"/>
-                </a:solidFill>
-                <a:latin typeface="Arial" pitchFamily="34" charset="0"/>
-              </a:defRPr>
-            </a:lvl3pPr>
-            <a:lvl4pPr marL="1600200" indent="-228600" defTabSz="762000" eaLnBrk="0" hangingPunct="0">
-              <a:defRPr sz="1600">
-                <a:solidFill>
-                  <a:schemeClr val="tx1"/>
-                </a:solidFill>
-                <a:latin typeface="Arial" pitchFamily="34" charset="0"/>
-              </a:defRPr>
-            </a:lvl4pPr>
-            <a:lvl5pPr marL="2057400" indent="-228600" defTabSz="762000" eaLnBrk="0" hangingPunct="0">
-              <a:defRPr sz="1600">
-                <a:solidFill>
-                  <a:schemeClr val="tx1"/>
-                </a:solidFill>
-                <a:latin typeface="Arial" pitchFamily="34" charset="0"/>
-              </a:defRPr>
-            </a:lvl5pPr>
-            <a:lvl6pPr marL="2514600" indent="-228600" defTabSz="762000" eaLnBrk="0" fontAlgn="base" hangingPunct="0">
-              <a:spcBef>
-                <a:spcPct val="0"/>
-              </a:spcBef>
-              <a:spcAft>
-                <a:spcPct val="0"/>
-              </a:spcAft>
-              <a:defRPr sz="1600">
-                <a:solidFill>
-                  <a:schemeClr val="tx1"/>
-                </a:solidFill>
-                <a:latin typeface="Arial" pitchFamily="34" charset="0"/>
-              </a:defRPr>
-            </a:lvl6pPr>
-            <a:lvl7pPr marL="2971800" indent="-228600" defTabSz="762000" eaLnBrk="0" fontAlgn="base" hangingPunct="0">
-              <a:spcBef>
-                <a:spcPct val="0"/>
-              </a:spcBef>
-              <a:spcAft>
-                <a:spcPct val="0"/>
-              </a:spcAft>
-              <a:defRPr sz="1600">
-                <a:solidFill>
-                  <a:schemeClr val="tx1"/>
-                </a:solidFill>
-                <a:latin typeface="Arial" pitchFamily="34" charset="0"/>
-              </a:defRPr>
-            </a:lvl7pPr>
-            <a:lvl8pPr marL="3429000" indent="-228600" defTabSz="762000" eaLnBrk="0" fontAlgn="base" hangingPunct="0">
-              <a:spcBef>
-                <a:spcPct val="0"/>
-              </a:spcBef>
-              <a:spcAft>
-                <a:spcPct val="0"/>
-              </a:spcAft>
-              <a:defRPr sz="1600">
-                <a:solidFill>
-                  <a:schemeClr val="tx1"/>
-                </a:solidFill>
-                <a:latin typeface="Arial" pitchFamily="34" charset="0"/>
-              </a:defRPr>
-            </a:lvl8pPr>
-            <a:lvl9pPr marL="3886200" indent="-228600" defTabSz="762000" eaLnBrk="0" fontAlgn="base" hangingPunct="0">
-              <a:spcBef>
-                <a:spcPct val="0"/>
-              </a:spcBef>
-              <a:spcAft>
-                <a:spcPct val="0"/>
-              </a:spcAft>
-              <a:defRPr sz="1600">
-                <a:solidFill>
-                  <a:schemeClr val="tx1"/>
-                </a:solidFill>
-                <a:latin typeface="Arial" pitchFamily="34" charset="0"/>
-              </a:defRPr>
-            </a:lvl9pPr>
-          </a:lstStyle>
-          <a:p>
-            <a:pPr algn="ctr">
-              <a:lnSpc>
-                <a:spcPct val="150000"/>
-              </a:lnSpc>
-            </a:pPr>
-            <a:r>
-              <a:rPr lang="es-ES_tradnl" sz="2400" b="1" dirty="0">
-                <a:solidFill>
-                  <a:schemeClr val="accent6">
-                    <a:lumMod val="75000"/>
-                  </a:schemeClr>
-                </a:solidFill>
-              </a:rPr>
-              <a:t>Integrar todas las funciones </a:t>
-            </a:r>
-            <a:r>
-              <a:rPr lang="es-ES_tradnl" sz="2400" dirty="0"/>
-              <a:t>en un solo programa para verificar su funcionamiento</a:t>
-            </a:r>
-            <a:endParaRPr lang="es-ES" sz="2400" b="1" dirty="0">
-              <a:solidFill>
-                <a:srgbClr val="0000FF"/>
-              </a:solidFill>
-            </a:endParaRPr>
-          </a:p>
-        </p:txBody>
-      </p:sp>
-      <p:sp>
-        <p:nvSpPr>
-          <p:cNvPr id="7" name="Rectangle 2"/>
-          <p:cNvSpPr>
-            <a:spLocks noChangeArrowheads="1"/>
-          </p:cNvSpPr>
-          <p:nvPr/>
-        </p:nvSpPr>
-        <p:spPr bwMode="auto">
-          <a:xfrm>
-            <a:off x="877403" y="156170"/>
-            <a:ext cx="7340352" cy="1544638"/>
-          </a:xfrm>
-          <a:prstGeom prst="rect">
-            <a:avLst/>
-          </a:prstGeom>
-          <a:noFill/>
-          <a:ln>
-            <a:noFill/>
-          </a:ln>
-          <a:effectLst/>
-          <a:extLst>
-            <a:ext uri="{909E8E84-426E-40DD-AFC4-6F175D3DCCD1}">
-              <a14:hiddenFill xmlns:a14="http://schemas.microsoft.com/office/drawing/2010/main">
-                <a:solidFill>
-                  <a:schemeClr val="accent1"/>
-                </a:solidFill>
-              </a14:hiddenFill>
-            </a:ext>
-            <a:ext uri="{91240B29-F687-4F45-9708-019B960494DF}">
-              <a14:hiddenLine xmlns:a14="http://schemas.microsoft.com/office/drawing/2010/main" w="9525">
-                <a:solidFill>
-                  <a:schemeClr val="tx1"/>
-                </a:solidFill>
-                <a:miter lim="800000"/>
-                <a:headEnd/>
-                <a:tailEnd/>
-              </a14:hiddenLine>
-            </a:ext>
-            <a:ext uri="{AF507438-7753-43E0-B8FC-AC1667EBCBE1}">
-              <a14:hiddenEffects xmlns:a14="http://schemas.microsoft.com/office/drawing/2010/main">
-                <a:effectLst>
-                  <a:outerShdw dist="35921" dir="2700000" algn="ctr" rotWithShape="0">
-                    <a:schemeClr val="bg2"/>
-                  </a:outerShdw>
-                </a:effectLst>
-              </a14:hiddenEffects>
-            </a:ext>
-          </a:extLst>
-        </p:spPr>
-        <p:txBody>
-          <a:bodyPr lIns="92075" tIns="46038" rIns="92075" bIns="46038" anchor="ctr"/>
-          <a:lstStyle/>
-          <a:p>
-            <a:pPr algn="ctr" eaLnBrk="0" hangingPunct="0">
-              <a:defRPr/>
-            </a:pPr>
-            <a:r>
-              <a:rPr lang="es-ES_tradnl" sz="4400" b="1" dirty="0">
-                <a:solidFill>
-                  <a:srgbClr val="0070C0"/>
-                </a:solidFill>
-                <a:effectLst>
-                  <a:outerShdw blurRad="38100" dist="38100" dir="2700000" algn="tl">
-                    <a:srgbClr val="C0C0C0"/>
-                  </a:outerShdw>
-                </a:effectLst>
-                <a:latin typeface="Dom Casual" charset="0"/>
-              </a:rPr>
-              <a:t>Actividad Grupal</a:t>
-            </a:r>
-          </a:p>
-        </p:txBody>
-      </p:sp>
-      <p:pic>
-        <p:nvPicPr>
-          <p:cNvPr id="3" name="Imagen 2" descr="Imagen que contiene pequeño, juguete, tabla&#10;&#10;Descripción generada automáticamente">
-            <a:extLst>
-              <a:ext uri="{FF2B5EF4-FFF2-40B4-BE49-F238E27FC236}">
-                <a16:creationId xmlns:a16="http://schemas.microsoft.com/office/drawing/2014/main" id="{316F16D2-23BD-4523-AB74-D7DEBB52FF79}"/>
-              </a:ext>
-            </a:extLst>
-          </p:cNvPr>
-          <p:cNvPicPr>
-            <a:picLocks noChangeAspect="1"/>
-          </p:cNvPicPr>
-          <p:nvPr/>
-        </p:nvPicPr>
-        <p:blipFill>
-          <a:blip r:embed="rId2">
-            <a:extLst>
-              <a:ext uri="{28A0092B-C50C-407E-A947-70E740481C1C}">
-                <a14:useLocalDpi xmlns:a14="http://schemas.microsoft.com/office/drawing/2010/main" val="0"/>
-              </a:ext>
-            </a:extLst>
-          </a:blip>
-          <a:stretch>
-            <a:fillRect/>
-          </a:stretch>
-        </p:blipFill>
-        <p:spPr>
-          <a:xfrm>
-            <a:off x="3059832" y="3068960"/>
-            <a:ext cx="3227437" cy="2929626"/>
-          </a:xfrm>
-          <a:prstGeom prst="rect">
-            <a:avLst/>
-          </a:prstGeom>
-        </p:spPr>
-      </p:pic>
-    </p:spTree>
-    <p:extLst>
-      <p:ext uri="{BB962C8B-B14F-4D97-AF65-F5344CB8AC3E}">
-        <p14:creationId xmlns:p14="http://schemas.microsoft.com/office/powerpoint/2010/main" val="812640651"/>
-      </p:ext>
-    </p:extLst>
-  </p:cSld>
-  <p:clrMapOvr>
-    <a:masterClrMapping/>
-  </p:clrMapOvr>
-  <p:timing>
-    <p:tnLst>
-      <p:par>
-        <p:cTn id="1" dur="indefinite" restart="never" nodeType="tmRoot">
-          <p:childTnLst>
-            <p:seq concurrent="1" nextAc="seek">
-              <p:cTn id="2" dur="indefinite" nodeType="mainSeq">
-                <p:childTnLst>
-                  <p:par>
-                    <p:cTn id="3" fill="hold" nodeType="clickPar">
-                      <p:stCondLst>
-                        <p:cond delay="indefinite"/>
-                      </p:stCondLst>
-                      <p:childTnLst>
-                        <p:par>
-                          <p:cTn id="4" fill="hold" nodeType="withGroup">
-                            <p:stCondLst>
-                              <p:cond delay="0"/>
-                            </p:stCondLst>
-                            <p:childTnLst>
-                              <p:par>
-                                <p:cTn id="5" presetID="2" presetClass="entr" presetSubtype="8" fill="hold" grpId="0" nodeType="clickEffect">
-                                  <p:stCondLst>
-                                    <p:cond delay="0"/>
-                                  </p:stCondLst>
-                                  <p:childTnLst>
-                                    <p:set>
-                                      <p:cBhvr>
-                                        <p:cTn id="6" dur="1" fill="hold">
-                                          <p:stCondLst>
-                                            <p:cond delay="0"/>
-                                          </p:stCondLst>
-                                        </p:cTn>
-                                        <p:tgtEl>
-                                          <p:spTgt spid="209924"/>
-                                        </p:tgtEl>
-                                        <p:attrNameLst>
-                                          <p:attrName>style.visibility</p:attrName>
-                                        </p:attrNameLst>
-                                      </p:cBhvr>
-                                      <p:to>
-                                        <p:strVal val="visible"/>
-                                      </p:to>
-                                    </p:set>
-                                    <p:anim calcmode="lin" valueType="num">
-                                      <p:cBhvr additive="base">
-                                        <p:cTn id="7" dur="500" fill="hold"/>
-                                        <p:tgtEl>
-                                          <p:spTgt spid="209924"/>
-                                        </p:tgtEl>
-                                        <p:attrNameLst>
-                                          <p:attrName>ppt_x</p:attrName>
-                                        </p:attrNameLst>
-                                      </p:cBhvr>
-                                      <p:tavLst>
-                                        <p:tav tm="0">
-                                          <p:val>
-                                            <p:strVal val="0-#ppt_w/2"/>
-                                          </p:val>
-                                        </p:tav>
-                                        <p:tav tm="100000">
-                                          <p:val>
-                                            <p:strVal val="#ppt_x"/>
-                                          </p:val>
-                                        </p:tav>
-                                      </p:tavLst>
-                                    </p:anim>
-                                    <p:anim calcmode="lin" valueType="num">
-                                      <p:cBhvr additive="base">
-                                        <p:cTn id="8" dur="500" fill="hold"/>
-                                        <p:tgtEl>
-                                          <p:spTgt spid="209924"/>
-                                        </p:tgtEl>
-                                        <p:attrNameLst>
-                                          <p:attrName>ppt_y</p:attrName>
-                                        </p:attrNameLst>
-                                      </p:cBhvr>
-                                      <p:tavLst>
-                                        <p:tav tm="0">
-                                          <p:val>
-                                            <p:strVal val="#ppt_y"/>
-                                          </p:val>
-                                        </p:tav>
-                                        <p:tav tm="100000">
-                                          <p:val>
-                                            <p:strVal val="#ppt_y"/>
-                                          </p:val>
-                                        </p:tav>
-                                      </p:tavLst>
-                                    </p:anim>
-                                  </p:childTnLst>
-                                </p:cTn>
-                              </p:par>
-                            </p:childTnLst>
-                          </p:cTn>
-                        </p:par>
-                      </p:childTnLst>
-                    </p:cTn>
-                  </p:par>
-                </p:childTnLst>
-              </p:cTn>
-              <p:prevCondLst>
-                <p:cond evt="onPrev" delay="0">
-                  <p:tgtEl>
-                    <p:sldTgt/>
-                  </p:tgtEl>
-                </p:cond>
-              </p:prevCondLst>
-              <p:nextCondLst>
-                <p:cond evt="onNext" delay="0">
-                  <p:tgtEl>
-                    <p:sldTgt/>
-                  </p:tgtEl>
-                </p:cond>
-              </p:nextCondLst>
-            </p:seq>
-          </p:childTnLst>
-        </p:cTn>
-      </p:par>
-    </p:tnLst>
-    <p:bldLst>
-      <p:bldP spid="209924" grpId="0" autoUpdateAnimBg="0"/>
-    </p:bldLst>
-  </p:timing>
-</p:sld>
-</file>
-
-<file path=ppt/slides/slide18.xml><?xml version="1.0" encoding="utf-8"?>
-<p:sld xmlns:a="http://schemas.openxmlformats.org/drawingml/2006/main" xmlns:r="http://schemas.openxmlformats.org/officeDocument/2006/relationships" xmlns:p="http://schemas.openxmlformats.org/presentationml/2006/main">
-  <p:cSld>
-    <p:spTree>
-      <p:nvGrpSpPr>
-        <p:cNvPr id="1" name=""/>
-        <p:cNvGrpSpPr/>
-        <p:nvPr/>
-      </p:nvGrpSpPr>
-      <p:grpSpPr>
-        <a:xfrm>
-          <a:off x="0" y="0"/>
-          <a:ext cx="0" cy="0"/>
-          <a:chOff x="0" y="0"/>
-          <a:chExt cx="0" cy="0"/>
-        </a:xfrm>
-      </p:grpSpPr>
-      <p:sp>
-        <p:nvSpPr>
-          <p:cNvPr id="27650" name="Rectangle 5"/>
-          <p:cNvSpPr>
-            <a:spLocks noChangeArrowheads="1"/>
-          </p:cNvSpPr>
-          <p:nvPr/>
-        </p:nvSpPr>
-        <p:spPr bwMode="auto">
-          <a:xfrm>
-            <a:off x="0" y="5734050"/>
-            <a:ext cx="3203575" cy="1123950"/>
-          </a:xfrm>
-          <a:prstGeom prst="rect">
-            <a:avLst/>
-          </a:prstGeom>
-          <a:solidFill>
-            <a:schemeClr val="bg1"/>
-          </a:solidFill>
-          <a:ln>
-            <a:noFill/>
-          </a:ln>
-          <a:effectLst/>
-          <a:extLst>
-            <a:ext uri="{91240B29-F687-4F45-9708-019B960494DF}">
-              <a14:hiddenLine xmlns:a14="http://schemas.microsoft.com/office/drawing/2010/main" w="12700">
-                <a:solidFill>
-                  <a:schemeClr val="tx1"/>
-                </a:solidFill>
-                <a:miter lim="800000"/>
-                <a:headEnd type="none" w="sm" len="sm"/>
-                <a:tailEnd type="none" w="sm" len="sm"/>
-              </a14:hiddenLine>
-            </a:ext>
-            <a:ext uri="{AF507438-7753-43E0-B8FC-AC1667EBCBE1}">
-              <a14:hiddenEffects xmlns:a14="http://schemas.microsoft.com/office/drawing/2010/main">
-                <a:effectLst>
-                  <a:outerShdw dist="35921" dir="2700000" algn="ctr" rotWithShape="0">
-                    <a:schemeClr val="bg2"/>
-                  </a:outerShdw>
-                </a:effectLst>
-              </a14:hiddenEffects>
-            </a:ext>
-          </a:extLst>
-        </p:spPr>
-        <p:txBody>
-          <a:bodyPr wrap="none" anchor="ctr"/>
-          <a:lstStyle/>
-          <a:p>
-            <a:endParaRPr lang="es-MX" dirty="0"/>
-          </a:p>
-        </p:txBody>
-      </p:sp>
-      <p:sp>
-        <p:nvSpPr>
-          <p:cNvPr id="6" name="Rectangle 2"/>
-          <p:cNvSpPr>
-            <a:spLocks noChangeArrowheads="1"/>
-          </p:cNvSpPr>
-          <p:nvPr/>
-        </p:nvSpPr>
-        <p:spPr bwMode="auto">
-          <a:xfrm>
-            <a:off x="1453976" y="44624"/>
-            <a:ext cx="5765205" cy="920974"/>
-          </a:xfrm>
-          <a:prstGeom prst="rect">
-            <a:avLst/>
-          </a:prstGeom>
-          <a:noFill/>
-          <a:ln>
-            <a:noFill/>
-          </a:ln>
-          <a:effectLst/>
-          <a:extLst>
-            <a:ext uri="{909E8E84-426E-40DD-AFC4-6F175D3DCCD1}">
-              <a14:hiddenFill xmlns:a14="http://schemas.microsoft.com/office/drawing/2010/main">
-                <a:solidFill>
-                  <a:schemeClr val="accent1"/>
-                </a:solidFill>
-              </a14:hiddenFill>
-            </a:ext>
-            <a:ext uri="{91240B29-F687-4F45-9708-019B960494DF}">
-              <a14:hiddenLine xmlns:a14="http://schemas.microsoft.com/office/drawing/2010/main" w="9525">
-                <a:solidFill>
-                  <a:schemeClr val="tx1"/>
-                </a:solidFill>
-                <a:miter lim="800000"/>
-                <a:headEnd/>
-                <a:tailEnd/>
-              </a14:hiddenLine>
-            </a:ext>
-            <a:ext uri="{AF507438-7753-43E0-B8FC-AC1667EBCBE1}">
-              <a14:hiddenEffects xmlns:a14="http://schemas.microsoft.com/office/drawing/2010/main">
-                <a:effectLst>
-                  <a:outerShdw dist="35921" dir="2700000" algn="ctr" rotWithShape="0">
-                    <a:schemeClr val="bg2"/>
-                  </a:outerShdw>
-                </a:effectLst>
-              </a14:hiddenEffects>
-            </a:ext>
-          </a:extLst>
-        </p:spPr>
-        <p:txBody>
-          <a:bodyPr lIns="92075" tIns="46038" rIns="92075" bIns="46038" anchor="ctr"/>
-          <a:lstStyle/>
-          <a:p>
-            <a:pPr algn="ctr" eaLnBrk="0" hangingPunct="0">
-              <a:defRPr/>
-            </a:pPr>
-            <a:r>
-              <a:rPr lang="es-ES_tradnl" sz="4400" b="1" dirty="0">
-                <a:solidFill>
-                  <a:srgbClr val="0070C0"/>
-                </a:solidFill>
-                <a:effectLst>
-                  <a:outerShdw blurRad="38100" dist="38100" dir="2700000" algn="tl">
-                    <a:srgbClr val="C0C0C0"/>
-                  </a:outerShdw>
-                </a:effectLst>
-                <a:latin typeface="Dom Casual" charset="0"/>
-              </a:rPr>
-              <a:t>Actividad Grupal</a:t>
-            </a:r>
-          </a:p>
-        </p:txBody>
-      </p:sp>
-      <p:pic>
-        <p:nvPicPr>
-          <p:cNvPr id="9" name="1 Imagen">
-            <a:extLst>
-              <a:ext uri="{FF2B5EF4-FFF2-40B4-BE49-F238E27FC236}">
-                <a16:creationId xmlns:a16="http://schemas.microsoft.com/office/drawing/2014/main" id="{1704A893-7FBF-4B15-9DA5-934B39E28BC8}"/>
-              </a:ext>
-            </a:extLst>
-          </p:cNvPr>
-          <p:cNvPicPr>
-            <a:picLocks noChangeAspect="1"/>
-          </p:cNvPicPr>
-          <p:nvPr/>
-        </p:nvPicPr>
-        <p:blipFill>
-          <a:blip r:embed="rId2">
-            <a:extLst>
-              <a:ext uri="{28A0092B-C50C-407E-A947-70E740481C1C}">
-                <a14:useLocalDpi xmlns:a14="http://schemas.microsoft.com/office/drawing/2010/main" val="0"/>
-              </a:ext>
-            </a:extLst>
-          </a:blip>
-          <a:stretch>
-            <a:fillRect/>
-          </a:stretch>
-        </p:blipFill>
-        <p:spPr>
-          <a:xfrm>
-            <a:off x="6660232" y="4859317"/>
-            <a:ext cx="1728192" cy="1603861"/>
-          </a:xfrm>
-          <a:prstGeom prst="rect">
-            <a:avLst/>
-          </a:prstGeom>
-        </p:spPr>
-      </p:pic>
-      <p:pic>
-        <p:nvPicPr>
-          <p:cNvPr id="3" name="Imagen 2">
-            <a:extLst>
-              <a:ext uri="{FF2B5EF4-FFF2-40B4-BE49-F238E27FC236}">
-                <a16:creationId xmlns:a16="http://schemas.microsoft.com/office/drawing/2014/main" id="{755FB17D-BF88-C516-94F3-4A9D397948BF}"/>
-              </a:ext>
-            </a:extLst>
-          </p:cNvPr>
-          <p:cNvPicPr>
-            <a:picLocks noChangeAspect="1"/>
-          </p:cNvPicPr>
-          <p:nvPr/>
-        </p:nvPicPr>
-        <p:blipFill>
-          <a:blip r:embed="rId3"/>
-          <a:stretch>
-            <a:fillRect/>
-          </a:stretch>
-        </p:blipFill>
-        <p:spPr>
-          <a:xfrm>
-            <a:off x="1259632" y="1582062"/>
-            <a:ext cx="4068742" cy="4068742"/>
-          </a:xfrm>
-          <a:prstGeom prst="rect">
-            <a:avLst/>
-          </a:prstGeom>
-        </p:spPr>
-      </p:pic>
-      <p:pic>
-        <p:nvPicPr>
-          <p:cNvPr id="7" name="Imagen 6">
-            <a:extLst>
-              <a:ext uri="{FF2B5EF4-FFF2-40B4-BE49-F238E27FC236}">
-                <a16:creationId xmlns:a16="http://schemas.microsoft.com/office/drawing/2014/main" id="{C694B1A2-D5A4-4257-8D47-78A012431437}"/>
-              </a:ext>
-            </a:extLst>
-          </p:cNvPr>
-          <p:cNvPicPr>
-            <a:picLocks noChangeAspect="1"/>
-          </p:cNvPicPr>
-          <p:nvPr/>
-        </p:nvPicPr>
-        <p:blipFill>
-          <a:blip r:embed="rId4"/>
-          <a:stretch>
-            <a:fillRect/>
-          </a:stretch>
-        </p:blipFill>
-        <p:spPr>
-          <a:xfrm>
-            <a:off x="6066656" y="1605155"/>
-            <a:ext cx="1152525" cy="2400300"/>
-          </a:xfrm>
-          <a:prstGeom prst="rect">
-            <a:avLst/>
-          </a:prstGeom>
-        </p:spPr>
-      </p:pic>
-    </p:spTree>
-    <p:extLst>
-      <p:ext uri="{BB962C8B-B14F-4D97-AF65-F5344CB8AC3E}">
-        <p14:creationId xmlns:p14="http://schemas.microsoft.com/office/powerpoint/2010/main" val="3713659776"/>
-      </p:ext>
-    </p:extLst>
-  </p:cSld>
-  <p:clrMapOvr>
-    <a:masterClrMapping/>
-  </p:clrMapOvr>
-</p:sld>
-</file>
-
-<file path=ppt/slides/slide19.xml><?xml version="1.0" encoding="utf-8"?>
-<p:sld xmlns:a="http://schemas.openxmlformats.org/drawingml/2006/main" xmlns:r="http://schemas.openxmlformats.org/officeDocument/2006/relationships" xmlns:p="http://schemas.openxmlformats.org/presentationml/2006/main">
-  <p:cSld>
-    <p:spTree>
-      <p:nvGrpSpPr>
-        <p:cNvPr id="1" name=""/>
-        <p:cNvGrpSpPr/>
-        <p:nvPr/>
-      </p:nvGrpSpPr>
-      <p:grpSpPr>
-        <a:xfrm>
-          <a:off x="0" y="0"/>
-          <a:ext cx="0" cy="0"/>
-          <a:chOff x="0" y="0"/>
-          <a:chExt cx="0" cy="0"/>
-        </a:xfrm>
-      </p:grpSpPr>
-      <p:sp>
-        <p:nvSpPr>
           <p:cNvPr id="2" name="object 2"/>
           <p:cNvSpPr/>
           <p:nvPr/>
@@ -14243,7 +7669,7 @@
         </p:spPr>
         <p:txBody>
           <a:bodyPr>
-            <a:normAutofit/>
+            <a:normAutofit fontScale="92500"/>
           </a:bodyPr>
           <a:lstStyle/>
           <a:p>
@@ -14283,7 +7709,7 @@
                 <a:latin typeface="Arial" pitchFamily="34" charset="0"/>
                 <a:cs typeface="Arial" pitchFamily="34" charset="0"/>
               </a:rPr>
-              <a:t>arreglo</a:t>
+              <a:t>arreglo (vector)</a:t>
             </a:r>
             <a:r>
               <a:rPr lang="es-ES_tradnl" sz="2400" dirty="0">
